--- a/output/wordlabs-fix-3day.pptx
+++ b/output/wordlabs-fix-3day.pptx
@@ -4240,7 +4240,7 @@
                 <a:ea typeface="Calibri" pitchFamily="34" charset="-122"/>
                 <a:cs typeface="Calibri" pitchFamily="34" charset="-120"/>
               </a:rPr>
-              <a:t>"to fasten, attach, or set"</a:t>
+              <a:t>"fasten, attach, make firm"</a:t>
             </a:r>
             <a:endParaRPr lang="en-US" sz="2200" dirty="0"/>
           </a:p>
@@ -5288,7 +5288,7 @@
                 <a:ea typeface="Calibri" pitchFamily="34" charset="-122"/>
                 <a:cs typeface="Calibri" pitchFamily="34" charset="-120"/>
               </a:rPr>
-              <a:t>Word Labs  •  wordlabs.app  •  Root: 'fix' = to fasten, attach, or set</a:t>
+              <a:t>Word Labs  •  wordlabs.app  •  Root: 'fix' = fasten, attach, make firm</a:t>
             </a:r>
             <a:endParaRPr lang="en-US" sz="800" dirty="0"/>
           </a:p>
@@ -5928,7 +5928,7 @@
                 <a:ea typeface="Calibri" pitchFamily="34" charset="-122"/>
                 <a:cs typeface="Calibri" pitchFamily="34" charset="-120"/>
               </a:rPr>
-              <a:t>Word Labs  •  wordlabs.app  •  Root: 'fix' = to fasten, attach, or set</a:t>
+              <a:t>Word Labs  •  wordlabs.app  •  Root: 'fix' = fasten, attach, make firm</a:t>
             </a:r>
             <a:endParaRPr lang="en-US" sz="800" dirty="0"/>
           </a:p>
@@ -6102,7 +6102,38 @@
                 <a:ea typeface="Calibri" pitchFamily="34" charset="-122"/>
                 <a:cs typeface="Calibri" pitchFamily="34" charset="-120"/>
               </a:rPr>
-              <a:t> in that long word?</a:t>
+              <a:t> in the word '</a:t>
+            </a:r>
+            <a:pPr algn="l" indent="0" marL="0">
+              <a:buNone/>
+            </a:pPr>
+            <a:r>
+              <a:rPr lang="en-US" sz="1800" b="1" dirty="0">
+                <a:solidFill>
+                  <a:srgbClr val="0D9488"/>
+                </a:solidFill>
+                <a:highlight>
+                  <a:srgbClr val="CCFBF1"/>
+                </a:highlight>
+                <a:latin typeface="Calibri" pitchFamily="34" charset="0"/>
+                <a:ea typeface="Calibri" pitchFamily="34" charset="-122"/>
+                <a:cs typeface="Calibri" pitchFamily="34" charset="-120"/>
+              </a:rPr>
+              <a:t>prefix</a:t>
+            </a:r>
+            <a:pPr algn="l" indent="0" marL="0">
+              <a:buNone/>
+            </a:pPr>
+            <a:r>
+              <a:rPr lang="en-US" sz="1800" dirty="0">
+                <a:solidFill>
+                  <a:srgbClr val="0F172A"/>
+                </a:solidFill>
+                <a:latin typeface="Calibri" pitchFamily="34" charset="0"/>
+                <a:ea typeface="Calibri" pitchFamily="34" charset="-122"/>
+                <a:cs typeface="Calibri" pitchFamily="34" charset="-120"/>
+              </a:rPr>
+              <a:t>ed'?</a:t>
             </a:r>
             <a:endParaRPr lang="en-US" sz="1800" dirty="0"/>
           </a:p>
@@ -6716,7 +6747,7 @@
                 <a:ea typeface="Calibri" pitchFamily="34" charset="-122"/>
                 <a:cs typeface="Calibri" pitchFamily="34" charset="-120"/>
               </a:rPr>
-              <a:t>Word Labs  •  wordlabs.app  •  Root: 'fix' = to fasten, attach, or set</a:t>
+              <a:t>Word Labs  •  wordlabs.app  •  Root: 'fix' = fasten, attach, make firm</a:t>
             </a:r>
             <a:endParaRPr lang="en-US" sz="800" dirty="0"/>
           </a:p>
@@ -7543,7 +7574,7 @@
                 <a:ea typeface="Calibri" pitchFamily="34" charset="-122"/>
                 <a:cs typeface="Calibri" pitchFamily="34" charset="-120"/>
               </a:rPr>
-              <a:t>Word Labs  •  wordlabs.app  •  Root: 'fix' = to fasten, attach, or set</a:t>
+              <a:t>Word Labs  •  wordlabs.app  •  Root: 'fix' = fasten, attach, make firm</a:t>
             </a:r>
             <a:endParaRPr lang="en-US" sz="800" dirty="0"/>
           </a:p>
@@ -7972,7 +8003,7 @@
                 <a:ea typeface="Calibri" pitchFamily="34" charset="-122"/>
                 <a:cs typeface="Calibri" pitchFamily="34" charset="-120"/>
               </a:rPr>
-              <a:t>to fasten or attach</a:t>
+              <a:t>fasten, attach</a:t>
             </a:r>
             <a:endParaRPr lang="en-US" sz="850" dirty="0"/>
           </a:p>
@@ -8528,7 +8559,7 @@
                 <a:ea typeface="Calibri" pitchFamily="34" charset="-122"/>
                 <a:cs typeface="Calibri" pitchFamily="34" charset="-120"/>
               </a:rPr>
-              <a:t>Word Labs  •  wordlabs.app  •  Root: 'fix' = to fasten, attach, or set</a:t>
+              <a:t>Word Labs  •  wordlabs.app  •  Root: 'fix' = fasten, attach, make firm</a:t>
             </a:r>
             <a:endParaRPr lang="en-US" sz="800" dirty="0"/>
           </a:p>
@@ -8957,7 +8988,7 @@
                 <a:ea typeface="Calibri" pitchFamily="34" charset="-122"/>
                 <a:cs typeface="Calibri" pitchFamily="34" charset="-120"/>
               </a:rPr>
-              <a:t>to fasten or attach</a:t>
+              <a:t>fasten, attach</a:t>
             </a:r>
             <a:endParaRPr lang="en-US" sz="850" dirty="0"/>
           </a:p>
@@ -9645,7 +9676,7 @@
                 <a:ea typeface="Calibri" pitchFamily="34" charset="-122"/>
                 <a:cs typeface="Calibri" pitchFamily="34" charset="-120"/>
               </a:rPr>
-              <a:t>Word Labs  •  wordlabs.app  •  Root: 'fix' = to fasten, attach, or set</a:t>
+              <a:t>Word Labs  •  wordlabs.app  •  Root: 'fix' = fasten, attach, make firm</a:t>
             </a:r>
             <a:endParaRPr lang="en-US" sz="800" dirty="0"/>
           </a:p>
@@ -10074,7 +10105,7 @@
                 <a:ea typeface="Calibri" pitchFamily="34" charset="-122"/>
                 <a:cs typeface="Calibri" pitchFamily="34" charset="-120"/>
               </a:rPr>
-              <a:t>to fasten or attach</a:t>
+              <a:t>fasten, attach</a:t>
             </a:r>
             <a:endParaRPr lang="en-US" sz="850" dirty="0"/>
           </a:p>
@@ -11158,7 +11189,7 @@
                 <a:ea typeface="Calibri" pitchFamily="34" charset="-122"/>
                 <a:cs typeface="Calibri" pitchFamily="34" charset="-120"/>
               </a:rPr>
-              <a:t>Word Labs  •  wordlabs.app  •  Root: 'fix' = to fasten, attach, or set</a:t>
+              <a:t>Word Labs  •  wordlabs.app  •  Root: 'fix' = fasten, attach, make firm</a:t>
             </a:r>
             <a:endParaRPr lang="en-US" sz="800" dirty="0"/>
           </a:p>
@@ -11985,7 +12016,7 @@
                 <a:ea typeface="Calibri" pitchFamily="34" charset="-122"/>
                 <a:cs typeface="Calibri" pitchFamily="34" charset="-120"/>
               </a:rPr>
-              <a:t>Word Labs  •  wordlabs.app  •  Root: 'fix' = to fasten, attach, or set</a:t>
+              <a:t>Word Labs  •  wordlabs.app  •  Root: 'fix' = fasten, attach, make firm</a:t>
             </a:r>
             <a:endParaRPr lang="en-US" sz="800" dirty="0"/>
           </a:p>
@@ -12453,7 +12484,7 @@
                 <a:ea typeface="Calibri" pitchFamily="34" charset="-122"/>
                 <a:cs typeface="Calibri" pitchFamily="34" charset="-120"/>
               </a:rPr>
-              <a:t>to fasten or attach</a:t>
+              <a:t>fasten, attach</a:t>
             </a:r>
             <a:endParaRPr lang="en-US" sz="850" dirty="0"/>
           </a:p>
@@ -13009,7 +13040,7 @@
                 <a:ea typeface="Calibri" pitchFamily="34" charset="-122"/>
                 <a:cs typeface="Calibri" pitchFamily="34" charset="-120"/>
               </a:rPr>
-              <a:t>Word Labs  •  wordlabs.app  •  Root: 'fix' = to fasten, attach, or set</a:t>
+              <a:t>Word Labs  •  wordlabs.app  •  Root: 'fix' = fasten, attach, make firm</a:t>
             </a:r>
             <a:endParaRPr lang="en-US" sz="800" dirty="0"/>
           </a:p>
@@ -13477,7 +13508,7 @@
                 <a:ea typeface="Calibri" pitchFamily="34" charset="-122"/>
                 <a:cs typeface="Calibri" pitchFamily="34" charset="-120"/>
               </a:rPr>
-              <a:t>to fasten or attach</a:t>
+              <a:t>fasten, attach</a:t>
             </a:r>
             <a:endParaRPr lang="en-US" sz="850" dirty="0"/>
           </a:p>
@@ -14074,7 +14105,7 @@
                 <a:ea typeface="Calibri" pitchFamily="34" charset="-122"/>
                 <a:cs typeface="Calibri" pitchFamily="34" charset="-120"/>
               </a:rPr>
-              <a:t>Root 'fix' — to fasten, attach, or set</a:t>
+              <a:t>Root 'fix' — fasten, attach, make firm</a:t>
             </a:r>
             <a:endParaRPr lang="en-US" sz="1600" dirty="0"/>
           </a:p>
@@ -14430,7 +14461,7 @@
                 <a:ea typeface="Calibri" pitchFamily="34" charset="-122"/>
                 <a:cs typeface="Calibri" pitchFamily="34" charset="-120"/>
               </a:rPr>
-              <a:t>Word Labs  •  wordlabs.app  •  Root: 'fix' = to fasten, attach, or set</a:t>
+              <a:t>Word Labs  •  wordlabs.app  •  Root: 'fix' = fasten, attach, make firm</a:t>
             </a:r>
             <a:endParaRPr lang="en-US" sz="800" dirty="0"/>
           </a:p>
@@ -14898,7 +14929,7 @@
                 <a:ea typeface="Calibri" pitchFamily="34" charset="-122"/>
                 <a:cs typeface="Calibri" pitchFamily="34" charset="-120"/>
               </a:rPr>
-              <a:t>to fasten or attach</a:t>
+              <a:t>fasten, attach</a:t>
             </a:r>
             <a:endParaRPr lang="en-US" sz="850" dirty="0"/>
           </a:p>
@@ -16198,7 +16229,7 @@
                 <a:ea typeface="Calibri" pitchFamily="34" charset="-122"/>
                 <a:cs typeface="Calibri" pitchFamily="34" charset="-120"/>
               </a:rPr>
-              <a:t>Word Labs  •  wordlabs.app  •  Root: 'fix' = to fasten, attach, or set</a:t>
+              <a:t>Word Labs  •  wordlabs.app  •  Root: 'fix' = fasten, attach, make firm</a:t>
             </a:r>
             <a:endParaRPr lang="en-US" sz="800" dirty="0"/>
           </a:p>
@@ -16532,7 +16563,7 @@
                 <a:ea typeface="Trebuchet MS" pitchFamily="34" charset="-122"/>
                 <a:cs typeface="Trebuchet MS" pitchFamily="34" charset="-120"/>
               </a:rPr>
-              <a:t>2</a:t>
+              <a:t>1</a:t>
             </a:r>
             <a:pPr algn="ctr" indent="0" marL="0">
               <a:buNone/>
@@ -16546,7 +16577,7 @@
                 <a:ea typeface="Trebuchet MS" pitchFamily="34" charset="-122"/>
                 <a:cs typeface="Trebuchet MS" pitchFamily="34" charset="-120"/>
               </a:rPr>
-              <a:t>  punctuation marks</a:t>
+              <a:t>  punctuation mark</a:t>
             </a:r>
             <a:endParaRPr lang="en-US" sz="2800" dirty="0"/>
           </a:p>
@@ -16838,7 +16869,7 @@
                 <a:ea typeface="Calibri" pitchFamily="34" charset="-122"/>
                 <a:cs typeface="Calibri" pitchFamily="34" charset="-120"/>
               </a:rPr>
-              <a:t>Word Labs  •  wordlabs.app  •  Root: 'fix' = to fasten, attach, or set</a:t>
+              <a:t>Word Labs  •  wordlabs.app  •  Root: 'fix' = fasten, attach, make firm</a:t>
             </a:r>
             <a:endParaRPr lang="en-US" sz="800" dirty="0"/>
           </a:p>
@@ -16950,7 +16981,7 @@
                 <a:ea typeface="Calibri" pitchFamily="34" charset="-122"/>
                 <a:cs typeface="Calibri" pitchFamily="34" charset="-120"/>
               </a:rPr>
-              <a:t>The teacher asked us to identify the </a:t>
+              <a:t>The scientist was </a:t>
             </a:r>
             <a:pPr algn="l" indent="0" marL="0">
               <a:buNone/>
@@ -16967,7 +16998,7 @@
                 <a:ea typeface="Calibri" pitchFamily="34" charset="-122"/>
                 <a:cs typeface="Calibri" pitchFamily="34" charset="-120"/>
               </a:rPr>
-              <a:t>affix</a:t>
+              <a:t>transfixed</a:t>
             </a:r>
             <a:pPr algn="l" indent="0" marL="0">
               <a:buNone/>
@@ -16981,7 +17012,7 @@
                 <a:ea typeface="Calibri" pitchFamily="34" charset="-122"/>
                 <a:cs typeface="Calibri" pitchFamily="34" charset="-120"/>
               </a:rPr>
-              <a:t>, find the </a:t>
+              <a:t> by the </a:t>
             </a:r>
             <a:pPr algn="l" indent="0" marL="0">
               <a:buNone/>
@@ -16998,7 +17029,7 @@
                 <a:ea typeface="Calibri" pitchFamily="34" charset="-122"/>
                 <a:cs typeface="Calibri" pitchFamily="34" charset="-120"/>
               </a:rPr>
-              <a:t>prefix</a:t>
+              <a:t>affixed</a:t>
             </a:r>
             <a:pPr algn="l" indent="0" marL="0">
               <a:buNone/>
@@ -17012,7 +17043,7 @@
                 <a:ea typeface="Calibri" pitchFamily="34" charset="-122"/>
                 <a:cs typeface="Calibri" pitchFamily="34" charset="-120"/>
               </a:rPr>
-              <a:t>, and then locate the </a:t>
+              <a:t> label, which showed the </a:t>
             </a:r>
             <a:pPr algn="l" indent="0" marL="0">
               <a:buNone/>
@@ -17029,7 +17060,7 @@
                 <a:ea typeface="Calibri" pitchFamily="34" charset="-122"/>
                 <a:cs typeface="Calibri" pitchFamily="34" charset="-120"/>
               </a:rPr>
-              <a:t>suffix</a:t>
+              <a:t>fixation</a:t>
             </a:r>
             <a:pPr algn="l" indent="0" marL="0">
               <a:buNone/>
@@ -17043,7 +17074,7 @@
                 <a:ea typeface="Calibri" pitchFamily="34" charset="-122"/>
                 <a:cs typeface="Calibri" pitchFamily="34" charset="-120"/>
               </a:rPr>
-              <a:t> in each word.</a:t>
+              <a:t> of the chemical to the surface.</a:t>
             </a:r>
             <a:endParaRPr lang="en-US" sz="1800" dirty="0"/>
           </a:p>
@@ -17198,7 +17229,7 @@
                 <a:ea typeface="Trebuchet MS" pitchFamily="34" charset="-122"/>
                 <a:cs typeface="Trebuchet MS" pitchFamily="34" charset="-120"/>
               </a:rPr>
-              <a:t>affix</a:t>
+              <a:t>transfixed</a:t>
             </a:r>
             <a:endParaRPr lang="en-US" sz="1400" dirty="0"/>
           </a:p>
@@ -17326,7 +17357,7 @@
                 <a:ea typeface="Trebuchet MS" pitchFamily="34" charset="-122"/>
                 <a:cs typeface="Trebuchet MS" pitchFamily="34" charset="-120"/>
               </a:rPr>
-              <a:t>prefix</a:t>
+              <a:t>affixed</a:t>
             </a:r>
             <a:endParaRPr lang="en-US" sz="1400" dirty="0"/>
           </a:p>
@@ -17454,7 +17485,7 @@
                 <a:ea typeface="Trebuchet MS" pitchFamily="34" charset="-122"/>
                 <a:cs typeface="Trebuchet MS" pitchFamily="34" charset="-120"/>
               </a:rPr>
-              <a:t>suffix</a:t>
+              <a:t>fixation</a:t>
             </a:r>
             <a:endParaRPr lang="en-US" sz="1400" dirty="0"/>
           </a:p>
@@ -17785,7 +17816,7 @@
                 <a:ea typeface="Calibri" pitchFamily="34" charset="-122"/>
                 <a:cs typeface="Calibri" pitchFamily="34" charset="-120"/>
               </a:rPr>
-              <a:t>Word Labs  •  wordlabs.app  •  Root: 'fix' = to fasten, attach, or set</a:t>
+              <a:t>Word Labs  •  wordlabs.app  •  Root: 'fix' = fasten, attach, make firm</a:t>
             </a:r>
             <a:endParaRPr lang="en-US" sz="800" dirty="0"/>
           </a:p>
@@ -17924,7 +17955,7 @@
                 <a:ea typeface="Trebuchet MS" pitchFamily="34" charset="-122"/>
                 <a:cs typeface="Trebuchet MS" pitchFamily="34" charset="-120"/>
               </a:rPr>
-              <a:t>affix</a:t>
+              <a:t>transfixed</a:t>
             </a:r>
             <a:endParaRPr lang="en-US" sz="2800" dirty="0"/>
           </a:p>
@@ -18612,7 +18643,7 @@
                 <a:ea typeface="Calibri" pitchFamily="34" charset="-122"/>
                 <a:cs typeface="Calibri" pitchFamily="34" charset="-120"/>
               </a:rPr>
-              <a:t>Word Labs  •  wordlabs.app  •  Root: 'fix' = to fasten, attach, or set</a:t>
+              <a:t>Word Labs  •  wordlabs.app  •  Root: 'fix' = fasten, attach, make firm</a:t>
             </a:r>
             <a:endParaRPr lang="en-US" sz="800" dirty="0"/>
           </a:p>
@@ -18751,7 +18782,7 @@
                 <a:ea typeface="Trebuchet MS" pitchFamily="34" charset="-122"/>
                 <a:cs typeface="Trebuchet MS" pitchFamily="34" charset="-120"/>
               </a:rPr>
-              <a:t>affix</a:t>
+              <a:t>transfixed</a:t>
             </a:r>
             <a:endParaRPr lang="en-US" sz="2800" dirty="0"/>
           </a:p>
@@ -18831,7 +18862,7 @@
         </p:nvSpPr>
         <p:spPr>
           <a:xfrm>
-            <a:off x="2938272" y="2258568"/>
+            <a:off x="2221992" y="2258568"/>
             <a:ext cx="1828800" cy="292608"/>
           </a:xfrm>
           <a:prstGeom prst="rect">
@@ -18865,7 +18896,7 @@
         </p:nvSpPr>
         <p:spPr>
           <a:xfrm>
-            <a:off x="2938272" y="2258568"/>
+            <a:off x="2221992" y="2258568"/>
             <a:ext cx="1828800" cy="292608"/>
           </a:xfrm>
           <a:prstGeom prst="rect">
@@ -18890,7 +18921,7 @@
                 <a:ea typeface="Trebuchet MS" pitchFamily="34" charset="-122"/>
                 <a:cs typeface="Trebuchet MS" pitchFamily="34" charset="-120"/>
               </a:rPr>
-              <a:t>af</a:t>
+              <a:t>trans</a:t>
             </a:r>
             <a:endParaRPr lang="en-US" sz="1300" dirty="0"/>
           </a:p>
@@ -18904,7 +18935,7 @@
         </p:nvSpPr>
         <p:spPr>
           <a:xfrm>
-            <a:off x="2938272" y="2569464"/>
+            <a:off x="2221992" y="2569464"/>
             <a:ext cx="1828800" cy="201168"/>
           </a:xfrm>
           <a:prstGeom prst="rect">
@@ -18929,7 +18960,7 @@
                 <a:ea typeface="Calibri" pitchFamily="34" charset="-122"/>
                 <a:cs typeface="Calibri" pitchFamily="34" charset="-120"/>
               </a:rPr>
-              <a:t>to, towards</a:t>
+              <a:t>across, through</a:t>
             </a:r>
             <a:endParaRPr lang="en-US" sz="850" dirty="0"/>
           </a:p>
@@ -18937,52 +18968,13 @@
       </p:sp>
       <p:sp>
         <p:nvSpPr>
-          <p:cNvPr id="19" name="Text 17"/>
-          <p:cNvSpPr/>
-          <p:nvPr/>
-        </p:nvSpPr>
-        <p:spPr>
-          <a:xfrm>
-            <a:off x="2938272" y="2752344"/>
-            <a:ext cx="1828800" cy="182880"/>
-          </a:xfrm>
-          <a:prstGeom prst="rect">
-            <a:avLst/>
-          </a:prstGeom>
-          <a:noFill/>
-          <a:ln/>
-        </p:spPr>
-        <p:txBody>
-          <a:bodyPr wrap="square" lIns="0" tIns="0" rIns="0" bIns="0" rtlCol="0" anchor="t"/>
-          <a:lstStyle/>
-          <a:p>
-            <a:pPr algn="ctr" indent="0" marL="0">
-              <a:buNone/>
-            </a:pPr>
-            <a:r>
-              <a:rPr lang="en-US" sz="700" i="1" dirty="0">
-                <a:solidFill>
-                  <a:srgbClr val="94A3B8"/>
-                </a:solidFill>
-                <a:latin typeface="Calibri" pitchFamily="34" charset="0"/>
-                <a:ea typeface="Calibri" pitchFamily="34" charset="-122"/>
-                <a:cs typeface="Calibri" pitchFamily="34" charset="-120"/>
-              </a:rPr>
-              <a:t>ad → af before 'f'</a:t>
-            </a:r>
-            <a:endParaRPr lang="en-US" sz="700" dirty="0"/>
-          </a:p>
-        </p:txBody>
-      </p:sp>
-      <p:sp>
-        <p:nvSpPr>
-          <p:cNvPr id="20" name="Shape 18"/>
-          <p:cNvSpPr/>
-          <p:nvPr/>
-        </p:nvSpPr>
-        <p:spPr>
-          <a:xfrm>
-            <a:off x="5803392" y="2258568"/>
+          <p:cNvPr id="19" name="Shape 17"/>
+          <p:cNvSpPr/>
+          <p:nvPr/>
+        </p:nvSpPr>
+        <p:spPr>
+          <a:xfrm>
+            <a:off x="4370832" y="2258568"/>
             <a:ext cx="1828800" cy="292608"/>
           </a:xfrm>
           <a:prstGeom prst="rect">
@@ -19010,13 +19002,13 @@
       </p:sp>
       <p:sp>
         <p:nvSpPr>
-          <p:cNvPr id="21" name="Text 19"/>
-          <p:cNvSpPr/>
-          <p:nvPr/>
-        </p:nvSpPr>
-        <p:spPr>
-          <a:xfrm>
-            <a:off x="5803392" y="2258568"/>
+          <p:cNvPr id="20" name="Text 18"/>
+          <p:cNvSpPr/>
+          <p:nvPr/>
+        </p:nvSpPr>
+        <p:spPr>
+          <a:xfrm>
+            <a:off x="4370832" y="2258568"/>
             <a:ext cx="1828800" cy="292608"/>
           </a:xfrm>
           <a:prstGeom prst="rect">
@@ -19049,13 +19041,13 @@
       </p:sp>
       <p:sp>
         <p:nvSpPr>
-          <p:cNvPr id="22" name="Text 20"/>
-          <p:cNvSpPr/>
-          <p:nvPr/>
-        </p:nvSpPr>
-        <p:spPr>
-          <a:xfrm>
-            <a:off x="5803392" y="2569464"/>
+          <p:cNvPr id="21" name="Text 19"/>
+          <p:cNvSpPr/>
+          <p:nvPr/>
+        </p:nvSpPr>
+        <p:spPr>
+          <a:xfrm>
+            <a:off x="4370832" y="2569464"/>
             <a:ext cx="1828800" cy="201168"/>
           </a:xfrm>
           <a:prstGeom prst="rect">
@@ -19080,7 +19072,7 @@
                 <a:ea typeface="Calibri" pitchFamily="34" charset="-122"/>
                 <a:cs typeface="Calibri" pitchFamily="34" charset="-120"/>
               </a:rPr>
-              <a:t>to fasten or attach</a:t>
+              <a:t>fasten, attach</a:t>
             </a:r>
             <a:endParaRPr lang="en-US" sz="850" dirty="0"/>
           </a:p>
@@ -19088,7 +19080,119 @@
       </p:sp>
       <p:sp>
         <p:nvSpPr>
-          <p:cNvPr id="23" name="Shape 21"/>
+          <p:cNvPr id="22" name="Shape 20"/>
+          <p:cNvSpPr/>
+          <p:nvPr/>
+        </p:nvSpPr>
+        <p:spPr>
+          <a:xfrm>
+            <a:off x="6519672" y="2258568"/>
+            <a:ext cx="1828800" cy="292608"/>
+          </a:xfrm>
+          <a:prstGeom prst="rect">
+            <a:avLst>
+              <a:gd name="adj" fmla="val 25000"/>
+            </a:avLst>
+          </a:prstGeom>
+          <a:solidFill>
+            <a:srgbClr val="FCE7F3"/>
+          </a:solidFill>
+          <a:ln w="19050">
+            <a:solidFill>
+              <a:srgbClr val="DB2777"/>
+            </a:solidFill>
+            <a:prstDash val="solid"/>
+          </a:ln>
+          <a:effectLst>
+            <a:outerShdw sx="100000" sy="100000" kx="0" ky="0" algn="bl" rotWithShape="0" blurRad="101600" dist="38100" dir="8100000">
+              <a:srgbClr val="000000">
+                <a:alpha val="12000"/>
+              </a:srgbClr>
+            </a:outerShdw>
+          </a:effectLst>
+        </p:spPr>
+      </p:sp>
+      <p:sp>
+        <p:nvSpPr>
+          <p:cNvPr id="23" name="Text 21"/>
+          <p:cNvSpPr/>
+          <p:nvPr/>
+        </p:nvSpPr>
+        <p:spPr>
+          <a:xfrm>
+            <a:off x="6519672" y="2258568"/>
+            <a:ext cx="1828800" cy="292608"/>
+          </a:xfrm>
+          <a:prstGeom prst="rect">
+            <a:avLst/>
+          </a:prstGeom>
+          <a:noFill/>
+          <a:ln/>
+        </p:spPr>
+        <p:txBody>
+          <a:bodyPr wrap="square" lIns="0" tIns="0" rIns="0" bIns="0" rtlCol="0" anchor="ctr"/>
+          <a:lstStyle/>
+          <a:p>
+            <a:pPr algn="ctr" indent="0" marL="0">
+              <a:buNone/>
+            </a:pPr>
+            <a:r>
+              <a:rPr lang="en-US" sz="1300" b="1" dirty="0">
+                <a:solidFill>
+                  <a:srgbClr val="9D174D"/>
+                </a:solidFill>
+                <a:latin typeface="Trebuchet MS" pitchFamily="34" charset="0"/>
+                <a:ea typeface="Trebuchet MS" pitchFamily="34" charset="-122"/>
+                <a:cs typeface="Trebuchet MS" pitchFamily="34" charset="-120"/>
+              </a:rPr>
+              <a:t>ed</a:t>
+            </a:r>
+            <a:endParaRPr lang="en-US" sz="1300" dirty="0"/>
+          </a:p>
+        </p:txBody>
+      </p:sp>
+      <p:sp>
+        <p:nvSpPr>
+          <p:cNvPr id="24" name="Text 22"/>
+          <p:cNvSpPr/>
+          <p:nvPr/>
+        </p:nvSpPr>
+        <p:spPr>
+          <a:xfrm>
+            <a:off x="6519672" y="2569464"/>
+            <a:ext cx="1828800" cy="201168"/>
+          </a:xfrm>
+          <a:prstGeom prst="rect">
+            <a:avLst/>
+          </a:prstGeom>
+          <a:noFill/>
+          <a:ln/>
+        </p:spPr>
+        <p:txBody>
+          <a:bodyPr wrap="square" lIns="0" tIns="0" rIns="0" bIns="0" rtlCol="0" anchor="t"/>
+          <a:lstStyle/>
+          <a:p>
+            <a:pPr algn="ctr" indent="0" marL="0">
+              <a:buNone/>
+            </a:pPr>
+            <a:r>
+              <a:rPr lang="en-US" sz="850" dirty="0">
+                <a:solidFill>
+                  <a:srgbClr val="475569"/>
+                </a:solidFill>
+                <a:latin typeface="Calibri" pitchFamily="34" charset="0"/>
+                <a:ea typeface="Calibri" pitchFamily="34" charset="-122"/>
+                <a:cs typeface="Calibri" pitchFamily="34" charset="-120"/>
+              </a:rPr>
+              <a:t>past tense</a:t>
+            </a:r>
+            <a:endParaRPr lang="en-US" sz="850" dirty="0"/>
+          </a:p>
+        </p:txBody>
+      </p:sp>
+      <p:sp>
+        <p:nvSpPr>
+          <p:cNvPr id="25" name="Shape 23"/>
           <p:cNvSpPr/>
           <p:nvPr/>
         </p:nvSpPr>
@@ -19115,7 +19219,7 @@
       </p:sp>
       <p:sp>
         <p:nvSpPr>
-          <p:cNvPr id="24" name="Text 22"/>
+          <p:cNvPr id="26" name="Text 24"/>
           <p:cNvSpPr/>
           <p:nvPr/>
         </p:nvSpPr>
@@ -19154,7 +19258,7 @@
       </p:sp>
       <p:sp>
         <p:nvSpPr>
-          <p:cNvPr id="25" name="Shape 23"/>
+          <p:cNvPr id="27" name="Shape 25"/>
           <p:cNvSpPr/>
           <p:nvPr/>
         </p:nvSpPr>
@@ -19181,7 +19285,7 @@
       </p:sp>
       <p:sp>
         <p:nvSpPr>
-          <p:cNvPr id="26" name="Text 24"/>
+          <p:cNvPr id="28" name="Text 26"/>
           <p:cNvSpPr/>
           <p:nvPr/>
         </p:nvSpPr>
@@ -19220,7 +19324,7 @@
       </p:sp>
       <p:sp>
         <p:nvSpPr>
-          <p:cNvPr id="27" name="Shape 25"/>
+          <p:cNvPr id="29" name="Shape 27"/>
           <p:cNvSpPr/>
           <p:nvPr/>
         </p:nvSpPr>
@@ -19247,7 +19351,7 @@
       </p:sp>
       <p:sp>
         <p:nvSpPr>
-          <p:cNvPr id="28" name="Text 26"/>
+          <p:cNvPr id="30" name="Text 28"/>
           <p:cNvSpPr/>
           <p:nvPr/>
         </p:nvSpPr>
@@ -19286,7 +19390,7 @@
       </p:sp>
       <p:sp>
         <p:nvSpPr>
-          <p:cNvPr id="29" name="Shape 27"/>
+          <p:cNvPr id="31" name="Shape 29"/>
           <p:cNvSpPr/>
           <p:nvPr/>
         </p:nvSpPr>
@@ -19313,7 +19417,7 @@
       </p:sp>
       <p:sp>
         <p:nvSpPr>
-          <p:cNvPr id="30" name="Text 28"/>
+          <p:cNvPr id="32" name="Text 30"/>
           <p:cNvSpPr/>
           <p:nvPr/>
         </p:nvSpPr>
@@ -19636,7 +19740,7 @@
                 <a:ea typeface="Calibri" pitchFamily="34" charset="-122"/>
                 <a:cs typeface="Calibri" pitchFamily="34" charset="-120"/>
               </a:rPr>
-              <a:t>Word Labs  •  wordlabs.app  •  Root: 'fix' = to fasten, attach, or set</a:t>
+              <a:t>Word Labs  •  wordlabs.app  •  Root: 'fix' = fasten, attach, make firm</a:t>
             </a:r>
             <a:endParaRPr lang="en-US" sz="800" dirty="0"/>
           </a:p>
@@ -19775,7 +19879,7 @@
                 <a:ea typeface="Trebuchet MS" pitchFamily="34" charset="-122"/>
                 <a:cs typeface="Trebuchet MS" pitchFamily="34" charset="-120"/>
               </a:rPr>
-              <a:t>affix</a:t>
+              <a:t>transfixed</a:t>
             </a:r>
             <a:endParaRPr lang="en-US" sz="2800" dirty="0"/>
           </a:p>
@@ -19855,7 +19959,7 @@
         </p:nvSpPr>
         <p:spPr>
           <a:xfrm>
-            <a:off x="2938272" y="2258568"/>
+            <a:off x="2221992" y="2258568"/>
             <a:ext cx="1828800" cy="292608"/>
           </a:xfrm>
           <a:prstGeom prst="rect">
@@ -19889,7 +19993,7 @@
         </p:nvSpPr>
         <p:spPr>
           <a:xfrm>
-            <a:off x="2938272" y="2258568"/>
+            <a:off x="2221992" y="2258568"/>
             <a:ext cx="1828800" cy="292608"/>
           </a:xfrm>
           <a:prstGeom prst="rect">
@@ -19914,7 +20018,7 @@
                 <a:ea typeface="Trebuchet MS" pitchFamily="34" charset="-122"/>
                 <a:cs typeface="Trebuchet MS" pitchFamily="34" charset="-120"/>
               </a:rPr>
-              <a:t>af</a:t>
+              <a:t>trans</a:t>
             </a:r>
             <a:endParaRPr lang="en-US" sz="1300" dirty="0"/>
           </a:p>
@@ -19928,7 +20032,7 @@
         </p:nvSpPr>
         <p:spPr>
           <a:xfrm>
-            <a:off x="2938272" y="2569464"/>
+            <a:off x="2221992" y="2569464"/>
             <a:ext cx="1828800" cy="201168"/>
           </a:xfrm>
           <a:prstGeom prst="rect">
@@ -19953,7 +20057,7 @@
                 <a:ea typeface="Calibri" pitchFamily="34" charset="-122"/>
                 <a:cs typeface="Calibri" pitchFamily="34" charset="-120"/>
               </a:rPr>
-              <a:t>to, towards</a:t>
+              <a:t>across, through</a:t>
             </a:r>
             <a:endParaRPr lang="en-US" sz="850" dirty="0"/>
           </a:p>
@@ -19961,52 +20065,13 @@
       </p:sp>
       <p:sp>
         <p:nvSpPr>
-          <p:cNvPr id="19" name="Text 17"/>
-          <p:cNvSpPr/>
-          <p:nvPr/>
-        </p:nvSpPr>
-        <p:spPr>
-          <a:xfrm>
-            <a:off x="2938272" y="2752344"/>
-            <a:ext cx="1828800" cy="182880"/>
-          </a:xfrm>
-          <a:prstGeom prst="rect">
-            <a:avLst/>
-          </a:prstGeom>
-          <a:noFill/>
-          <a:ln/>
-        </p:spPr>
-        <p:txBody>
-          <a:bodyPr wrap="square" lIns="0" tIns="0" rIns="0" bIns="0" rtlCol="0" anchor="t"/>
-          <a:lstStyle/>
-          <a:p>
-            <a:pPr algn="ctr" indent="0" marL="0">
-              <a:buNone/>
-            </a:pPr>
-            <a:r>
-              <a:rPr lang="en-US" sz="700" i="1" dirty="0">
-                <a:solidFill>
-                  <a:srgbClr val="94A3B8"/>
-                </a:solidFill>
-                <a:latin typeface="Calibri" pitchFamily="34" charset="0"/>
-                <a:ea typeface="Calibri" pitchFamily="34" charset="-122"/>
-                <a:cs typeface="Calibri" pitchFamily="34" charset="-120"/>
-              </a:rPr>
-              <a:t>ad → af before 'f'</a:t>
-            </a:r>
-            <a:endParaRPr lang="en-US" sz="700" dirty="0"/>
-          </a:p>
-        </p:txBody>
-      </p:sp>
-      <p:sp>
-        <p:nvSpPr>
-          <p:cNvPr id="20" name="Shape 18"/>
-          <p:cNvSpPr/>
-          <p:nvPr/>
-        </p:nvSpPr>
-        <p:spPr>
-          <a:xfrm>
-            <a:off x="5803392" y="2258568"/>
+          <p:cNvPr id="19" name="Shape 17"/>
+          <p:cNvSpPr/>
+          <p:nvPr/>
+        </p:nvSpPr>
+        <p:spPr>
+          <a:xfrm>
+            <a:off x="4370832" y="2258568"/>
             <a:ext cx="1828800" cy="292608"/>
           </a:xfrm>
           <a:prstGeom prst="rect">
@@ -20034,13 +20099,13 @@
       </p:sp>
       <p:sp>
         <p:nvSpPr>
-          <p:cNvPr id="21" name="Text 19"/>
-          <p:cNvSpPr/>
-          <p:nvPr/>
-        </p:nvSpPr>
-        <p:spPr>
-          <a:xfrm>
-            <a:off x="5803392" y="2258568"/>
+          <p:cNvPr id="20" name="Text 18"/>
+          <p:cNvSpPr/>
+          <p:nvPr/>
+        </p:nvSpPr>
+        <p:spPr>
+          <a:xfrm>
+            <a:off x="4370832" y="2258568"/>
             <a:ext cx="1828800" cy="292608"/>
           </a:xfrm>
           <a:prstGeom prst="rect">
@@ -20073,13 +20138,13 @@
       </p:sp>
       <p:sp>
         <p:nvSpPr>
-          <p:cNvPr id="22" name="Text 20"/>
-          <p:cNvSpPr/>
-          <p:nvPr/>
-        </p:nvSpPr>
-        <p:spPr>
-          <a:xfrm>
-            <a:off x="5803392" y="2569464"/>
+          <p:cNvPr id="21" name="Text 19"/>
+          <p:cNvSpPr/>
+          <p:nvPr/>
+        </p:nvSpPr>
+        <p:spPr>
+          <a:xfrm>
+            <a:off x="4370832" y="2569464"/>
             <a:ext cx="1828800" cy="201168"/>
           </a:xfrm>
           <a:prstGeom prst="rect">
@@ -20104,7 +20169,7 @@
                 <a:ea typeface="Calibri" pitchFamily="34" charset="-122"/>
                 <a:cs typeface="Calibri" pitchFamily="34" charset="-120"/>
               </a:rPr>
-              <a:t>to fasten or attach</a:t>
+              <a:t>fasten, attach</a:t>
             </a:r>
             <a:endParaRPr lang="en-US" sz="850" dirty="0"/>
           </a:p>
@@ -20112,7 +20177,119 @@
       </p:sp>
       <p:sp>
         <p:nvSpPr>
-          <p:cNvPr id="23" name="Shape 21"/>
+          <p:cNvPr id="22" name="Shape 20"/>
+          <p:cNvSpPr/>
+          <p:nvPr/>
+        </p:nvSpPr>
+        <p:spPr>
+          <a:xfrm>
+            <a:off x="6519672" y="2258568"/>
+            <a:ext cx="1828800" cy="292608"/>
+          </a:xfrm>
+          <a:prstGeom prst="rect">
+            <a:avLst>
+              <a:gd name="adj" fmla="val 25000"/>
+            </a:avLst>
+          </a:prstGeom>
+          <a:solidFill>
+            <a:srgbClr val="FCE7F3"/>
+          </a:solidFill>
+          <a:ln w="19050">
+            <a:solidFill>
+              <a:srgbClr val="DB2777"/>
+            </a:solidFill>
+            <a:prstDash val="solid"/>
+          </a:ln>
+          <a:effectLst>
+            <a:outerShdw sx="100000" sy="100000" kx="0" ky="0" algn="bl" rotWithShape="0" blurRad="101600" dist="38100" dir="8100000">
+              <a:srgbClr val="000000">
+                <a:alpha val="12000"/>
+              </a:srgbClr>
+            </a:outerShdw>
+          </a:effectLst>
+        </p:spPr>
+      </p:sp>
+      <p:sp>
+        <p:nvSpPr>
+          <p:cNvPr id="23" name="Text 21"/>
+          <p:cNvSpPr/>
+          <p:nvPr/>
+        </p:nvSpPr>
+        <p:spPr>
+          <a:xfrm>
+            <a:off x="6519672" y="2258568"/>
+            <a:ext cx="1828800" cy="292608"/>
+          </a:xfrm>
+          <a:prstGeom prst="rect">
+            <a:avLst/>
+          </a:prstGeom>
+          <a:noFill/>
+          <a:ln/>
+        </p:spPr>
+        <p:txBody>
+          <a:bodyPr wrap="square" lIns="0" tIns="0" rIns="0" bIns="0" rtlCol="0" anchor="ctr"/>
+          <a:lstStyle/>
+          <a:p>
+            <a:pPr algn="ctr" indent="0" marL="0">
+              <a:buNone/>
+            </a:pPr>
+            <a:r>
+              <a:rPr lang="en-US" sz="1300" b="1" dirty="0">
+                <a:solidFill>
+                  <a:srgbClr val="9D174D"/>
+                </a:solidFill>
+                <a:latin typeface="Trebuchet MS" pitchFamily="34" charset="0"/>
+                <a:ea typeface="Trebuchet MS" pitchFamily="34" charset="-122"/>
+                <a:cs typeface="Trebuchet MS" pitchFamily="34" charset="-120"/>
+              </a:rPr>
+              <a:t>ed</a:t>
+            </a:r>
+            <a:endParaRPr lang="en-US" sz="1300" dirty="0"/>
+          </a:p>
+        </p:txBody>
+      </p:sp>
+      <p:sp>
+        <p:nvSpPr>
+          <p:cNvPr id="24" name="Text 22"/>
+          <p:cNvSpPr/>
+          <p:nvPr/>
+        </p:nvSpPr>
+        <p:spPr>
+          <a:xfrm>
+            <a:off x="6519672" y="2569464"/>
+            <a:ext cx="1828800" cy="201168"/>
+          </a:xfrm>
+          <a:prstGeom prst="rect">
+            <a:avLst/>
+          </a:prstGeom>
+          <a:noFill/>
+          <a:ln/>
+        </p:spPr>
+        <p:txBody>
+          <a:bodyPr wrap="square" lIns="0" tIns="0" rIns="0" bIns="0" rtlCol="0" anchor="t"/>
+          <a:lstStyle/>
+          <a:p>
+            <a:pPr algn="ctr" indent="0" marL="0">
+              <a:buNone/>
+            </a:pPr>
+            <a:r>
+              <a:rPr lang="en-US" sz="850" dirty="0">
+                <a:solidFill>
+                  <a:srgbClr val="475569"/>
+                </a:solidFill>
+                <a:latin typeface="Calibri" pitchFamily="34" charset="0"/>
+                <a:ea typeface="Calibri" pitchFamily="34" charset="-122"/>
+                <a:cs typeface="Calibri" pitchFamily="34" charset="-120"/>
+              </a:rPr>
+              <a:t>past tense</a:t>
+            </a:r>
+            <a:endParaRPr lang="en-US" sz="850" dirty="0"/>
+          </a:p>
+        </p:txBody>
+      </p:sp>
+      <p:sp>
+        <p:nvSpPr>
+          <p:cNvPr id="25" name="Shape 23"/>
           <p:cNvSpPr/>
           <p:nvPr/>
         </p:nvSpPr>
@@ -20139,7 +20316,7 @@
       </p:sp>
       <p:sp>
         <p:nvSpPr>
-          <p:cNvPr id="24" name="Text 22"/>
+          <p:cNvPr id="26" name="Text 24"/>
           <p:cNvSpPr/>
           <p:nvPr/>
         </p:nvSpPr>
@@ -20178,7 +20355,7 @@
       </p:sp>
       <p:sp>
         <p:nvSpPr>
-          <p:cNvPr id="25" name="Shape 23"/>
+          <p:cNvPr id="27" name="Shape 25"/>
           <p:cNvSpPr/>
           <p:nvPr/>
         </p:nvSpPr>
@@ -20205,7 +20382,7 @@
       </p:sp>
       <p:sp>
         <p:nvSpPr>
-          <p:cNvPr id="26" name="Shape 24"/>
+          <p:cNvPr id="28" name="Shape 26"/>
           <p:cNvSpPr/>
           <p:nvPr/>
         </p:nvSpPr>
@@ -20232,7 +20409,7 @@
       </p:sp>
       <p:sp>
         <p:nvSpPr>
-          <p:cNvPr id="27" name="Text 25"/>
+          <p:cNvPr id="29" name="Text 27"/>
           <p:cNvSpPr/>
           <p:nvPr/>
         </p:nvSpPr>
@@ -20263,7 +20440,7 @@
                 <a:ea typeface="Trebuchet MS" pitchFamily="34" charset="-122"/>
                 <a:cs typeface="Trebuchet MS" pitchFamily="34" charset="-120"/>
               </a:rPr>
-              <a:t>af</a:t>
+              <a:t>trans</a:t>
             </a:r>
             <a:endParaRPr lang="en-US" sz="1400" dirty="0"/>
           </a:p>
@@ -20271,7 +20448,7 @@
       </p:sp>
       <p:sp>
         <p:nvSpPr>
-          <p:cNvPr id="28" name="Text 26"/>
+          <p:cNvPr id="30" name="Text 28"/>
           <p:cNvSpPr/>
           <p:nvPr/>
         </p:nvSpPr>
@@ -20310,7 +20487,7 @@
       </p:sp>
       <p:sp>
         <p:nvSpPr>
-          <p:cNvPr id="29" name="Shape 27"/>
+          <p:cNvPr id="31" name="Shape 29"/>
           <p:cNvSpPr/>
           <p:nvPr/>
         </p:nvSpPr>
@@ -20337,7 +20514,7 @@
       </p:sp>
       <p:sp>
         <p:nvSpPr>
-          <p:cNvPr id="30" name="Text 28"/>
+          <p:cNvPr id="32" name="Text 30"/>
           <p:cNvSpPr/>
           <p:nvPr/>
         </p:nvSpPr>
@@ -20368,7 +20545,7 @@
                 <a:ea typeface="Trebuchet MS" pitchFamily="34" charset="-122"/>
                 <a:cs typeface="Trebuchet MS" pitchFamily="34" charset="-120"/>
               </a:rPr>
-              <a:t>fix</a:t>
+              <a:t>fixed</a:t>
             </a:r>
             <a:endParaRPr lang="en-US" sz="1400" dirty="0"/>
           </a:p>
@@ -20376,7 +20553,7 @@
       </p:sp>
       <p:sp>
         <p:nvSpPr>
-          <p:cNvPr id="31" name="Shape 29"/>
+          <p:cNvPr id="33" name="Shape 31"/>
           <p:cNvSpPr/>
           <p:nvPr/>
         </p:nvSpPr>
@@ -20403,7 +20580,7 @@
       </p:sp>
       <p:sp>
         <p:nvSpPr>
-          <p:cNvPr id="32" name="Text 30"/>
+          <p:cNvPr id="34" name="Text 32"/>
           <p:cNvSpPr/>
           <p:nvPr/>
         </p:nvSpPr>
@@ -20442,7 +20619,7 @@
       </p:sp>
       <p:sp>
         <p:nvSpPr>
-          <p:cNvPr id="33" name="Shape 31"/>
+          <p:cNvPr id="35" name="Shape 33"/>
           <p:cNvSpPr/>
           <p:nvPr/>
         </p:nvSpPr>
@@ -20469,7 +20646,7 @@
       </p:sp>
       <p:sp>
         <p:nvSpPr>
-          <p:cNvPr id="34" name="Text 32"/>
+          <p:cNvPr id="36" name="Text 34"/>
           <p:cNvSpPr/>
           <p:nvPr/>
         </p:nvSpPr>
@@ -20792,7 +20969,7 @@
                 <a:ea typeface="Calibri" pitchFamily="34" charset="-122"/>
                 <a:cs typeface="Calibri" pitchFamily="34" charset="-120"/>
               </a:rPr>
-              <a:t>Word Labs  •  wordlabs.app  •  Root: 'fix' = to fasten, attach, or set</a:t>
+              <a:t>Word Labs  •  wordlabs.app  •  Root: 'fix' = fasten, attach, make firm</a:t>
             </a:r>
             <a:endParaRPr lang="en-US" sz="800" dirty="0"/>
           </a:p>
@@ -20931,7 +21108,7 @@
                 <a:ea typeface="Trebuchet MS" pitchFamily="34" charset="-122"/>
                 <a:cs typeface="Trebuchet MS" pitchFamily="34" charset="-120"/>
               </a:rPr>
-              <a:t>affix</a:t>
+              <a:t>transfixed</a:t>
             </a:r>
             <a:endParaRPr lang="en-US" sz="2800" dirty="0"/>
           </a:p>
@@ -21011,7 +21188,7 @@
         </p:nvSpPr>
         <p:spPr>
           <a:xfrm>
-            <a:off x="2938272" y="2258568"/>
+            <a:off x="2221992" y="2258568"/>
             <a:ext cx="1828800" cy="292608"/>
           </a:xfrm>
           <a:prstGeom prst="rect">
@@ -21045,7 +21222,7 @@
         </p:nvSpPr>
         <p:spPr>
           <a:xfrm>
-            <a:off x="2938272" y="2258568"/>
+            <a:off x="2221992" y="2258568"/>
             <a:ext cx="1828800" cy="292608"/>
           </a:xfrm>
           <a:prstGeom prst="rect">
@@ -21070,7 +21247,7 @@
                 <a:ea typeface="Trebuchet MS" pitchFamily="34" charset="-122"/>
                 <a:cs typeface="Trebuchet MS" pitchFamily="34" charset="-120"/>
               </a:rPr>
-              <a:t>af</a:t>
+              <a:t>trans</a:t>
             </a:r>
             <a:endParaRPr lang="en-US" sz="1300" dirty="0"/>
           </a:p>
@@ -21084,7 +21261,7 @@
         </p:nvSpPr>
         <p:spPr>
           <a:xfrm>
-            <a:off x="2938272" y="2569464"/>
+            <a:off x="2221992" y="2569464"/>
             <a:ext cx="1828800" cy="201168"/>
           </a:xfrm>
           <a:prstGeom prst="rect">
@@ -21109,7 +21286,7 @@
                 <a:ea typeface="Calibri" pitchFamily="34" charset="-122"/>
                 <a:cs typeface="Calibri" pitchFamily="34" charset="-120"/>
               </a:rPr>
-              <a:t>to, towards</a:t>
+              <a:t>across, through</a:t>
             </a:r>
             <a:endParaRPr lang="en-US" sz="850" dirty="0"/>
           </a:p>
@@ -21117,52 +21294,13 @@
       </p:sp>
       <p:sp>
         <p:nvSpPr>
-          <p:cNvPr id="19" name="Text 17"/>
-          <p:cNvSpPr/>
-          <p:nvPr/>
-        </p:nvSpPr>
-        <p:spPr>
-          <a:xfrm>
-            <a:off x="2938272" y="2752344"/>
-            <a:ext cx="1828800" cy="182880"/>
-          </a:xfrm>
-          <a:prstGeom prst="rect">
-            <a:avLst/>
-          </a:prstGeom>
-          <a:noFill/>
-          <a:ln/>
-        </p:spPr>
-        <p:txBody>
-          <a:bodyPr wrap="square" lIns="0" tIns="0" rIns="0" bIns="0" rtlCol="0" anchor="t"/>
-          <a:lstStyle/>
-          <a:p>
-            <a:pPr algn="ctr" indent="0" marL="0">
-              <a:buNone/>
-            </a:pPr>
-            <a:r>
-              <a:rPr lang="en-US" sz="700" i="1" dirty="0">
-                <a:solidFill>
-                  <a:srgbClr val="94A3B8"/>
-                </a:solidFill>
-                <a:latin typeface="Calibri" pitchFamily="34" charset="0"/>
-                <a:ea typeface="Calibri" pitchFamily="34" charset="-122"/>
-                <a:cs typeface="Calibri" pitchFamily="34" charset="-120"/>
-              </a:rPr>
-              <a:t>ad → af before 'f'</a:t>
-            </a:r>
-            <a:endParaRPr lang="en-US" sz="700" dirty="0"/>
-          </a:p>
-        </p:txBody>
-      </p:sp>
-      <p:sp>
-        <p:nvSpPr>
-          <p:cNvPr id="20" name="Shape 18"/>
-          <p:cNvSpPr/>
-          <p:nvPr/>
-        </p:nvSpPr>
-        <p:spPr>
-          <a:xfrm>
-            <a:off x="5803392" y="2258568"/>
+          <p:cNvPr id="19" name="Shape 17"/>
+          <p:cNvSpPr/>
+          <p:nvPr/>
+        </p:nvSpPr>
+        <p:spPr>
+          <a:xfrm>
+            <a:off x="4370832" y="2258568"/>
             <a:ext cx="1828800" cy="292608"/>
           </a:xfrm>
           <a:prstGeom prst="rect">
@@ -21190,13 +21328,13 @@
       </p:sp>
       <p:sp>
         <p:nvSpPr>
-          <p:cNvPr id="21" name="Text 19"/>
-          <p:cNvSpPr/>
-          <p:nvPr/>
-        </p:nvSpPr>
-        <p:spPr>
-          <a:xfrm>
-            <a:off x="5803392" y="2258568"/>
+          <p:cNvPr id="20" name="Text 18"/>
+          <p:cNvSpPr/>
+          <p:nvPr/>
+        </p:nvSpPr>
+        <p:spPr>
+          <a:xfrm>
+            <a:off x="4370832" y="2258568"/>
             <a:ext cx="1828800" cy="292608"/>
           </a:xfrm>
           <a:prstGeom prst="rect">
@@ -21229,13 +21367,13 @@
       </p:sp>
       <p:sp>
         <p:nvSpPr>
-          <p:cNvPr id="22" name="Text 20"/>
-          <p:cNvSpPr/>
-          <p:nvPr/>
-        </p:nvSpPr>
-        <p:spPr>
-          <a:xfrm>
-            <a:off x="5803392" y="2569464"/>
+          <p:cNvPr id="21" name="Text 19"/>
+          <p:cNvSpPr/>
+          <p:nvPr/>
+        </p:nvSpPr>
+        <p:spPr>
+          <a:xfrm>
+            <a:off x="4370832" y="2569464"/>
             <a:ext cx="1828800" cy="201168"/>
           </a:xfrm>
           <a:prstGeom prst="rect">
@@ -21260,7 +21398,7 @@
                 <a:ea typeface="Calibri" pitchFamily="34" charset="-122"/>
                 <a:cs typeface="Calibri" pitchFamily="34" charset="-120"/>
               </a:rPr>
-              <a:t>to fasten or attach</a:t>
+              <a:t>fasten, attach</a:t>
             </a:r>
             <a:endParaRPr lang="en-US" sz="850" dirty="0"/>
           </a:p>
@@ -21268,7 +21406,119 @@
       </p:sp>
       <p:sp>
         <p:nvSpPr>
-          <p:cNvPr id="23" name="Shape 21"/>
+          <p:cNvPr id="22" name="Shape 20"/>
+          <p:cNvSpPr/>
+          <p:nvPr/>
+        </p:nvSpPr>
+        <p:spPr>
+          <a:xfrm>
+            <a:off x="6519672" y="2258568"/>
+            <a:ext cx="1828800" cy="292608"/>
+          </a:xfrm>
+          <a:prstGeom prst="rect">
+            <a:avLst>
+              <a:gd name="adj" fmla="val 25000"/>
+            </a:avLst>
+          </a:prstGeom>
+          <a:solidFill>
+            <a:srgbClr val="FCE7F3"/>
+          </a:solidFill>
+          <a:ln w="19050">
+            <a:solidFill>
+              <a:srgbClr val="DB2777"/>
+            </a:solidFill>
+            <a:prstDash val="solid"/>
+          </a:ln>
+          <a:effectLst>
+            <a:outerShdw sx="100000" sy="100000" kx="0" ky="0" algn="bl" rotWithShape="0" blurRad="101600" dist="38100" dir="8100000">
+              <a:srgbClr val="000000">
+                <a:alpha val="12000"/>
+              </a:srgbClr>
+            </a:outerShdw>
+          </a:effectLst>
+        </p:spPr>
+      </p:sp>
+      <p:sp>
+        <p:nvSpPr>
+          <p:cNvPr id="23" name="Text 21"/>
+          <p:cNvSpPr/>
+          <p:nvPr/>
+        </p:nvSpPr>
+        <p:spPr>
+          <a:xfrm>
+            <a:off x="6519672" y="2258568"/>
+            <a:ext cx="1828800" cy="292608"/>
+          </a:xfrm>
+          <a:prstGeom prst="rect">
+            <a:avLst/>
+          </a:prstGeom>
+          <a:noFill/>
+          <a:ln/>
+        </p:spPr>
+        <p:txBody>
+          <a:bodyPr wrap="square" lIns="0" tIns="0" rIns="0" bIns="0" rtlCol="0" anchor="ctr"/>
+          <a:lstStyle/>
+          <a:p>
+            <a:pPr algn="ctr" indent="0" marL="0">
+              <a:buNone/>
+            </a:pPr>
+            <a:r>
+              <a:rPr lang="en-US" sz="1300" b="1" dirty="0">
+                <a:solidFill>
+                  <a:srgbClr val="9D174D"/>
+                </a:solidFill>
+                <a:latin typeface="Trebuchet MS" pitchFamily="34" charset="0"/>
+                <a:ea typeface="Trebuchet MS" pitchFamily="34" charset="-122"/>
+                <a:cs typeface="Trebuchet MS" pitchFamily="34" charset="-120"/>
+              </a:rPr>
+              <a:t>ed</a:t>
+            </a:r>
+            <a:endParaRPr lang="en-US" sz="1300" dirty="0"/>
+          </a:p>
+        </p:txBody>
+      </p:sp>
+      <p:sp>
+        <p:nvSpPr>
+          <p:cNvPr id="24" name="Text 22"/>
+          <p:cNvSpPr/>
+          <p:nvPr/>
+        </p:nvSpPr>
+        <p:spPr>
+          <a:xfrm>
+            <a:off x="6519672" y="2569464"/>
+            <a:ext cx="1828800" cy="201168"/>
+          </a:xfrm>
+          <a:prstGeom prst="rect">
+            <a:avLst/>
+          </a:prstGeom>
+          <a:noFill/>
+          <a:ln/>
+        </p:spPr>
+        <p:txBody>
+          <a:bodyPr wrap="square" lIns="0" tIns="0" rIns="0" bIns="0" rtlCol="0" anchor="t"/>
+          <a:lstStyle/>
+          <a:p>
+            <a:pPr algn="ctr" indent="0" marL="0">
+              <a:buNone/>
+            </a:pPr>
+            <a:r>
+              <a:rPr lang="en-US" sz="850" dirty="0">
+                <a:solidFill>
+                  <a:srgbClr val="475569"/>
+                </a:solidFill>
+                <a:latin typeface="Calibri" pitchFamily="34" charset="0"/>
+                <a:ea typeface="Calibri" pitchFamily="34" charset="-122"/>
+                <a:cs typeface="Calibri" pitchFamily="34" charset="-120"/>
+              </a:rPr>
+              <a:t>past tense</a:t>
+            </a:r>
+            <a:endParaRPr lang="en-US" sz="850" dirty="0"/>
+          </a:p>
+        </p:txBody>
+      </p:sp>
+      <p:sp>
+        <p:nvSpPr>
+          <p:cNvPr id="25" name="Shape 23"/>
           <p:cNvSpPr/>
           <p:nvPr/>
         </p:nvSpPr>
@@ -21295,7 +21545,7 @@
       </p:sp>
       <p:sp>
         <p:nvSpPr>
-          <p:cNvPr id="24" name="Text 22"/>
+          <p:cNvPr id="26" name="Text 24"/>
           <p:cNvSpPr/>
           <p:nvPr/>
         </p:nvSpPr>
@@ -21334,7 +21584,7 @@
       </p:sp>
       <p:sp>
         <p:nvSpPr>
-          <p:cNvPr id="25" name="Shape 23"/>
+          <p:cNvPr id="27" name="Shape 25"/>
           <p:cNvSpPr/>
           <p:nvPr/>
         </p:nvSpPr>
@@ -21361,7 +21611,7 @@
       </p:sp>
       <p:sp>
         <p:nvSpPr>
-          <p:cNvPr id="26" name="Shape 24"/>
+          <p:cNvPr id="28" name="Shape 26"/>
           <p:cNvSpPr/>
           <p:nvPr/>
         </p:nvSpPr>
@@ -21388,7 +21638,7 @@
       </p:sp>
       <p:sp>
         <p:nvSpPr>
-          <p:cNvPr id="27" name="Text 25"/>
+          <p:cNvPr id="29" name="Text 27"/>
           <p:cNvSpPr/>
           <p:nvPr/>
         </p:nvSpPr>
@@ -21419,7 +21669,7 @@
                 <a:ea typeface="Trebuchet MS" pitchFamily="34" charset="-122"/>
                 <a:cs typeface="Trebuchet MS" pitchFamily="34" charset="-120"/>
               </a:rPr>
-              <a:t>af</a:t>
+              <a:t>trans</a:t>
             </a:r>
             <a:endParaRPr lang="en-US" sz="1400" dirty="0"/>
           </a:p>
@@ -21427,7 +21677,7 @@
       </p:sp>
       <p:sp>
         <p:nvSpPr>
-          <p:cNvPr id="28" name="Text 26"/>
+          <p:cNvPr id="30" name="Text 28"/>
           <p:cNvSpPr/>
           <p:nvPr/>
         </p:nvSpPr>
@@ -21466,7 +21716,7 @@
       </p:sp>
       <p:sp>
         <p:nvSpPr>
-          <p:cNvPr id="29" name="Shape 27"/>
+          <p:cNvPr id="31" name="Shape 29"/>
           <p:cNvSpPr/>
           <p:nvPr/>
         </p:nvSpPr>
@@ -21493,7 +21743,7 @@
       </p:sp>
       <p:sp>
         <p:nvSpPr>
-          <p:cNvPr id="30" name="Text 28"/>
+          <p:cNvPr id="32" name="Text 30"/>
           <p:cNvSpPr/>
           <p:nvPr/>
         </p:nvSpPr>
@@ -21524,7 +21774,7 @@
                 <a:ea typeface="Trebuchet MS" pitchFamily="34" charset="-122"/>
                 <a:cs typeface="Trebuchet MS" pitchFamily="34" charset="-120"/>
               </a:rPr>
-              <a:t>fix</a:t>
+              <a:t>fixed</a:t>
             </a:r>
             <a:endParaRPr lang="en-US" sz="1400" dirty="0"/>
           </a:p>
@@ -21532,7 +21782,7 @@
       </p:sp>
       <p:sp>
         <p:nvSpPr>
-          <p:cNvPr id="31" name="Shape 29"/>
+          <p:cNvPr id="33" name="Shape 31"/>
           <p:cNvSpPr/>
           <p:nvPr/>
         </p:nvSpPr>
@@ -21559,7 +21809,7 @@
       </p:sp>
       <p:sp>
         <p:nvSpPr>
-          <p:cNvPr id="32" name="Text 30"/>
+          <p:cNvPr id="34" name="Text 32"/>
           <p:cNvSpPr/>
           <p:nvPr/>
         </p:nvSpPr>
@@ -21598,7 +21848,7 @@
       </p:sp>
       <p:sp>
         <p:nvSpPr>
-          <p:cNvPr id="33" name="Shape 31"/>
+          <p:cNvPr id="35" name="Shape 33"/>
           <p:cNvSpPr/>
           <p:nvPr/>
         </p:nvSpPr>
@@ -21625,14 +21875,14 @@
       </p:sp>
       <p:sp>
         <p:nvSpPr>
-          <p:cNvPr id="34" name="Shape 32"/>
-          <p:cNvSpPr/>
-          <p:nvPr/>
-        </p:nvSpPr>
-        <p:spPr>
-          <a:xfrm>
-            <a:off x="2670048" y="4169664"/>
-            <a:ext cx="685800" cy="384048"/>
+          <p:cNvPr id="36" name="Shape 34"/>
+          <p:cNvSpPr/>
+          <p:nvPr/>
+        </p:nvSpPr>
+        <p:spPr>
+          <a:xfrm>
+            <a:off x="1951330" y="4169664"/>
+            <a:ext cx="676656" cy="384048"/>
           </a:xfrm>
           <a:prstGeom prst="rect">
             <a:avLst>
@@ -21652,14 +21902,14 @@
       </p:sp>
       <p:sp>
         <p:nvSpPr>
-          <p:cNvPr id="35" name="Text 33"/>
-          <p:cNvSpPr/>
-          <p:nvPr/>
-        </p:nvSpPr>
-        <p:spPr>
-          <a:xfrm>
-            <a:off x="2670048" y="4169664"/>
-            <a:ext cx="685800" cy="384048"/>
+          <p:cNvPr id="37" name="Text 35"/>
+          <p:cNvSpPr/>
+          <p:nvPr/>
+        </p:nvSpPr>
+        <p:spPr>
+          <a:xfrm>
+            <a:off x="1951330" y="4169664"/>
+            <a:ext cx="676656" cy="384048"/>
           </a:xfrm>
           <a:prstGeom prst="rect">
             <a:avLst/>
@@ -21683,7 +21933,7 @@
                 <a:ea typeface="Trebuchet MS" pitchFamily="34" charset="-122"/>
                 <a:cs typeface="Trebuchet MS" pitchFamily="34" charset="-120"/>
               </a:rPr>
-              <a:t>a</a:t>
+              <a:t>t</a:t>
             </a:r>
             <a:endParaRPr lang="en-US" sz="900" dirty="0"/>
           </a:p>
@@ -21691,14 +21941,14 @@
       </p:sp>
       <p:sp>
         <p:nvSpPr>
-          <p:cNvPr id="36" name="Shape 34"/>
-          <p:cNvSpPr/>
-          <p:nvPr/>
-        </p:nvSpPr>
-        <p:spPr>
-          <a:xfrm>
-            <a:off x="4123944" y="4169664"/>
-            <a:ext cx="685800" cy="384048"/>
+          <p:cNvPr id="38" name="Shape 36"/>
+          <p:cNvSpPr/>
+          <p:nvPr/>
+        </p:nvSpPr>
+        <p:spPr>
+          <a:xfrm>
+            <a:off x="2677363" y="4169664"/>
+            <a:ext cx="676656" cy="384048"/>
           </a:xfrm>
           <a:prstGeom prst="rect">
             <a:avLst>
@@ -21718,14 +21968,14 @@
       </p:sp>
       <p:sp>
         <p:nvSpPr>
-          <p:cNvPr id="37" name="Text 35"/>
-          <p:cNvSpPr/>
-          <p:nvPr/>
-        </p:nvSpPr>
-        <p:spPr>
-          <a:xfrm>
-            <a:off x="4123944" y="4169664"/>
-            <a:ext cx="685800" cy="384048"/>
+          <p:cNvPr id="39" name="Text 37"/>
+          <p:cNvSpPr/>
+          <p:nvPr/>
+        </p:nvSpPr>
+        <p:spPr>
+          <a:xfrm>
+            <a:off x="2677363" y="4169664"/>
+            <a:ext cx="676656" cy="384048"/>
           </a:xfrm>
           <a:prstGeom prst="rect">
             <a:avLst/>
@@ -21749,7 +21999,7 @@
                 <a:ea typeface="Trebuchet MS" pitchFamily="34" charset="-122"/>
                 <a:cs typeface="Trebuchet MS" pitchFamily="34" charset="-120"/>
               </a:rPr>
-              <a:t>ff</a:t>
+              <a:t>r</a:t>
             </a:r>
             <a:endParaRPr lang="en-US" sz="900" dirty="0"/>
           </a:p>
@@ -21757,14 +22007,14 @@
       </p:sp>
       <p:sp>
         <p:nvSpPr>
-          <p:cNvPr id="38" name="Shape 36"/>
-          <p:cNvSpPr/>
-          <p:nvPr/>
-        </p:nvSpPr>
-        <p:spPr>
-          <a:xfrm>
-            <a:off x="5577840" y="4169664"/>
-            <a:ext cx="685800" cy="384048"/>
+          <p:cNvPr id="40" name="Shape 38"/>
+          <p:cNvSpPr/>
+          <p:nvPr/>
+        </p:nvSpPr>
+        <p:spPr>
+          <a:xfrm>
+            <a:off x="3403397" y="4169664"/>
+            <a:ext cx="676656" cy="384048"/>
           </a:xfrm>
           <a:prstGeom prst="rect">
             <a:avLst>
@@ -21784,14 +22034,14 @@
       </p:sp>
       <p:sp>
         <p:nvSpPr>
-          <p:cNvPr id="39" name="Text 37"/>
-          <p:cNvSpPr/>
-          <p:nvPr/>
-        </p:nvSpPr>
-        <p:spPr>
-          <a:xfrm>
-            <a:off x="5577840" y="4169664"/>
-            <a:ext cx="685800" cy="384048"/>
+          <p:cNvPr id="41" name="Text 39"/>
+          <p:cNvSpPr/>
+          <p:nvPr/>
+        </p:nvSpPr>
+        <p:spPr>
+          <a:xfrm>
+            <a:off x="3403397" y="4169664"/>
+            <a:ext cx="676656" cy="384048"/>
           </a:xfrm>
           <a:prstGeom prst="rect">
             <a:avLst/>
@@ -21815,7 +22065,7 @@
                 <a:ea typeface="Trebuchet MS" pitchFamily="34" charset="-122"/>
                 <a:cs typeface="Trebuchet MS" pitchFamily="34" charset="-120"/>
               </a:rPr>
-              <a:t>i</a:t>
+              <a:t>a</a:t>
             </a:r>
             <a:endParaRPr lang="en-US" sz="900" dirty="0"/>
           </a:p>
@@ -21823,14 +22073,14 @@
       </p:sp>
       <p:sp>
         <p:nvSpPr>
-          <p:cNvPr id="40" name="Shape 38"/>
-          <p:cNvSpPr/>
-          <p:nvPr/>
-        </p:nvSpPr>
-        <p:spPr>
-          <a:xfrm>
-            <a:off x="7031736" y="4169664"/>
-            <a:ext cx="685800" cy="384048"/>
+          <p:cNvPr id="42" name="Shape 40"/>
+          <p:cNvSpPr/>
+          <p:nvPr/>
+        </p:nvSpPr>
+        <p:spPr>
+          <a:xfrm>
+            <a:off x="4129430" y="4169664"/>
+            <a:ext cx="676656" cy="384048"/>
           </a:xfrm>
           <a:prstGeom prst="rect">
             <a:avLst>
@@ -21850,14 +22100,14 @@
       </p:sp>
       <p:sp>
         <p:nvSpPr>
-          <p:cNvPr id="41" name="Text 39"/>
-          <p:cNvSpPr/>
-          <p:nvPr/>
-        </p:nvSpPr>
-        <p:spPr>
-          <a:xfrm>
-            <a:off x="7031736" y="4169664"/>
-            <a:ext cx="685800" cy="384048"/>
+          <p:cNvPr id="43" name="Text 41"/>
+          <p:cNvSpPr/>
+          <p:nvPr/>
+        </p:nvSpPr>
+        <p:spPr>
+          <a:xfrm>
+            <a:off x="4129430" y="4169664"/>
+            <a:ext cx="676656" cy="384048"/>
           </a:xfrm>
           <a:prstGeom prst="rect">
             <a:avLst/>
@@ -21881,6 +22131,270 @@
                 <a:ea typeface="Trebuchet MS" pitchFamily="34" charset="-122"/>
                 <a:cs typeface="Trebuchet MS" pitchFamily="34" charset="-120"/>
               </a:rPr>
+              <a:t>n</a:t>
+            </a:r>
+            <a:endParaRPr lang="en-US" sz="900" dirty="0"/>
+          </a:p>
+        </p:txBody>
+      </p:sp>
+      <p:sp>
+        <p:nvSpPr>
+          <p:cNvPr id="44" name="Shape 42"/>
+          <p:cNvSpPr/>
+          <p:nvPr/>
+        </p:nvSpPr>
+        <p:spPr>
+          <a:xfrm>
+            <a:off x="4855464" y="4169664"/>
+            <a:ext cx="676656" cy="384048"/>
+          </a:xfrm>
+          <a:prstGeom prst="rect">
+            <a:avLst>
+              <a:gd name="adj" fmla="val 9524"/>
+            </a:avLst>
+          </a:prstGeom>
+          <a:solidFill>
+            <a:srgbClr val="FFFFFF"/>
+          </a:solidFill>
+          <a:ln w="12700">
+            <a:solidFill>
+              <a:srgbClr val="DB2777"/>
+            </a:solidFill>
+            <a:prstDash val="solid"/>
+          </a:ln>
+        </p:spPr>
+      </p:sp>
+      <p:sp>
+        <p:nvSpPr>
+          <p:cNvPr id="45" name="Text 43"/>
+          <p:cNvSpPr/>
+          <p:nvPr/>
+        </p:nvSpPr>
+        <p:spPr>
+          <a:xfrm>
+            <a:off x="4855464" y="4169664"/>
+            <a:ext cx="676656" cy="384048"/>
+          </a:xfrm>
+          <a:prstGeom prst="rect">
+            <a:avLst/>
+          </a:prstGeom>
+          <a:noFill/>
+          <a:ln/>
+        </p:spPr>
+        <p:txBody>
+          <a:bodyPr wrap="square" lIns="0" tIns="0" rIns="0" bIns="0" rtlCol="0" anchor="ctr"/>
+          <a:lstStyle/>
+          <a:p>
+            <a:pPr algn="ctr" indent="0" marL="0">
+              <a:buNone/>
+            </a:pPr>
+            <a:r>
+              <a:rPr lang="en-US" sz="900" b="1" dirty="0">
+                <a:solidFill>
+                  <a:srgbClr val="9D174D"/>
+                </a:solidFill>
+                <a:latin typeface="Trebuchet MS" pitchFamily="34" charset="0"/>
+                <a:ea typeface="Trebuchet MS" pitchFamily="34" charset="-122"/>
+                <a:cs typeface="Trebuchet MS" pitchFamily="34" charset="-120"/>
+              </a:rPr>
+              <a:t>s</a:t>
+            </a:r>
+            <a:endParaRPr lang="en-US" sz="900" dirty="0"/>
+          </a:p>
+        </p:txBody>
+      </p:sp>
+      <p:sp>
+        <p:nvSpPr>
+          <p:cNvPr id="46" name="Shape 44"/>
+          <p:cNvSpPr/>
+          <p:nvPr/>
+        </p:nvSpPr>
+        <p:spPr>
+          <a:xfrm>
+            <a:off x="5581498" y="4169664"/>
+            <a:ext cx="676656" cy="384048"/>
+          </a:xfrm>
+          <a:prstGeom prst="rect">
+            <a:avLst>
+              <a:gd name="adj" fmla="val 9524"/>
+            </a:avLst>
+          </a:prstGeom>
+          <a:solidFill>
+            <a:srgbClr val="FFFFFF"/>
+          </a:solidFill>
+          <a:ln w="12700">
+            <a:solidFill>
+              <a:srgbClr val="DB2777"/>
+            </a:solidFill>
+            <a:prstDash val="solid"/>
+          </a:ln>
+        </p:spPr>
+      </p:sp>
+      <p:sp>
+        <p:nvSpPr>
+          <p:cNvPr id="47" name="Text 45"/>
+          <p:cNvSpPr/>
+          <p:nvPr/>
+        </p:nvSpPr>
+        <p:spPr>
+          <a:xfrm>
+            <a:off x="5581498" y="4169664"/>
+            <a:ext cx="676656" cy="384048"/>
+          </a:xfrm>
+          <a:prstGeom prst="rect">
+            <a:avLst/>
+          </a:prstGeom>
+          <a:noFill/>
+          <a:ln/>
+        </p:spPr>
+        <p:txBody>
+          <a:bodyPr wrap="square" lIns="0" tIns="0" rIns="0" bIns="0" rtlCol="0" anchor="ctr"/>
+          <a:lstStyle/>
+          <a:p>
+            <a:pPr algn="ctr" indent="0" marL="0">
+              <a:buNone/>
+            </a:pPr>
+            <a:r>
+              <a:rPr lang="en-US" sz="900" b="1" dirty="0">
+                <a:solidFill>
+                  <a:srgbClr val="9D174D"/>
+                </a:solidFill>
+                <a:latin typeface="Trebuchet MS" pitchFamily="34" charset="0"/>
+                <a:ea typeface="Trebuchet MS" pitchFamily="34" charset="-122"/>
+                <a:cs typeface="Trebuchet MS" pitchFamily="34" charset="-120"/>
+              </a:rPr>
+              <a:t>f</a:t>
+            </a:r>
+            <a:endParaRPr lang="en-US" sz="900" dirty="0"/>
+          </a:p>
+        </p:txBody>
+      </p:sp>
+      <p:sp>
+        <p:nvSpPr>
+          <p:cNvPr id="48" name="Shape 46"/>
+          <p:cNvSpPr/>
+          <p:nvPr/>
+        </p:nvSpPr>
+        <p:spPr>
+          <a:xfrm>
+            <a:off x="6307531" y="4169664"/>
+            <a:ext cx="676656" cy="384048"/>
+          </a:xfrm>
+          <a:prstGeom prst="rect">
+            <a:avLst>
+              <a:gd name="adj" fmla="val 9524"/>
+            </a:avLst>
+          </a:prstGeom>
+          <a:solidFill>
+            <a:srgbClr val="FFFFFF"/>
+          </a:solidFill>
+          <a:ln w="12700">
+            <a:solidFill>
+              <a:srgbClr val="DB2777"/>
+            </a:solidFill>
+            <a:prstDash val="solid"/>
+          </a:ln>
+        </p:spPr>
+      </p:sp>
+      <p:sp>
+        <p:nvSpPr>
+          <p:cNvPr id="49" name="Text 47"/>
+          <p:cNvSpPr/>
+          <p:nvPr/>
+        </p:nvSpPr>
+        <p:spPr>
+          <a:xfrm>
+            <a:off x="6307531" y="4169664"/>
+            <a:ext cx="676656" cy="384048"/>
+          </a:xfrm>
+          <a:prstGeom prst="rect">
+            <a:avLst/>
+          </a:prstGeom>
+          <a:noFill/>
+          <a:ln/>
+        </p:spPr>
+        <p:txBody>
+          <a:bodyPr wrap="square" lIns="0" tIns="0" rIns="0" bIns="0" rtlCol="0" anchor="ctr"/>
+          <a:lstStyle/>
+          <a:p>
+            <a:pPr algn="ctr" indent="0" marL="0">
+              <a:buNone/>
+            </a:pPr>
+            <a:r>
+              <a:rPr lang="en-US" sz="900" b="1" dirty="0">
+                <a:solidFill>
+                  <a:srgbClr val="9D174D"/>
+                </a:solidFill>
+                <a:latin typeface="Trebuchet MS" pitchFamily="34" charset="0"/>
+                <a:ea typeface="Trebuchet MS" pitchFamily="34" charset="-122"/>
+                <a:cs typeface="Trebuchet MS" pitchFamily="34" charset="-120"/>
+              </a:rPr>
+              <a:t>i</a:t>
+            </a:r>
+            <a:endParaRPr lang="en-US" sz="900" dirty="0"/>
+          </a:p>
+        </p:txBody>
+      </p:sp>
+      <p:sp>
+        <p:nvSpPr>
+          <p:cNvPr id="50" name="Shape 48"/>
+          <p:cNvSpPr/>
+          <p:nvPr/>
+        </p:nvSpPr>
+        <p:spPr>
+          <a:xfrm>
+            <a:off x="7033565" y="4169664"/>
+            <a:ext cx="676656" cy="384048"/>
+          </a:xfrm>
+          <a:prstGeom prst="rect">
+            <a:avLst>
+              <a:gd name="adj" fmla="val 9524"/>
+            </a:avLst>
+          </a:prstGeom>
+          <a:solidFill>
+            <a:srgbClr val="FFFFFF"/>
+          </a:solidFill>
+          <a:ln w="12700">
+            <a:solidFill>
+              <a:srgbClr val="DB2777"/>
+            </a:solidFill>
+            <a:prstDash val="solid"/>
+          </a:ln>
+        </p:spPr>
+      </p:sp>
+      <p:sp>
+        <p:nvSpPr>
+          <p:cNvPr id="51" name="Text 49"/>
+          <p:cNvSpPr/>
+          <p:nvPr/>
+        </p:nvSpPr>
+        <p:spPr>
+          <a:xfrm>
+            <a:off x="7033565" y="4169664"/>
+            <a:ext cx="676656" cy="384048"/>
+          </a:xfrm>
+          <a:prstGeom prst="rect">
+            <a:avLst/>
+          </a:prstGeom>
+          <a:noFill/>
+          <a:ln/>
+        </p:spPr>
+        <p:txBody>
+          <a:bodyPr wrap="square" lIns="0" tIns="0" rIns="0" bIns="0" rtlCol="0" anchor="ctr"/>
+          <a:lstStyle/>
+          <a:p>
+            <a:pPr algn="ctr" indent="0" marL="0">
+              <a:buNone/>
+            </a:pPr>
+            <a:r>
+              <a:rPr lang="en-US" sz="900" b="1" dirty="0">
+                <a:solidFill>
+                  <a:srgbClr val="9D174D"/>
+                </a:solidFill>
+                <a:latin typeface="Trebuchet MS" pitchFamily="34" charset="0"/>
+                <a:ea typeface="Trebuchet MS" pitchFamily="34" charset="-122"/>
+                <a:cs typeface="Trebuchet MS" pitchFamily="34" charset="-120"/>
+              </a:rPr>
               <a:t>x</a:t>
             </a:r>
             <a:endParaRPr lang="en-US" sz="900" dirty="0"/>
@@ -21889,14 +22403,14 @@
       </p:sp>
       <p:sp>
         <p:nvSpPr>
-          <p:cNvPr id="42" name="Text 40"/>
-          <p:cNvSpPr/>
-          <p:nvPr/>
-        </p:nvSpPr>
-        <p:spPr>
-          <a:xfrm>
-            <a:off x="7031736" y="4572000"/>
-            <a:ext cx="685800" cy="219456"/>
+          <p:cNvPr id="52" name="Text 50"/>
+          <p:cNvSpPr/>
+          <p:nvPr/>
+        </p:nvSpPr>
+        <p:spPr>
+          <a:xfrm>
+            <a:off x="7033565" y="4572000"/>
+            <a:ext cx="676656" cy="219456"/>
           </a:xfrm>
           <a:prstGeom prst="rect">
             <a:avLst/>
@@ -21923,6 +22437,72 @@
               <a:t>/ks/</a:t>
             </a:r>
             <a:endParaRPr lang="en-US" sz="750" dirty="0"/>
+          </a:p>
+        </p:txBody>
+      </p:sp>
+      <p:sp>
+        <p:nvSpPr>
+          <p:cNvPr id="53" name="Shape 51"/>
+          <p:cNvSpPr/>
+          <p:nvPr/>
+        </p:nvSpPr>
+        <p:spPr>
+          <a:xfrm>
+            <a:off x="7759598" y="4169664"/>
+            <a:ext cx="676656" cy="384048"/>
+          </a:xfrm>
+          <a:prstGeom prst="rect">
+            <a:avLst>
+              <a:gd name="adj" fmla="val 9524"/>
+            </a:avLst>
+          </a:prstGeom>
+          <a:solidFill>
+            <a:srgbClr val="FFFFFF"/>
+          </a:solidFill>
+          <a:ln w="12700">
+            <a:solidFill>
+              <a:srgbClr val="DB2777"/>
+            </a:solidFill>
+            <a:prstDash val="solid"/>
+          </a:ln>
+        </p:spPr>
+      </p:sp>
+      <p:sp>
+        <p:nvSpPr>
+          <p:cNvPr id="54" name="Text 52"/>
+          <p:cNvSpPr/>
+          <p:nvPr/>
+        </p:nvSpPr>
+        <p:spPr>
+          <a:xfrm>
+            <a:off x="7759598" y="4169664"/>
+            <a:ext cx="676656" cy="384048"/>
+          </a:xfrm>
+          <a:prstGeom prst="rect">
+            <a:avLst/>
+          </a:prstGeom>
+          <a:noFill/>
+          <a:ln/>
+        </p:spPr>
+        <p:txBody>
+          <a:bodyPr wrap="square" lIns="0" tIns="0" rIns="0" bIns="0" rtlCol="0" anchor="ctr"/>
+          <a:lstStyle/>
+          <a:p>
+            <a:pPr algn="ctr" indent="0" marL="0">
+              <a:buNone/>
+            </a:pPr>
+            <a:r>
+              <a:rPr lang="en-US" sz="900" b="1" dirty="0">
+                <a:solidFill>
+                  <a:srgbClr val="9D174D"/>
+                </a:solidFill>
+                <a:latin typeface="Trebuchet MS" pitchFamily="34" charset="0"/>
+                <a:ea typeface="Trebuchet MS" pitchFamily="34" charset="-122"/>
+                <a:cs typeface="Trebuchet MS" pitchFamily="34" charset="-120"/>
+              </a:rPr>
+              <a:t>t</a:t>
+            </a:r>
+            <a:endParaRPr lang="en-US" sz="900" dirty="0"/>
           </a:p>
         </p:txBody>
       </p:sp>
@@ -22212,7 +22792,7 @@
                 <a:ea typeface="Calibri" pitchFamily="34" charset="-122"/>
                 <a:cs typeface="Calibri" pitchFamily="34" charset="-120"/>
               </a:rPr>
-              <a:t>Word Labs  •  wordlabs.app  •  Root: 'fix' = to fasten, attach, or set</a:t>
+              <a:t>Word Labs  •  wordlabs.app  •  Root: 'fix' = fasten, attach, make firm</a:t>
             </a:r>
             <a:endParaRPr lang="en-US" sz="800" dirty="0"/>
           </a:p>
@@ -22351,7 +22931,7 @@
                 <a:ea typeface="Trebuchet MS" pitchFamily="34" charset="-122"/>
                 <a:cs typeface="Trebuchet MS" pitchFamily="34" charset="-120"/>
               </a:rPr>
-              <a:t>prefix</a:t>
+              <a:t>affixed</a:t>
             </a:r>
             <a:endParaRPr lang="en-US" sz="2800" dirty="0"/>
           </a:p>
@@ -23039,7 +23619,7 @@
                 <a:ea typeface="Calibri" pitchFamily="34" charset="-122"/>
                 <a:cs typeface="Calibri" pitchFamily="34" charset="-120"/>
               </a:rPr>
-              <a:t>Word Labs  •  wordlabs.app  •  Root: 'fix' = to fasten, attach, or set</a:t>
+              <a:t>Word Labs  •  wordlabs.app  •  Root: 'fix' = fasten, attach, make firm</a:t>
             </a:r>
             <a:endParaRPr lang="en-US" sz="800" dirty="0"/>
           </a:p>
@@ -23178,7 +23758,7 @@
                 <a:ea typeface="Trebuchet MS" pitchFamily="34" charset="-122"/>
                 <a:cs typeface="Trebuchet MS" pitchFamily="34" charset="-120"/>
               </a:rPr>
-              <a:t>prefix</a:t>
+              <a:t>affixed</a:t>
             </a:r>
             <a:endParaRPr lang="en-US" sz="2800" dirty="0"/>
           </a:p>
@@ -23258,7 +23838,7 @@
         </p:nvSpPr>
         <p:spPr>
           <a:xfrm>
-            <a:off x="2938272" y="2258568"/>
+            <a:off x="2221992" y="2258568"/>
             <a:ext cx="1828800" cy="292608"/>
           </a:xfrm>
           <a:prstGeom prst="rect">
@@ -23292,7 +23872,7 @@
         </p:nvSpPr>
         <p:spPr>
           <a:xfrm>
-            <a:off x="2938272" y="2258568"/>
+            <a:off x="2221992" y="2258568"/>
             <a:ext cx="1828800" cy="292608"/>
           </a:xfrm>
           <a:prstGeom prst="rect">
@@ -23317,7 +23897,7 @@
                 <a:ea typeface="Trebuchet MS" pitchFamily="34" charset="-122"/>
                 <a:cs typeface="Trebuchet MS" pitchFamily="34" charset="-120"/>
               </a:rPr>
-              <a:t>pre</a:t>
+              <a:t>af</a:t>
             </a:r>
             <a:endParaRPr lang="en-US" sz="1300" dirty="0"/>
           </a:p>
@@ -23331,7 +23911,7 @@
         </p:nvSpPr>
         <p:spPr>
           <a:xfrm>
-            <a:off x="2938272" y="2569464"/>
+            <a:off x="2221992" y="2569464"/>
             <a:ext cx="1828800" cy="201168"/>
           </a:xfrm>
           <a:prstGeom prst="rect">
@@ -23356,7 +23936,7 @@
                 <a:ea typeface="Calibri" pitchFamily="34" charset="-122"/>
                 <a:cs typeface="Calibri" pitchFamily="34" charset="-120"/>
               </a:rPr>
-              <a:t>before</a:t>
+              <a:t>to, toward</a:t>
             </a:r>
             <a:endParaRPr lang="en-US" sz="850" dirty="0"/>
           </a:p>
@@ -23364,13 +23944,52 @@
       </p:sp>
       <p:sp>
         <p:nvSpPr>
-          <p:cNvPr id="19" name="Shape 17"/>
-          <p:cNvSpPr/>
-          <p:nvPr/>
-        </p:nvSpPr>
-        <p:spPr>
-          <a:xfrm>
-            <a:off x="5803392" y="2258568"/>
+          <p:cNvPr id="19" name="Text 17"/>
+          <p:cNvSpPr/>
+          <p:nvPr/>
+        </p:nvSpPr>
+        <p:spPr>
+          <a:xfrm>
+            <a:off x="2221992" y="2752344"/>
+            <a:ext cx="1828800" cy="182880"/>
+          </a:xfrm>
+          <a:prstGeom prst="rect">
+            <a:avLst/>
+          </a:prstGeom>
+          <a:noFill/>
+          <a:ln/>
+        </p:spPr>
+        <p:txBody>
+          <a:bodyPr wrap="square" lIns="0" tIns="0" rIns="0" bIns="0" rtlCol="0" anchor="t"/>
+          <a:lstStyle/>
+          <a:p>
+            <a:pPr algn="ctr" indent="0" marL="0">
+              <a:buNone/>
+            </a:pPr>
+            <a:r>
+              <a:rPr lang="en-US" sz="700" i="1" dirty="0">
+                <a:solidFill>
+                  <a:srgbClr val="94A3B8"/>
+                </a:solidFill>
+                <a:latin typeface="Calibri" pitchFamily="34" charset="0"/>
+                <a:ea typeface="Calibri" pitchFamily="34" charset="-122"/>
+                <a:cs typeface="Calibri" pitchFamily="34" charset="-120"/>
+              </a:rPr>
+              <a:t>ad → af before 'f'</a:t>
+            </a:r>
+            <a:endParaRPr lang="en-US" sz="700" dirty="0"/>
+          </a:p>
+        </p:txBody>
+      </p:sp>
+      <p:sp>
+        <p:nvSpPr>
+          <p:cNvPr id="20" name="Shape 18"/>
+          <p:cNvSpPr/>
+          <p:nvPr/>
+        </p:nvSpPr>
+        <p:spPr>
+          <a:xfrm>
+            <a:off x="4370832" y="2258568"/>
             <a:ext cx="1828800" cy="292608"/>
           </a:xfrm>
           <a:prstGeom prst="rect">
@@ -23398,13 +24017,13 @@
       </p:sp>
       <p:sp>
         <p:nvSpPr>
-          <p:cNvPr id="20" name="Text 18"/>
-          <p:cNvSpPr/>
-          <p:nvPr/>
-        </p:nvSpPr>
-        <p:spPr>
-          <a:xfrm>
-            <a:off x="5803392" y="2258568"/>
+          <p:cNvPr id="21" name="Text 19"/>
+          <p:cNvSpPr/>
+          <p:nvPr/>
+        </p:nvSpPr>
+        <p:spPr>
+          <a:xfrm>
+            <a:off x="4370832" y="2258568"/>
             <a:ext cx="1828800" cy="292608"/>
           </a:xfrm>
           <a:prstGeom prst="rect">
@@ -23437,13 +24056,13 @@
       </p:sp>
       <p:sp>
         <p:nvSpPr>
-          <p:cNvPr id="21" name="Text 19"/>
-          <p:cNvSpPr/>
-          <p:nvPr/>
-        </p:nvSpPr>
-        <p:spPr>
-          <a:xfrm>
-            <a:off x="5803392" y="2569464"/>
+          <p:cNvPr id="22" name="Text 20"/>
+          <p:cNvSpPr/>
+          <p:nvPr/>
+        </p:nvSpPr>
+        <p:spPr>
+          <a:xfrm>
+            <a:off x="4370832" y="2569464"/>
             <a:ext cx="1828800" cy="201168"/>
           </a:xfrm>
           <a:prstGeom prst="rect">
@@ -23468,7 +24087,7 @@
                 <a:ea typeface="Calibri" pitchFamily="34" charset="-122"/>
                 <a:cs typeface="Calibri" pitchFamily="34" charset="-120"/>
               </a:rPr>
-              <a:t>to fasten or attach</a:t>
+              <a:t>fasten, attach</a:t>
             </a:r>
             <a:endParaRPr lang="en-US" sz="850" dirty="0"/>
           </a:p>
@@ -23476,7 +24095,119 @@
       </p:sp>
       <p:sp>
         <p:nvSpPr>
-          <p:cNvPr id="22" name="Shape 20"/>
+          <p:cNvPr id="23" name="Shape 21"/>
+          <p:cNvSpPr/>
+          <p:nvPr/>
+        </p:nvSpPr>
+        <p:spPr>
+          <a:xfrm>
+            <a:off x="6519672" y="2258568"/>
+            <a:ext cx="1828800" cy="292608"/>
+          </a:xfrm>
+          <a:prstGeom prst="rect">
+            <a:avLst>
+              <a:gd name="adj" fmla="val 25000"/>
+            </a:avLst>
+          </a:prstGeom>
+          <a:solidFill>
+            <a:srgbClr val="FCE7F3"/>
+          </a:solidFill>
+          <a:ln w="19050">
+            <a:solidFill>
+              <a:srgbClr val="DB2777"/>
+            </a:solidFill>
+            <a:prstDash val="solid"/>
+          </a:ln>
+          <a:effectLst>
+            <a:outerShdw sx="100000" sy="100000" kx="0" ky="0" algn="bl" rotWithShape="0" blurRad="101600" dist="38100" dir="8100000">
+              <a:srgbClr val="000000">
+                <a:alpha val="12000"/>
+              </a:srgbClr>
+            </a:outerShdw>
+          </a:effectLst>
+        </p:spPr>
+      </p:sp>
+      <p:sp>
+        <p:nvSpPr>
+          <p:cNvPr id="24" name="Text 22"/>
+          <p:cNvSpPr/>
+          <p:nvPr/>
+        </p:nvSpPr>
+        <p:spPr>
+          <a:xfrm>
+            <a:off x="6519672" y="2258568"/>
+            <a:ext cx="1828800" cy="292608"/>
+          </a:xfrm>
+          <a:prstGeom prst="rect">
+            <a:avLst/>
+          </a:prstGeom>
+          <a:noFill/>
+          <a:ln/>
+        </p:spPr>
+        <p:txBody>
+          <a:bodyPr wrap="square" lIns="0" tIns="0" rIns="0" bIns="0" rtlCol="0" anchor="ctr"/>
+          <a:lstStyle/>
+          <a:p>
+            <a:pPr algn="ctr" indent="0" marL="0">
+              <a:buNone/>
+            </a:pPr>
+            <a:r>
+              <a:rPr lang="en-US" sz="1300" b="1" dirty="0">
+                <a:solidFill>
+                  <a:srgbClr val="9D174D"/>
+                </a:solidFill>
+                <a:latin typeface="Trebuchet MS" pitchFamily="34" charset="0"/>
+                <a:ea typeface="Trebuchet MS" pitchFamily="34" charset="-122"/>
+                <a:cs typeface="Trebuchet MS" pitchFamily="34" charset="-120"/>
+              </a:rPr>
+              <a:t>ed</a:t>
+            </a:r>
+            <a:endParaRPr lang="en-US" sz="1300" dirty="0"/>
+          </a:p>
+        </p:txBody>
+      </p:sp>
+      <p:sp>
+        <p:nvSpPr>
+          <p:cNvPr id="25" name="Text 23"/>
+          <p:cNvSpPr/>
+          <p:nvPr/>
+        </p:nvSpPr>
+        <p:spPr>
+          <a:xfrm>
+            <a:off x="6519672" y="2569464"/>
+            <a:ext cx="1828800" cy="201168"/>
+          </a:xfrm>
+          <a:prstGeom prst="rect">
+            <a:avLst/>
+          </a:prstGeom>
+          <a:noFill/>
+          <a:ln/>
+        </p:spPr>
+        <p:txBody>
+          <a:bodyPr wrap="square" lIns="0" tIns="0" rIns="0" bIns="0" rtlCol="0" anchor="t"/>
+          <a:lstStyle/>
+          <a:p>
+            <a:pPr algn="ctr" indent="0" marL="0">
+              <a:buNone/>
+            </a:pPr>
+            <a:r>
+              <a:rPr lang="en-US" sz="850" dirty="0">
+                <a:solidFill>
+                  <a:srgbClr val="475569"/>
+                </a:solidFill>
+                <a:latin typeface="Calibri" pitchFamily="34" charset="0"/>
+                <a:ea typeface="Calibri" pitchFamily="34" charset="-122"/>
+                <a:cs typeface="Calibri" pitchFamily="34" charset="-120"/>
+              </a:rPr>
+              <a:t>past tense</a:t>
+            </a:r>
+            <a:endParaRPr lang="en-US" sz="850" dirty="0"/>
+          </a:p>
+        </p:txBody>
+      </p:sp>
+      <p:sp>
+        <p:nvSpPr>
+          <p:cNvPr id="26" name="Shape 24"/>
           <p:cNvSpPr/>
           <p:nvPr/>
         </p:nvSpPr>
@@ -23503,7 +24234,7 @@
       </p:sp>
       <p:sp>
         <p:nvSpPr>
-          <p:cNvPr id="23" name="Text 21"/>
+          <p:cNvPr id="27" name="Text 25"/>
           <p:cNvSpPr/>
           <p:nvPr/>
         </p:nvSpPr>
@@ -23542,7 +24273,7 @@
       </p:sp>
       <p:sp>
         <p:nvSpPr>
-          <p:cNvPr id="24" name="Shape 22"/>
+          <p:cNvPr id="28" name="Shape 26"/>
           <p:cNvSpPr/>
           <p:nvPr/>
         </p:nvSpPr>
@@ -23569,7 +24300,7 @@
       </p:sp>
       <p:sp>
         <p:nvSpPr>
-          <p:cNvPr id="25" name="Text 23"/>
+          <p:cNvPr id="29" name="Text 27"/>
           <p:cNvSpPr/>
           <p:nvPr/>
         </p:nvSpPr>
@@ -23608,7 +24339,7 @@
       </p:sp>
       <p:sp>
         <p:nvSpPr>
-          <p:cNvPr id="26" name="Shape 24"/>
+          <p:cNvPr id="30" name="Shape 28"/>
           <p:cNvSpPr/>
           <p:nvPr/>
         </p:nvSpPr>
@@ -23635,7 +24366,7 @@
       </p:sp>
       <p:sp>
         <p:nvSpPr>
-          <p:cNvPr id="27" name="Text 25"/>
+          <p:cNvPr id="31" name="Text 29"/>
           <p:cNvSpPr/>
           <p:nvPr/>
         </p:nvSpPr>
@@ -23674,7 +24405,7 @@
       </p:sp>
       <p:sp>
         <p:nvSpPr>
-          <p:cNvPr id="28" name="Shape 26"/>
+          <p:cNvPr id="32" name="Shape 30"/>
           <p:cNvSpPr/>
           <p:nvPr/>
         </p:nvSpPr>
@@ -23701,7 +24432,7 @@
       </p:sp>
       <p:sp>
         <p:nvSpPr>
-          <p:cNvPr id="29" name="Text 27"/>
+          <p:cNvPr id="33" name="Text 31"/>
           <p:cNvSpPr/>
           <p:nvPr/>
         </p:nvSpPr>
@@ -24024,7 +24755,7 @@
                 <a:ea typeface="Calibri" pitchFamily="34" charset="-122"/>
                 <a:cs typeface="Calibri" pitchFamily="34" charset="-120"/>
               </a:rPr>
-              <a:t>Word Labs  •  wordlabs.app  •  Root: 'fix' = to fasten, attach, or set</a:t>
+              <a:t>Word Labs  •  wordlabs.app  •  Root: 'fix' = fasten, attach, make firm</a:t>
             </a:r>
             <a:endParaRPr lang="en-US" sz="800" dirty="0"/>
           </a:p>
@@ -24097,7 +24828,7 @@
                 <a:ea typeface="Trebuchet MS" pitchFamily="34" charset="-122"/>
                 <a:cs typeface="Trebuchet MS" pitchFamily="34" charset="-120"/>
               </a:rPr>
-              <a:t>We are learning that the root 'fix' means 'to fasten, attach, or set'.</a:t>
+              <a:t>We are learning that the root 'fix' means 'fasten, attach, make firm'.</a:t>
             </a:r>
             <a:endParaRPr lang="en-US" sz="2000" dirty="0"/>
           </a:p>
@@ -24743,7 +25474,7 @@
                 <a:ea typeface="Calibri" pitchFamily="34" charset="-122"/>
                 <a:cs typeface="Calibri" pitchFamily="34" charset="-120"/>
               </a:rPr>
-              <a:t>Word Labs  •  wordlabs.app  •  Root: 'fix' = to fasten, attach, or set</a:t>
+              <a:t>Word Labs  •  wordlabs.app  •  Root: 'fix' = fasten, attach, make firm</a:t>
             </a:r>
             <a:endParaRPr lang="en-US" sz="800" dirty="0"/>
           </a:p>
@@ -24882,7 +25613,7 @@
                 <a:ea typeface="Trebuchet MS" pitchFamily="34" charset="-122"/>
                 <a:cs typeface="Trebuchet MS" pitchFamily="34" charset="-120"/>
               </a:rPr>
-              <a:t>prefix</a:t>
+              <a:t>affixed</a:t>
             </a:r>
             <a:endParaRPr lang="en-US" sz="2800" dirty="0"/>
           </a:p>
@@ -24962,7 +25693,7 @@
         </p:nvSpPr>
         <p:spPr>
           <a:xfrm>
-            <a:off x="2938272" y="2258568"/>
+            <a:off x="2221992" y="2258568"/>
             <a:ext cx="1828800" cy="292608"/>
           </a:xfrm>
           <a:prstGeom prst="rect">
@@ -24996,7 +25727,7 @@
         </p:nvSpPr>
         <p:spPr>
           <a:xfrm>
-            <a:off x="2938272" y="2258568"/>
+            <a:off x="2221992" y="2258568"/>
             <a:ext cx="1828800" cy="292608"/>
           </a:xfrm>
           <a:prstGeom prst="rect">
@@ -25021,7 +25752,7 @@
                 <a:ea typeface="Trebuchet MS" pitchFamily="34" charset="-122"/>
                 <a:cs typeface="Trebuchet MS" pitchFamily="34" charset="-120"/>
               </a:rPr>
-              <a:t>pre</a:t>
+              <a:t>af</a:t>
             </a:r>
             <a:endParaRPr lang="en-US" sz="1300" dirty="0"/>
           </a:p>
@@ -25035,7 +25766,7 @@
         </p:nvSpPr>
         <p:spPr>
           <a:xfrm>
-            <a:off x="2938272" y="2569464"/>
+            <a:off x="2221992" y="2569464"/>
             <a:ext cx="1828800" cy="201168"/>
           </a:xfrm>
           <a:prstGeom prst="rect">
@@ -25060,7 +25791,7 @@
                 <a:ea typeface="Calibri" pitchFamily="34" charset="-122"/>
                 <a:cs typeface="Calibri" pitchFamily="34" charset="-120"/>
               </a:rPr>
-              <a:t>before</a:t>
+              <a:t>to, toward</a:t>
             </a:r>
             <a:endParaRPr lang="en-US" sz="850" dirty="0"/>
           </a:p>
@@ -25068,13 +25799,52 @@
       </p:sp>
       <p:sp>
         <p:nvSpPr>
-          <p:cNvPr id="19" name="Shape 17"/>
-          <p:cNvSpPr/>
-          <p:nvPr/>
-        </p:nvSpPr>
-        <p:spPr>
-          <a:xfrm>
-            <a:off x="5803392" y="2258568"/>
+          <p:cNvPr id="19" name="Text 17"/>
+          <p:cNvSpPr/>
+          <p:nvPr/>
+        </p:nvSpPr>
+        <p:spPr>
+          <a:xfrm>
+            <a:off x="2221992" y="2752344"/>
+            <a:ext cx="1828800" cy="182880"/>
+          </a:xfrm>
+          <a:prstGeom prst="rect">
+            <a:avLst/>
+          </a:prstGeom>
+          <a:noFill/>
+          <a:ln/>
+        </p:spPr>
+        <p:txBody>
+          <a:bodyPr wrap="square" lIns="0" tIns="0" rIns="0" bIns="0" rtlCol="0" anchor="t"/>
+          <a:lstStyle/>
+          <a:p>
+            <a:pPr algn="ctr" indent="0" marL="0">
+              <a:buNone/>
+            </a:pPr>
+            <a:r>
+              <a:rPr lang="en-US" sz="700" i="1" dirty="0">
+                <a:solidFill>
+                  <a:srgbClr val="94A3B8"/>
+                </a:solidFill>
+                <a:latin typeface="Calibri" pitchFamily="34" charset="0"/>
+                <a:ea typeface="Calibri" pitchFamily="34" charset="-122"/>
+                <a:cs typeface="Calibri" pitchFamily="34" charset="-120"/>
+              </a:rPr>
+              <a:t>ad → af before 'f'</a:t>
+            </a:r>
+            <a:endParaRPr lang="en-US" sz="700" dirty="0"/>
+          </a:p>
+        </p:txBody>
+      </p:sp>
+      <p:sp>
+        <p:nvSpPr>
+          <p:cNvPr id="20" name="Shape 18"/>
+          <p:cNvSpPr/>
+          <p:nvPr/>
+        </p:nvSpPr>
+        <p:spPr>
+          <a:xfrm>
+            <a:off x="4370832" y="2258568"/>
             <a:ext cx="1828800" cy="292608"/>
           </a:xfrm>
           <a:prstGeom prst="rect">
@@ -25102,13 +25872,13 @@
       </p:sp>
       <p:sp>
         <p:nvSpPr>
-          <p:cNvPr id="20" name="Text 18"/>
-          <p:cNvSpPr/>
-          <p:nvPr/>
-        </p:nvSpPr>
-        <p:spPr>
-          <a:xfrm>
-            <a:off x="5803392" y="2258568"/>
+          <p:cNvPr id="21" name="Text 19"/>
+          <p:cNvSpPr/>
+          <p:nvPr/>
+        </p:nvSpPr>
+        <p:spPr>
+          <a:xfrm>
+            <a:off x="4370832" y="2258568"/>
             <a:ext cx="1828800" cy="292608"/>
           </a:xfrm>
           <a:prstGeom prst="rect">
@@ -25141,13 +25911,13 @@
       </p:sp>
       <p:sp>
         <p:nvSpPr>
-          <p:cNvPr id="21" name="Text 19"/>
-          <p:cNvSpPr/>
-          <p:nvPr/>
-        </p:nvSpPr>
-        <p:spPr>
-          <a:xfrm>
-            <a:off x="5803392" y="2569464"/>
+          <p:cNvPr id="22" name="Text 20"/>
+          <p:cNvSpPr/>
+          <p:nvPr/>
+        </p:nvSpPr>
+        <p:spPr>
+          <a:xfrm>
+            <a:off x="4370832" y="2569464"/>
             <a:ext cx="1828800" cy="201168"/>
           </a:xfrm>
           <a:prstGeom prst="rect">
@@ -25172,7 +25942,7 @@
                 <a:ea typeface="Calibri" pitchFamily="34" charset="-122"/>
                 <a:cs typeface="Calibri" pitchFamily="34" charset="-120"/>
               </a:rPr>
-              <a:t>to fasten or attach</a:t>
+              <a:t>fasten, attach</a:t>
             </a:r>
             <a:endParaRPr lang="en-US" sz="850" dirty="0"/>
           </a:p>
@@ -25180,7 +25950,119 @@
       </p:sp>
       <p:sp>
         <p:nvSpPr>
-          <p:cNvPr id="22" name="Shape 20"/>
+          <p:cNvPr id="23" name="Shape 21"/>
+          <p:cNvSpPr/>
+          <p:nvPr/>
+        </p:nvSpPr>
+        <p:spPr>
+          <a:xfrm>
+            <a:off x="6519672" y="2258568"/>
+            <a:ext cx="1828800" cy="292608"/>
+          </a:xfrm>
+          <a:prstGeom prst="rect">
+            <a:avLst>
+              <a:gd name="adj" fmla="val 25000"/>
+            </a:avLst>
+          </a:prstGeom>
+          <a:solidFill>
+            <a:srgbClr val="FCE7F3"/>
+          </a:solidFill>
+          <a:ln w="19050">
+            <a:solidFill>
+              <a:srgbClr val="DB2777"/>
+            </a:solidFill>
+            <a:prstDash val="solid"/>
+          </a:ln>
+          <a:effectLst>
+            <a:outerShdw sx="100000" sy="100000" kx="0" ky="0" algn="bl" rotWithShape="0" blurRad="101600" dist="38100" dir="8100000">
+              <a:srgbClr val="000000">
+                <a:alpha val="12000"/>
+              </a:srgbClr>
+            </a:outerShdw>
+          </a:effectLst>
+        </p:spPr>
+      </p:sp>
+      <p:sp>
+        <p:nvSpPr>
+          <p:cNvPr id="24" name="Text 22"/>
+          <p:cNvSpPr/>
+          <p:nvPr/>
+        </p:nvSpPr>
+        <p:spPr>
+          <a:xfrm>
+            <a:off x="6519672" y="2258568"/>
+            <a:ext cx="1828800" cy="292608"/>
+          </a:xfrm>
+          <a:prstGeom prst="rect">
+            <a:avLst/>
+          </a:prstGeom>
+          <a:noFill/>
+          <a:ln/>
+        </p:spPr>
+        <p:txBody>
+          <a:bodyPr wrap="square" lIns="0" tIns="0" rIns="0" bIns="0" rtlCol="0" anchor="ctr"/>
+          <a:lstStyle/>
+          <a:p>
+            <a:pPr algn="ctr" indent="0" marL="0">
+              <a:buNone/>
+            </a:pPr>
+            <a:r>
+              <a:rPr lang="en-US" sz="1300" b="1" dirty="0">
+                <a:solidFill>
+                  <a:srgbClr val="9D174D"/>
+                </a:solidFill>
+                <a:latin typeface="Trebuchet MS" pitchFamily="34" charset="0"/>
+                <a:ea typeface="Trebuchet MS" pitchFamily="34" charset="-122"/>
+                <a:cs typeface="Trebuchet MS" pitchFamily="34" charset="-120"/>
+              </a:rPr>
+              <a:t>ed</a:t>
+            </a:r>
+            <a:endParaRPr lang="en-US" sz="1300" dirty="0"/>
+          </a:p>
+        </p:txBody>
+      </p:sp>
+      <p:sp>
+        <p:nvSpPr>
+          <p:cNvPr id="25" name="Text 23"/>
+          <p:cNvSpPr/>
+          <p:nvPr/>
+        </p:nvSpPr>
+        <p:spPr>
+          <a:xfrm>
+            <a:off x="6519672" y="2569464"/>
+            <a:ext cx="1828800" cy="201168"/>
+          </a:xfrm>
+          <a:prstGeom prst="rect">
+            <a:avLst/>
+          </a:prstGeom>
+          <a:noFill/>
+          <a:ln/>
+        </p:spPr>
+        <p:txBody>
+          <a:bodyPr wrap="square" lIns="0" tIns="0" rIns="0" bIns="0" rtlCol="0" anchor="t"/>
+          <a:lstStyle/>
+          <a:p>
+            <a:pPr algn="ctr" indent="0" marL="0">
+              <a:buNone/>
+            </a:pPr>
+            <a:r>
+              <a:rPr lang="en-US" sz="850" dirty="0">
+                <a:solidFill>
+                  <a:srgbClr val="475569"/>
+                </a:solidFill>
+                <a:latin typeface="Calibri" pitchFamily="34" charset="0"/>
+                <a:ea typeface="Calibri" pitchFamily="34" charset="-122"/>
+                <a:cs typeface="Calibri" pitchFamily="34" charset="-120"/>
+              </a:rPr>
+              <a:t>past tense</a:t>
+            </a:r>
+            <a:endParaRPr lang="en-US" sz="850" dirty="0"/>
+          </a:p>
+        </p:txBody>
+      </p:sp>
+      <p:sp>
+        <p:nvSpPr>
+          <p:cNvPr id="26" name="Shape 24"/>
           <p:cNvSpPr/>
           <p:nvPr/>
         </p:nvSpPr>
@@ -25207,7 +26089,7 @@
       </p:sp>
       <p:sp>
         <p:nvSpPr>
-          <p:cNvPr id="23" name="Text 21"/>
+          <p:cNvPr id="27" name="Text 25"/>
           <p:cNvSpPr/>
           <p:nvPr/>
         </p:nvSpPr>
@@ -25246,7 +26128,7 @@
       </p:sp>
       <p:sp>
         <p:nvSpPr>
-          <p:cNvPr id="24" name="Shape 22"/>
+          <p:cNvPr id="28" name="Shape 26"/>
           <p:cNvSpPr/>
           <p:nvPr/>
         </p:nvSpPr>
@@ -25273,7 +26155,7 @@
       </p:sp>
       <p:sp>
         <p:nvSpPr>
-          <p:cNvPr id="25" name="Shape 23"/>
+          <p:cNvPr id="29" name="Shape 27"/>
           <p:cNvSpPr/>
           <p:nvPr/>
         </p:nvSpPr>
@@ -25300,7 +26182,7 @@
       </p:sp>
       <p:sp>
         <p:nvSpPr>
-          <p:cNvPr id="26" name="Text 24"/>
+          <p:cNvPr id="30" name="Text 28"/>
           <p:cNvSpPr/>
           <p:nvPr/>
         </p:nvSpPr>
@@ -25331,7 +26213,7 @@
                 <a:ea typeface="Trebuchet MS" pitchFamily="34" charset="-122"/>
                 <a:cs typeface="Trebuchet MS" pitchFamily="34" charset="-120"/>
               </a:rPr>
-              <a:t>pre</a:t>
+              <a:t>af</a:t>
             </a:r>
             <a:endParaRPr lang="en-US" sz="1400" dirty="0"/>
           </a:p>
@@ -25339,7 +26221,7 @@
       </p:sp>
       <p:sp>
         <p:nvSpPr>
-          <p:cNvPr id="27" name="Text 25"/>
+          <p:cNvPr id="31" name="Text 29"/>
           <p:cNvSpPr/>
           <p:nvPr/>
         </p:nvSpPr>
@@ -25378,7 +26260,7 @@
       </p:sp>
       <p:sp>
         <p:nvSpPr>
-          <p:cNvPr id="28" name="Shape 26"/>
+          <p:cNvPr id="32" name="Shape 30"/>
           <p:cNvSpPr/>
           <p:nvPr/>
         </p:nvSpPr>
@@ -25405,7 +26287,7 @@
       </p:sp>
       <p:sp>
         <p:nvSpPr>
-          <p:cNvPr id="29" name="Text 27"/>
+          <p:cNvPr id="33" name="Text 31"/>
           <p:cNvSpPr/>
           <p:nvPr/>
         </p:nvSpPr>
@@ -25436,7 +26318,7 @@
                 <a:ea typeface="Trebuchet MS" pitchFamily="34" charset="-122"/>
                 <a:cs typeface="Trebuchet MS" pitchFamily="34" charset="-120"/>
               </a:rPr>
-              <a:t>fix</a:t>
+              <a:t>fixed</a:t>
             </a:r>
             <a:endParaRPr lang="en-US" sz="1400" dirty="0"/>
           </a:p>
@@ -25444,7 +26326,7 @@
       </p:sp>
       <p:sp>
         <p:nvSpPr>
-          <p:cNvPr id="30" name="Shape 28"/>
+          <p:cNvPr id="34" name="Shape 32"/>
           <p:cNvSpPr/>
           <p:nvPr/>
         </p:nvSpPr>
@@ -25471,7 +26353,7 @@
       </p:sp>
       <p:sp>
         <p:nvSpPr>
-          <p:cNvPr id="31" name="Text 29"/>
+          <p:cNvPr id="35" name="Text 33"/>
           <p:cNvSpPr/>
           <p:nvPr/>
         </p:nvSpPr>
@@ -25510,7 +26392,7 @@
       </p:sp>
       <p:sp>
         <p:nvSpPr>
-          <p:cNvPr id="32" name="Shape 30"/>
+          <p:cNvPr id="36" name="Shape 34"/>
           <p:cNvSpPr/>
           <p:nvPr/>
         </p:nvSpPr>
@@ -25537,7 +26419,7 @@
       </p:sp>
       <p:sp>
         <p:nvSpPr>
-          <p:cNvPr id="33" name="Text 31"/>
+          <p:cNvPr id="37" name="Text 35"/>
           <p:cNvSpPr/>
           <p:nvPr/>
         </p:nvSpPr>
@@ -25860,7 +26742,7 @@
                 <a:ea typeface="Calibri" pitchFamily="34" charset="-122"/>
                 <a:cs typeface="Calibri" pitchFamily="34" charset="-120"/>
               </a:rPr>
-              <a:t>Word Labs  •  wordlabs.app  •  Root: 'fix' = to fasten, attach, or set</a:t>
+              <a:t>Word Labs  •  wordlabs.app  •  Root: 'fix' = fasten, attach, make firm</a:t>
             </a:r>
             <a:endParaRPr lang="en-US" sz="800" dirty="0"/>
           </a:p>
@@ -25999,7 +26881,7 @@
                 <a:ea typeface="Trebuchet MS" pitchFamily="34" charset="-122"/>
                 <a:cs typeface="Trebuchet MS" pitchFamily="34" charset="-120"/>
               </a:rPr>
-              <a:t>prefix</a:t>
+              <a:t>affixed</a:t>
             </a:r>
             <a:endParaRPr lang="en-US" sz="2800" dirty="0"/>
           </a:p>
@@ -26079,7 +26961,7 @@
         </p:nvSpPr>
         <p:spPr>
           <a:xfrm>
-            <a:off x="2938272" y="2258568"/>
+            <a:off x="2221992" y="2258568"/>
             <a:ext cx="1828800" cy="292608"/>
           </a:xfrm>
           <a:prstGeom prst="rect">
@@ -26113,7 +26995,7 @@
         </p:nvSpPr>
         <p:spPr>
           <a:xfrm>
-            <a:off x="2938272" y="2258568"/>
+            <a:off x="2221992" y="2258568"/>
             <a:ext cx="1828800" cy="292608"/>
           </a:xfrm>
           <a:prstGeom prst="rect">
@@ -26138,7 +27020,7 @@
                 <a:ea typeface="Trebuchet MS" pitchFamily="34" charset="-122"/>
                 <a:cs typeface="Trebuchet MS" pitchFamily="34" charset="-120"/>
               </a:rPr>
-              <a:t>pre</a:t>
+              <a:t>af</a:t>
             </a:r>
             <a:endParaRPr lang="en-US" sz="1300" dirty="0"/>
           </a:p>
@@ -26152,7 +27034,7 @@
         </p:nvSpPr>
         <p:spPr>
           <a:xfrm>
-            <a:off x="2938272" y="2569464"/>
+            <a:off x="2221992" y="2569464"/>
             <a:ext cx="1828800" cy="201168"/>
           </a:xfrm>
           <a:prstGeom prst="rect">
@@ -26177,7 +27059,7 @@
                 <a:ea typeface="Calibri" pitchFamily="34" charset="-122"/>
                 <a:cs typeface="Calibri" pitchFamily="34" charset="-120"/>
               </a:rPr>
-              <a:t>before</a:t>
+              <a:t>to, toward</a:t>
             </a:r>
             <a:endParaRPr lang="en-US" sz="850" dirty="0"/>
           </a:p>
@@ -26185,13 +27067,52 @@
       </p:sp>
       <p:sp>
         <p:nvSpPr>
-          <p:cNvPr id="19" name="Shape 17"/>
-          <p:cNvSpPr/>
-          <p:nvPr/>
-        </p:nvSpPr>
-        <p:spPr>
-          <a:xfrm>
-            <a:off x="5803392" y="2258568"/>
+          <p:cNvPr id="19" name="Text 17"/>
+          <p:cNvSpPr/>
+          <p:nvPr/>
+        </p:nvSpPr>
+        <p:spPr>
+          <a:xfrm>
+            <a:off x="2221992" y="2752344"/>
+            <a:ext cx="1828800" cy="182880"/>
+          </a:xfrm>
+          <a:prstGeom prst="rect">
+            <a:avLst/>
+          </a:prstGeom>
+          <a:noFill/>
+          <a:ln/>
+        </p:spPr>
+        <p:txBody>
+          <a:bodyPr wrap="square" lIns="0" tIns="0" rIns="0" bIns="0" rtlCol="0" anchor="t"/>
+          <a:lstStyle/>
+          <a:p>
+            <a:pPr algn="ctr" indent="0" marL="0">
+              <a:buNone/>
+            </a:pPr>
+            <a:r>
+              <a:rPr lang="en-US" sz="700" i="1" dirty="0">
+                <a:solidFill>
+                  <a:srgbClr val="94A3B8"/>
+                </a:solidFill>
+                <a:latin typeface="Calibri" pitchFamily="34" charset="0"/>
+                <a:ea typeface="Calibri" pitchFamily="34" charset="-122"/>
+                <a:cs typeface="Calibri" pitchFamily="34" charset="-120"/>
+              </a:rPr>
+              <a:t>ad → af before 'f'</a:t>
+            </a:r>
+            <a:endParaRPr lang="en-US" sz="700" dirty="0"/>
+          </a:p>
+        </p:txBody>
+      </p:sp>
+      <p:sp>
+        <p:nvSpPr>
+          <p:cNvPr id="20" name="Shape 18"/>
+          <p:cNvSpPr/>
+          <p:nvPr/>
+        </p:nvSpPr>
+        <p:spPr>
+          <a:xfrm>
+            <a:off x="4370832" y="2258568"/>
             <a:ext cx="1828800" cy="292608"/>
           </a:xfrm>
           <a:prstGeom prst="rect">
@@ -26219,13 +27140,13 @@
       </p:sp>
       <p:sp>
         <p:nvSpPr>
-          <p:cNvPr id="20" name="Text 18"/>
-          <p:cNvSpPr/>
-          <p:nvPr/>
-        </p:nvSpPr>
-        <p:spPr>
-          <a:xfrm>
-            <a:off x="5803392" y="2258568"/>
+          <p:cNvPr id="21" name="Text 19"/>
+          <p:cNvSpPr/>
+          <p:nvPr/>
+        </p:nvSpPr>
+        <p:spPr>
+          <a:xfrm>
+            <a:off x="4370832" y="2258568"/>
             <a:ext cx="1828800" cy="292608"/>
           </a:xfrm>
           <a:prstGeom prst="rect">
@@ -26258,13 +27179,13 @@
       </p:sp>
       <p:sp>
         <p:nvSpPr>
-          <p:cNvPr id="21" name="Text 19"/>
-          <p:cNvSpPr/>
-          <p:nvPr/>
-        </p:nvSpPr>
-        <p:spPr>
-          <a:xfrm>
-            <a:off x="5803392" y="2569464"/>
+          <p:cNvPr id="22" name="Text 20"/>
+          <p:cNvSpPr/>
+          <p:nvPr/>
+        </p:nvSpPr>
+        <p:spPr>
+          <a:xfrm>
+            <a:off x="4370832" y="2569464"/>
             <a:ext cx="1828800" cy="201168"/>
           </a:xfrm>
           <a:prstGeom prst="rect">
@@ -26289,7 +27210,7 @@
                 <a:ea typeface="Calibri" pitchFamily="34" charset="-122"/>
                 <a:cs typeface="Calibri" pitchFamily="34" charset="-120"/>
               </a:rPr>
-              <a:t>to fasten or attach</a:t>
+              <a:t>fasten, attach</a:t>
             </a:r>
             <a:endParaRPr lang="en-US" sz="850" dirty="0"/>
           </a:p>
@@ -26297,7 +27218,119 @@
       </p:sp>
       <p:sp>
         <p:nvSpPr>
-          <p:cNvPr id="22" name="Shape 20"/>
+          <p:cNvPr id="23" name="Shape 21"/>
+          <p:cNvSpPr/>
+          <p:nvPr/>
+        </p:nvSpPr>
+        <p:spPr>
+          <a:xfrm>
+            <a:off x="6519672" y="2258568"/>
+            <a:ext cx="1828800" cy="292608"/>
+          </a:xfrm>
+          <a:prstGeom prst="rect">
+            <a:avLst>
+              <a:gd name="adj" fmla="val 25000"/>
+            </a:avLst>
+          </a:prstGeom>
+          <a:solidFill>
+            <a:srgbClr val="FCE7F3"/>
+          </a:solidFill>
+          <a:ln w="19050">
+            <a:solidFill>
+              <a:srgbClr val="DB2777"/>
+            </a:solidFill>
+            <a:prstDash val="solid"/>
+          </a:ln>
+          <a:effectLst>
+            <a:outerShdw sx="100000" sy="100000" kx="0" ky="0" algn="bl" rotWithShape="0" blurRad="101600" dist="38100" dir="8100000">
+              <a:srgbClr val="000000">
+                <a:alpha val="12000"/>
+              </a:srgbClr>
+            </a:outerShdw>
+          </a:effectLst>
+        </p:spPr>
+      </p:sp>
+      <p:sp>
+        <p:nvSpPr>
+          <p:cNvPr id="24" name="Text 22"/>
+          <p:cNvSpPr/>
+          <p:nvPr/>
+        </p:nvSpPr>
+        <p:spPr>
+          <a:xfrm>
+            <a:off x="6519672" y="2258568"/>
+            <a:ext cx="1828800" cy="292608"/>
+          </a:xfrm>
+          <a:prstGeom prst="rect">
+            <a:avLst/>
+          </a:prstGeom>
+          <a:noFill/>
+          <a:ln/>
+        </p:spPr>
+        <p:txBody>
+          <a:bodyPr wrap="square" lIns="0" tIns="0" rIns="0" bIns="0" rtlCol="0" anchor="ctr"/>
+          <a:lstStyle/>
+          <a:p>
+            <a:pPr algn="ctr" indent="0" marL="0">
+              <a:buNone/>
+            </a:pPr>
+            <a:r>
+              <a:rPr lang="en-US" sz="1300" b="1" dirty="0">
+                <a:solidFill>
+                  <a:srgbClr val="9D174D"/>
+                </a:solidFill>
+                <a:latin typeface="Trebuchet MS" pitchFamily="34" charset="0"/>
+                <a:ea typeface="Trebuchet MS" pitchFamily="34" charset="-122"/>
+                <a:cs typeface="Trebuchet MS" pitchFamily="34" charset="-120"/>
+              </a:rPr>
+              <a:t>ed</a:t>
+            </a:r>
+            <a:endParaRPr lang="en-US" sz="1300" dirty="0"/>
+          </a:p>
+        </p:txBody>
+      </p:sp>
+      <p:sp>
+        <p:nvSpPr>
+          <p:cNvPr id="25" name="Text 23"/>
+          <p:cNvSpPr/>
+          <p:nvPr/>
+        </p:nvSpPr>
+        <p:spPr>
+          <a:xfrm>
+            <a:off x="6519672" y="2569464"/>
+            <a:ext cx="1828800" cy="201168"/>
+          </a:xfrm>
+          <a:prstGeom prst="rect">
+            <a:avLst/>
+          </a:prstGeom>
+          <a:noFill/>
+          <a:ln/>
+        </p:spPr>
+        <p:txBody>
+          <a:bodyPr wrap="square" lIns="0" tIns="0" rIns="0" bIns="0" rtlCol="0" anchor="t"/>
+          <a:lstStyle/>
+          <a:p>
+            <a:pPr algn="ctr" indent="0" marL="0">
+              <a:buNone/>
+            </a:pPr>
+            <a:r>
+              <a:rPr lang="en-US" sz="850" dirty="0">
+                <a:solidFill>
+                  <a:srgbClr val="475569"/>
+                </a:solidFill>
+                <a:latin typeface="Calibri" pitchFamily="34" charset="0"/>
+                <a:ea typeface="Calibri" pitchFamily="34" charset="-122"/>
+                <a:cs typeface="Calibri" pitchFamily="34" charset="-120"/>
+              </a:rPr>
+              <a:t>past tense</a:t>
+            </a:r>
+            <a:endParaRPr lang="en-US" sz="850" dirty="0"/>
+          </a:p>
+        </p:txBody>
+      </p:sp>
+      <p:sp>
+        <p:nvSpPr>
+          <p:cNvPr id="26" name="Shape 24"/>
           <p:cNvSpPr/>
           <p:nvPr/>
         </p:nvSpPr>
@@ -26324,7 +27357,7 @@
       </p:sp>
       <p:sp>
         <p:nvSpPr>
-          <p:cNvPr id="23" name="Text 21"/>
+          <p:cNvPr id="27" name="Text 25"/>
           <p:cNvSpPr/>
           <p:nvPr/>
         </p:nvSpPr>
@@ -26363,7 +27396,7 @@
       </p:sp>
       <p:sp>
         <p:nvSpPr>
-          <p:cNvPr id="24" name="Shape 22"/>
+          <p:cNvPr id="28" name="Shape 26"/>
           <p:cNvSpPr/>
           <p:nvPr/>
         </p:nvSpPr>
@@ -26390,7 +27423,7 @@
       </p:sp>
       <p:sp>
         <p:nvSpPr>
-          <p:cNvPr id="25" name="Shape 23"/>
+          <p:cNvPr id="29" name="Shape 27"/>
           <p:cNvSpPr/>
           <p:nvPr/>
         </p:nvSpPr>
@@ -26417,7 +27450,7 @@
       </p:sp>
       <p:sp>
         <p:nvSpPr>
-          <p:cNvPr id="26" name="Text 24"/>
+          <p:cNvPr id="30" name="Text 28"/>
           <p:cNvSpPr/>
           <p:nvPr/>
         </p:nvSpPr>
@@ -26448,7 +27481,7 @@
                 <a:ea typeface="Trebuchet MS" pitchFamily="34" charset="-122"/>
                 <a:cs typeface="Trebuchet MS" pitchFamily="34" charset="-120"/>
               </a:rPr>
-              <a:t>pre</a:t>
+              <a:t>af</a:t>
             </a:r>
             <a:endParaRPr lang="en-US" sz="1400" dirty="0"/>
           </a:p>
@@ -26456,7 +27489,7 @@
       </p:sp>
       <p:sp>
         <p:nvSpPr>
-          <p:cNvPr id="27" name="Text 25"/>
+          <p:cNvPr id="31" name="Text 29"/>
           <p:cNvSpPr/>
           <p:nvPr/>
         </p:nvSpPr>
@@ -26495,7 +27528,7 @@
       </p:sp>
       <p:sp>
         <p:nvSpPr>
-          <p:cNvPr id="28" name="Shape 26"/>
+          <p:cNvPr id="32" name="Shape 30"/>
           <p:cNvSpPr/>
           <p:nvPr/>
         </p:nvSpPr>
@@ -26522,7 +27555,7 @@
       </p:sp>
       <p:sp>
         <p:nvSpPr>
-          <p:cNvPr id="29" name="Text 27"/>
+          <p:cNvPr id="33" name="Text 31"/>
           <p:cNvSpPr/>
           <p:nvPr/>
         </p:nvSpPr>
@@ -26553,7 +27586,7 @@
                 <a:ea typeface="Trebuchet MS" pitchFamily="34" charset="-122"/>
                 <a:cs typeface="Trebuchet MS" pitchFamily="34" charset="-120"/>
               </a:rPr>
-              <a:t>fix</a:t>
+              <a:t>fixed</a:t>
             </a:r>
             <a:endParaRPr lang="en-US" sz="1400" dirty="0"/>
           </a:p>
@@ -26561,7 +27594,7 @@
       </p:sp>
       <p:sp>
         <p:nvSpPr>
-          <p:cNvPr id="30" name="Shape 28"/>
+          <p:cNvPr id="34" name="Shape 32"/>
           <p:cNvSpPr/>
           <p:nvPr/>
         </p:nvSpPr>
@@ -26588,7 +27621,7 @@
       </p:sp>
       <p:sp>
         <p:nvSpPr>
-          <p:cNvPr id="31" name="Text 29"/>
+          <p:cNvPr id="35" name="Text 33"/>
           <p:cNvSpPr/>
           <p:nvPr/>
         </p:nvSpPr>
@@ -26627,7 +27660,7 @@
       </p:sp>
       <p:sp>
         <p:nvSpPr>
-          <p:cNvPr id="32" name="Shape 30"/>
+          <p:cNvPr id="36" name="Shape 34"/>
           <p:cNvSpPr/>
           <p:nvPr/>
         </p:nvSpPr>
@@ -26654,13 +27687,13 @@
       </p:sp>
       <p:sp>
         <p:nvSpPr>
-          <p:cNvPr id="33" name="Shape 31"/>
-          <p:cNvSpPr/>
-          <p:nvPr/>
-        </p:nvSpPr>
-        <p:spPr>
-          <a:xfrm>
-            <a:off x="2254649" y="4169664"/>
+          <p:cNvPr id="37" name="Shape 35"/>
+          <p:cNvSpPr/>
+          <p:nvPr/>
+        </p:nvSpPr>
+        <p:spPr>
+          <a:xfrm>
+            <a:off x="2427732" y="4169664"/>
             <a:ext cx="685800" cy="384048"/>
           </a:xfrm>
           <a:prstGeom prst="rect">
@@ -26681,13 +27714,13 @@
       </p:sp>
       <p:sp>
         <p:nvSpPr>
-          <p:cNvPr id="34" name="Text 32"/>
-          <p:cNvSpPr/>
-          <p:nvPr/>
-        </p:nvSpPr>
-        <p:spPr>
-          <a:xfrm>
-            <a:off x="2254649" y="4169664"/>
+          <p:cNvPr id="38" name="Text 36"/>
+          <p:cNvSpPr/>
+          <p:nvPr/>
+        </p:nvSpPr>
+        <p:spPr>
+          <a:xfrm>
+            <a:off x="2427732" y="4169664"/>
             <a:ext cx="685800" cy="384048"/>
           </a:xfrm>
           <a:prstGeom prst="rect">
@@ -26712,7 +27745,7 @@
                 <a:ea typeface="Trebuchet MS" pitchFamily="34" charset="-122"/>
                 <a:cs typeface="Trebuchet MS" pitchFamily="34" charset="-120"/>
               </a:rPr>
-              <a:t>p</a:t>
+              <a:t>a</a:t>
             </a:r>
             <a:endParaRPr lang="en-US" sz="900" dirty="0"/>
           </a:p>
@@ -26720,13 +27753,13 @@
       </p:sp>
       <p:sp>
         <p:nvSpPr>
-          <p:cNvPr id="35" name="Shape 33"/>
-          <p:cNvSpPr/>
-          <p:nvPr/>
-        </p:nvSpPr>
-        <p:spPr>
-          <a:xfrm>
-            <a:off x="3293146" y="4169664"/>
+          <p:cNvPr id="39" name="Shape 37"/>
+          <p:cNvSpPr/>
+          <p:nvPr/>
+        </p:nvSpPr>
+        <p:spPr>
+          <a:xfrm>
+            <a:off x="3639312" y="4169664"/>
             <a:ext cx="685800" cy="384048"/>
           </a:xfrm>
           <a:prstGeom prst="rect">
@@ -26747,13 +27780,13 @@
       </p:sp>
       <p:sp>
         <p:nvSpPr>
-          <p:cNvPr id="36" name="Text 34"/>
-          <p:cNvSpPr/>
-          <p:nvPr/>
-        </p:nvSpPr>
-        <p:spPr>
-          <a:xfrm>
-            <a:off x="3293146" y="4169664"/>
+          <p:cNvPr id="40" name="Text 38"/>
+          <p:cNvSpPr/>
+          <p:nvPr/>
+        </p:nvSpPr>
+        <p:spPr>
+          <a:xfrm>
+            <a:off x="3639312" y="4169664"/>
             <a:ext cx="685800" cy="384048"/>
           </a:xfrm>
           <a:prstGeom prst="rect">
@@ -26778,7 +27811,7 @@
                 <a:ea typeface="Trebuchet MS" pitchFamily="34" charset="-122"/>
                 <a:cs typeface="Trebuchet MS" pitchFamily="34" charset="-120"/>
               </a:rPr>
-              <a:t>r</a:t>
+              <a:t>ff</a:t>
             </a:r>
             <a:endParaRPr lang="en-US" sz="900" dirty="0"/>
           </a:p>
@@ -26786,13 +27819,13 @@
       </p:sp>
       <p:sp>
         <p:nvSpPr>
-          <p:cNvPr id="37" name="Shape 35"/>
-          <p:cNvSpPr/>
-          <p:nvPr/>
-        </p:nvSpPr>
-        <p:spPr>
-          <a:xfrm>
-            <a:off x="4331643" y="4169664"/>
+          <p:cNvPr id="41" name="Shape 39"/>
+          <p:cNvSpPr/>
+          <p:nvPr/>
+        </p:nvSpPr>
+        <p:spPr>
+          <a:xfrm>
+            <a:off x="4850892" y="4169664"/>
             <a:ext cx="685800" cy="384048"/>
           </a:xfrm>
           <a:prstGeom prst="rect">
@@ -26813,13 +27846,13 @@
       </p:sp>
       <p:sp>
         <p:nvSpPr>
-          <p:cNvPr id="38" name="Text 36"/>
-          <p:cNvSpPr/>
-          <p:nvPr/>
-        </p:nvSpPr>
-        <p:spPr>
-          <a:xfrm>
-            <a:off x="4331643" y="4169664"/>
+          <p:cNvPr id="42" name="Text 40"/>
+          <p:cNvSpPr/>
+          <p:nvPr/>
+        </p:nvSpPr>
+        <p:spPr>
+          <a:xfrm>
+            <a:off x="4850892" y="4169664"/>
             <a:ext cx="685800" cy="384048"/>
           </a:xfrm>
           <a:prstGeom prst="rect">
@@ -26844,7 +27877,7 @@
                 <a:ea typeface="Trebuchet MS" pitchFamily="34" charset="-122"/>
                 <a:cs typeface="Trebuchet MS" pitchFamily="34" charset="-120"/>
               </a:rPr>
-              <a:t>e</a:t>
+              <a:t>i</a:t>
             </a:r>
             <a:endParaRPr lang="en-US" sz="900" dirty="0"/>
           </a:p>
@@ -26852,13 +27885,13 @@
       </p:sp>
       <p:sp>
         <p:nvSpPr>
-          <p:cNvPr id="39" name="Shape 37"/>
-          <p:cNvSpPr/>
-          <p:nvPr/>
-        </p:nvSpPr>
-        <p:spPr>
-          <a:xfrm>
-            <a:off x="5370141" y="4169664"/>
+          <p:cNvPr id="43" name="Shape 41"/>
+          <p:cNvSpPr/>
+          <p:nvPr/>
+        </p:nvSpPr>
+        <p:spPr>
+          <a:xfrm>
+            <a:off x="6062472" y="4169664"/>
             <a:ext cx="685800" cy="384048"/>
           </a:xfrm>
           <a:prstGeom prst="rect">
@@ -26879,13 +27912,13 @@
       </p:sp>
       <p:sp>
         <p:nvSpPr>
-          <p:cNvPr id="40" name="Text 38"/>
-          <p:cNvSpPr/>
-          <p:nvPr/>
-        </p:nvSpPr>
-        <p:spPr>
-          <a:xfrm>
-            <a:off x="5370141" y="4169664"/>
+          <p:cNvPr id="44" name="Text 42"/>
+          <p:cNvSpPr/>
+          <p:nvPr/>
+        </p:nvSpPr>
+        <p:spPr>
+          <a:xfrm>
+            <a:off x="6062472" y="4169664"/>
             <a:ext cx="685800" cy="384048"/>
           </a:xfrm>
           <a:prstGeom prst="rect">
@@ -26910,7 +27943,7 @@
                 <a:ea typeface="Trebuchet MS" pitchFamily="34" charset="-122"/>
                 <a:cs typeface="Trebuchet MS" pitchFamily="34" charset="-120"/>
               </a:rPr>
-              <a:t>f</a:t>
+              <a:t>x</a:t>
             </a:r>
             <a:endParaRPr lang="en-US" sz="900" dirty="0"/>
           </a:p>
@@ -26918,13 +27951,52 @@
       </p:sp>
       <p:sp>
         <p:nvSpPr>
-          <p:cNvPr id="41" name="Shape 39"/>
-          <p:cNvSpPr/>
-          <p:nvPr/>
-        </p:nvSpPr>
-        <p:spPr>
-          <a:xfrm>
-            <a:off x="6408638" y="4169664"/>
+          <p:cNvPr id="45" name="Text 43"/>
+          <p:cNvSpPr/>
+          <p:nvPr/>
+        </p:nvSpPr>
+        <p:spPr>
+          <a:xfrm>
+            <a:off x="6062472" y="4572000"/>
+            <a:ext cx="685800" cy="219456"/>
+          </a:xfrm>
+          <a:prstGeom prst="rect">
+            <a:avLst/>
+          </a:prstGeom>
+          <a:noFill/>
+          <a:ln/>
+        </p:spPr>
+        <p:txBody>
+          <a:bodyPr wrap="square" lIns="0" tIns="0" rIns="0" bIns="0" rtlCol="0" anchor="t"/>
+          <a:lstStyle/>
+          <a:p>
+            <a:pPr algn="ctr" indent="0" marL="0">
+              <a:buNone/>
+            </a:pPr>
+            <a:r>
+              <a:rPr lang="en-US" sz="750" i="1" dirty="0">
+                <a:solidFill>
+                  <a:srgbClr val="94A3B8"/>
+                </a:solidFill>
+                <a:latin typeface="Calibri" pitchFamily="34" charset="0"/>
+                <a:ea typeface="Calibri" pitchFamily="34" charset="-122"/>
+                <a:cs typeface="Calibri" pitchFamily="34" charset="-120"/>
+              </a:rPr>
+              <a:t>/ks/</a:t>
+            </a:r>
+            <a:endParaRPr lang="en-US" sz="750" dirty="0"/>
+          </a:p>
+        </p:txBody>
+      </p:sp>
+      <p:sp>
+        <p:nvSpPr>
+          <p:cNvPr id="46" name="Shape 44"/>
+          <p:cNvSpPr/>
+          <p:nvPr/>
+        </p:nvSpPr>
+        <p:spPr>
+          <a:xfrm>
+            <a:off x="7274052" y="4169664"/>
             <a:ext cx="685800" cy="384048"/>
           </a:xfrm>
           <a:prstGeom prst="rect">
@@ -26945,13 +28017,13 @@
       </p:sp>
       <p:sp>
         <p:nvSpPr>
-          <p:cNvPr id="42" name="Text 40"/>
-          <p:cNvSpPr/>
-          <p:nvPr/>
-        </p:nvSpPr>
-        <p:spPr>
-          <a:xfrm>
-            <a:off x="6408638" y="4169664"/>
+          <p:cNvPr id="47" name="Text 45"/>
+          <p:cNvSpPr/>
+          <p:nvPr/>
+        </p:nvSpPr>
+        <p:spPr>
+          <a:xfrm>
+            <a:off x="7274052" y="4169664"/>
             <a:ext cx="685800" cy="384048"/>
           </a:xfrm>
           <a:prstGeom prst="rect">
@@ -26976,114 +28048,9 @@
                 <a:ea typeface="Trebuchet MS" pitchFamily="34" charset="-122"/>
                 <a:cs typeface="Trebuchet MS" pitchFamily="34" charset="-120"/>
               </a:rPr>
-              <a:t>i</a:t>
+              <a:t>t</a:t>
             </a:r>
             <a:endParaRPr lang="en-US" sz="900" dirty="0"/>
-          </a:p>
-        </p:txBody>
-      </p:sp>
-      <p:sp>
-        <p:nvSpPr>
-          <p:cNvPr id="43" name="Shape 41"/>
-          <p:cNvSpPr/>
-          <p:nvPr/>
-        </p:nvSpPr>
-        <p:spPr>
-          <a:xfrm>
-            <a:off x="7447135" y="4169664"/>
-            <a:ext cx="685800" cy="384048"/>
-          </a:xfrm>
-          <a:prstGeom prst="rect">
-            <a:avLst>
-              <a:gd name="adj" fmla="val 9524"/>
-            </a:avLst>
-          </a:prstGeom>
-          <a:solidFill>
-            <a:srgbClr val="FFFFFF"/>
-          </a:solidFill>
-          <a:ln w="12700">
-            <a:solidFill>
-              <a:srgbClr val="DB2777"/>
-            </a:solidFill>
-            <a:prstDash val="solid"/>
-          </a:ln>
-        </p:spPr>
-      </p:sp>
-      <p:sp>
-        <p:nvSpPr>
-          <p:cNvPr id="44" name="Text 42"/>
-          <p:cNvSpPr/>
-          <p:nvPr/>
-        </p:nvSpPr>
-        <p:spPr>
-          <a:xfrm>
-            <a:off x="7447135" y="4169664"/>
-            <a:ext cx="685800" cy="384048"/>
-          </a:xfrm>
-          <a:prstGeom prst="rect">
-            <a:avLst/>
-          </a:prstGeom>
-          <a:noFill/>
-          <a:ln/>
-        </p:spPr>
-        <p:txBody>
-          <a:bodyPr wrap="square" lIns="0" tIns="0" rIns="0" bIns="0" rtlCol="0" anchor="ctr"/>
-          <a:lstStyle/>
-          <a:p>
-            <a:pPr algn="ctr" indent="0" marL="0">
-              <a:buNone/>
-            </a:pPr>
-            <a:r>
-              <a:rPr lang="en-US" sz="900" b="1" dirty="0">
-                <a:solidFill>
-                  <a:srgbClr val="9D174D"/>
-                </a:solidFill>
-                <a:latin typeface="Trebuchet MS" pitchFamily="34" charset="0"/>
-                <a:ea typeface="Trebuchet MS" pitchFamily="34" charset="-122"/>
-                <a:cs typeface="Trebuchet MS" pitchFamily="34" charset="-120"/>
-              </a:rPr>
-              <a:t>x</a:t>
-            </a:r>
-            <a:endParaRPr lang="en-US" sz="900" dirty="0"/>
-          </a:p>
-        </p:txBody>
-      </p:sp>
-      <p:sp>
-        <p:nvSpPr>
-          <p:cNvPr id="45" name="Text 43"/>
-          <p:cNvSpPr/>
-          <p:nvPr/>
-        </p:nvSpPr>
-        <p:spPr>
-          <a:xfrm>
-            <a:off x="7447135" y="4572000"/>
-            <a:ext cx="685800" cy="219456"/>
-          </a:xfrm>
-          <a:prstGeom prst="rect">
-            <a:avLst/>
-          </a:prstGeom>
-          <a:noFill/>
-          <a:ln/>
-        </p:spPr>
-        <p:txBody>
-          <a:bodyPr wrap="square" lIns="0" tIns="0" rIns="0" bIns="0" rtlCol="0" anchor="t"/>
-          <a:lstStyle/>
-          <a:p>
-            <a:pPr algn="ctr" indent="0" marL="0">
-              <a:buNone/>
-            </a:pPr>
-            <a:r>
-              <a:rPr lang="en-US" sz="750" i="1" dirty="0">
-                <a:solidFill>
-                  <a:srgbClr val="94A3B8"/>
-                </a:solidFill>
-                <a:latin typeface="Calibri" pitchFamily="34" charset="0"/>
-                <a:ea typeface="Calibri" pitchFamily="34" charset="-122"/>
-                <a:cs typeface="Calibri" pitchFamily="34" charset="-120"/>
-              </a:rPr>
-              <a:t>/ks/</a:t>
-            </a:r>
-            <a:endParaRPr lang="en-US" sz="750" dirty="0"/>
           </a:p>
         </p:txBody>
       </p:sp>
@@ -27373,7 +28340,7 @@
                 <a:ea typeface="Calibri" pitchFamily="34" charset="-122"/>
                 <a:cs typeface="Calibri" pitchFamily="34" charset="-120"/>
               </a:rPr>
-              <a:t>Word Labs  •  wordlabs.app  •  Root: 'fix' = to fasten, attach, or set</a:t>
+              <a:t>Word Labs  •  wordlabs.app  •  Root: 'fix' = fasten, attach, make firm</a:t>
             </a:r>
             <a:endParaRPr lang="en-US" sz="800" dirty="0"/>
           </a:p>
@@ -27512,7 +28479,7 @@
                 <a:ea typeface="Trebuchet MS" pitchFamily="34" charset="-122"/>
                 <a:cs typeface="Trebuchet MS" pitchFamily="34" charset="-120"/>
               </a:rPr>
-              <a:t>suffix</a:t>
+              <a:t>fixation</a:t>
             </a:r>
             <a:endParaRPr lang="en-US" sz="2800" dirty="0"/>
           </a:p>
@@ -28200,7 +29167,7 @@
                 <a:ea typeface="Calibri" pitchFamily="34" charset="-122"/>
                 <a:cs typeface="Calibri" pitchFamily="34" charset="-120"/>
               </a:rPr>
-              <a:t>Word Labs  •  wordlabs.app  •  Root: 'fix' = to fasten, attach, or set</a:t>
+              <a:t>Word Labs  •  wordlabs.app  •  Root: 'fix' = fasten, attach, make firm</a:t>
             </a:r>
             <a:endParaRPr lang="en-US" sz="800" dirty="0"/>
           </a:p>
@@ -28339,7 +29306,7 @@
                 <a:ea typeface="Trebuchet MS" pitchFamily="34" charset="-122"/>
                 <a:cs typeface="Trebuchet MS" pitchFamily="34" charset="-120"/>
               </a:rPr>
-              <a:t>suffix</a:t>
+              <a:t>fixation</a:t>
             </a:r>
             <a:endParaRPr lang="en-US" sz="2800" dirty="0"/>
           </a:p>
@@ -28428,11 +29395,11 @@
             </a:avLst>
           </a:prstGeom>
           <a:solidFill>
-            <a:srgbClr val="DDD6FE"/>
+            <a:srgbClr val="CCFBF1"/>
           </a:solidFill>
           <a:ln w="19050">
             <a:solidFill>
-              <a:srgbClr val="7C3AED"/>
+              <a:srgbClr val="0D9488"/>
             </a:solidFill>
             <a:prstDash val="solid"/>
           </a:ln>
@@ -28472,13 +29439,13 @@
             <a:r>
               <a:rPr lang="en-US" sz="1300" b="1" dirty="0">
                 <a:solidFill>
-                  <a:srgbClr val="4C1D95"/>
+                  <a:srgbClr val="0F766E"/>
                 </a:solidFill>
                 <a:latin typeface="Trebuchet MS" pitchFamily="34" charset="0"/>
                 <a:ea typeface="Trebuchet MS" pitchFamily="34" charset="-122"/>
                 <a:cs typeface="Trebuchet MS" pitchFamily="34" charset="-120"/>
               </a:rPr>
-              <a:t>suf</a:t>
+              <a:t>fix</a:t>
             </a:r>
             <a:endParaRPr lang="en-US" sz="1300" dirty="0"/>
           </a:p>
@@ -28517,7 +29484,7 @@
                 <a:ea typeface="Calibri" pitchFamily="34" charset="-122"/>
                 <a:cs typeface="Calibri" pitchFamily="34" charset="-120"/>
               </a:rPr>
-              <a:t>under, after</a:t>
+              <a:t>fasten, attach</a:t>
             </a:r>
             <a:endParaRPr lang="en-US" sz="850" dirty="0"/>
           </a:p>
@@ -28525,46 +29492,7 @@
       </p:sp>
       <p:sp>
         <p:nvSpPr>
-          <p:cNvPr id="19" name="Text 17"/>
-          <p:cNvSpPr/>
-          <p:nvPr/>
-        </p:nvSpPr>
-        <p:spPr>
-          <a:xfrm>
-            <a:off x="2938272" y="2752344"/>
-            <a:ext cx="1828800" cy="182880"/>
-          </a:xfrm>
-          <a:prstGeom prst="rect">
-            <a:avLst/>
-          </a:prstGeom>
-          <a:noFill/>
-          <a:ln/>
-        </p:spPr>
-        <p:txBody>
-          <a:bodyPr wrap="square" lIns="0" tIns="0" rIns="0" bIns="0" rtlCol="0" anchor="t"/>
-          <a:lstStyle/>
-          <a:p>
-            <a:pPr algn="ctr" indent="0" marL="0">
-              <a:buNone/>
-            </a:pPr>
-            <a:r>
-              <a:rPr lang="en-US" sz="700" i="1" dirty="0">
-                <a:solidFill>
-                  <a:srgbClr val="94A3B8"/>
-                </a:solidFill>
-                <a:latin typeface="Calibri" pitchFamily="34" charset="0"/>
-                <a:ea typeface="Calibri" pitchFamily="34" charset="-122"/>
-                <a:cs typeface="Calibri" pitchFamily="34" charset="-120"/>
-              </a:rPr>
-              <a:t>sub → suf before 'f'</a:t>
-            </a:r>
-            <a:endParaRPr lang="en-US" sz="700" dirty="0"/>
-          </a:p>
-        </p:txBody>
-      </p:sp>
-      <p:sp>
-        <p:nvSpPr>
-          <p:cNvPr id="20" name="Shape 18"/>
+          <p:cNvPr id="19" name="Shape 17"/>
           <p:cNvSpPr/>
           <p:nvPr/>
         </p:nvSpPr>
@@ -28579,11 +29507,11 @@
             </a:avLst>
           </a:prstGeom>
           <a:solidFill>
-            <a:srgbClr val="CCFBF1"/>
+            <a:srgbClr val="FCE7F3"/>
           </a:solidFill>
           <a:ln w="19050">
             <a:solidFill>
-              <a:srgbClr val="0D9488"/>
+              <a:srgbClr val="DB2777"/>
             </a:solidFill>
             <a:prstDash val="solid"/>
           </a:ln>
@@ -28598,7 +29526,7 @@
       </p:sp>
       <p:sp>
         <p:nvSpPr>
-          <p:cNvPr id="21" name="Text 19"/>
+          <p:cNvPr id="20" name="Text 18"/>
           <p:cNvSpPr/>
           <p:nvPr/>
         </p:nvSpPr>
@@ -28623,13 +29551,13 @@
             <a:r>
               <a:rPr lang="en-US" sz="1300" b="1" dirty="0">
                 <a:solidFill>
-                  <a:srgbClr val="0F766E"/>
+                  <a:srgbClr val="9D174D"/>
                 </a:solidFill>
                 <a:latin typeface="Trebuchet MS" pitchFamily="34" charset="0"/>
                 <a:ea typeface="Trebuchet MS" pitchFamily="34" charset="-122"/>
                 <a:cs typeface="Trebuchet MS" pitchFamily="34" charset="-120"/>
               </a:rPr>
-              <a:t>fix</a:t>
+              <a:t>ation</a:t>
             </a:r>
             <a:endParaRPr lang="en-US" sz="1300" dirty="0"/>
           </a:p>
@@ -28637,7 +29565,7 @@
       </p:sp>
       <p:sp>
         <p:nvSpPr>
-          <p:cNvPr id="22" name="Text 20"/>
+          <p:cNvPr id="21" name="Text 19"/>
           <p:cNvSpPr/>
           <p:nvPr/>
         </p:nvSpPr>
@@ -28668,7 +29596,7 @@
                 <a:ea typeface="Calibri" pitchFamily="34" charset="-122"/>
                 <a:cs typeface="Calibri" pitchFamily="34" charset="-120"/>
               </a:rPr>
-              <a:t>to fasten or attach</a:t>
+              <a:t>state or process of</a:t>
             </a:r>
             <a:endParaRPr lang="en-US" sz="850" dirty="0"/>
           </a:p>
@@ -28676,7 +29604,7 @@
       </p:sp>
       <p:sp>
         <p:nvSpPr>
-          <p:cNvPr id="23" name="Shape 21"/>
+          <p:cNvPr id="22" name="Shape 20"/>
           <p:cNvSpPr/>
           <p:nvPr/>
         </p:nvSpPr>
@@ -28703,7 +29631,7 @@
       </p:sp>
       <p:sp>
         <p:nvSpPr>
-          <p:cNvPr id="24" name="Text 22"/>
+          <p:cNvPr id="23" name="Text 21"/>
           <p:cNvSpPr/>
           <p:nvPr/>
         </p:nvSpPr>
@@ -28742,7 +29670,7 @@
       </p:sp>
       <p:sp>
         <p:nvSpPr>
-          <p:cNvPr id="25" name="Shape 23"/>
+          <p:cNvPr id="24" name="Shape 22"/>
           <p:cNvSpPr/>
           <p:nvPr/>
         </p:nvSpPr>
@@ -28769,7 +29697,7 @@
       </p:sp>
       <p:sp>
         <p:nvSpPr>
-          <p:cNvPr id="26" name="Text 24"/>
+          <p:cNvPr id="25" name="Text 23"/>
           <p:cNvSpPr/>
           <p:nvPr/>
         </p:nvSpPr>
@@ -28808,7 +29736,7 @@
       </p:sp>
       <p:sp>
         <p:nvSpPr>
-          <p:cNvPr id="27" name="Shape 25"/>
+          <p:cNvPr id="26" name="Shape 24"/>
           <p:cNvSpPr/>
           <p:nvPr/>
         </p:nvSpPr>
@@ -28835,7 +29763,7 @@
       </p:sp>
       <p:sp>
         <p:nvSpPr>
-          <p:cNvPr id="28" name="Text 26"/>
+          <p:cNvPr id="27" name="Text 25"/>
           <p:cNvSpPr/>
           <p:nvPr/>
         </p:nvSpPr>
@@ -28874,7 +29802,7 @@
       </p:sp>
       <p:sp>
         <p:nvSpPr>
-          <p:cNvPr id="29" name="Shape 27"/>
+          <p:cNvPr id="28" name="Shape 26"/>
           <p:cNvSpPr/>
           <p:nvPr/>
         </p:nvSpPr>
@@ -28901,7 +29829,7 @@
       </p:sp>
       <p:sp>
         <p:nvSpPr>
-          <p:cNvPr id="30" name="Text 28"/>
+          <p:cNvPr id="29" name="Text 27"/>
           <p:cNvSpPr/>
           <p:nvPr/>
         </p:nvSpPr>
@@ -29224,7 +30152,7 @@
                 <a:ea typeface="Calibri" pitchFamily="34" charset="-122"/>
                 <a:cs typeface="Calibri" pitchFamily="34" charset="-120"/>
               </a:rPr>
-              <a:t>Word Labs  •  wordlabs.app  •  Root: 'fix' = to fasten, attach, or set</a:t>
+              <a:t>Word Labs  •  wordlabs.app  •  Root: 'fix' = fasten, attach, make firm</a:t>
             </a:r>
             <a:endParaRPr lang="en-US" sz="800" dirty="0"/>
           </a:p>
@@ -29363,7 +30291,7 @@
                 <a:ea typeface="Trebuchet MS" pitchFamily="34" charset="-122"/>
                 <a:cs typeface="Trebuchet MS" pitchFamily="34" charset="-120"/>
               </a:rPr>
-              <a:t>suffix</a:t>
+              <a:t>fixation</a:t>
             </a:r>
             <a:endParaRPr lang="en-US" sz="2800" dirty="0"/>
           </a:p>
@@ -29452,11 +30380,11 @@
             </a:avLst>
           </a:prstGeom>
           <a:solidFill>
-            <a:srgbClr val="DDD6FE"/>
+            <a:srgbClr val="CCFBF1"/>
           </a:solidFill>
           <a:ln w="19050">
             <a:solidFill>
-              <a:srgbClr val="7C3AED"/>
+              <a:srgbClr val="0D9488"/>
             </a:solidFill>
             <a:prstDash val="solid"/>
           </a:ln>
@@ -29496,13 +30424,13 @@
             <a:r>
               <a:rPr lang="en-US" sz="1300" b="1" dirty="0">
                 <a:solidFill>
-                  <a:srgbClr val="4C1D95"/>
+                  <a:srgbClr val="0F766E"/>
                 </a:solidFill>
                 <a:latin typeface="Trebuchet MS" pitchFamily="34" charset="0"/>
                 <a:ea typeface="Trebuchet MS" pitchFamily="34" charset="-122"/>
                 <a:cs typeface="Trebuchet MS" pitchFamily="34" charset="-120"/>
               </a:rPr>
-              <a:t>suf</a:t>
+              <a:t>fix</a:t>
             </a:r>
             <a:endParaRPr lang="en-US" sz="1300" dirty="0"/>
           </a:p>
@@ -29541,7 +30469,7 @@
                 <a:ea typeface="Calibri" pitchFamily="34" charset="-122"/>
                 <a:cs typeface="Calibri" pitchFamily="34" charset="-120"/>
               </a:rPr>
-              <a:t>under, after</a:t>
+              <a:t>fasten, attach</a:t>
             </a:r>
             <a:endParaRPr lang="en-US" sz="850" dirty="0"/>
           </a:p>
@@ -29549,46 +30477,7 @@
       </p:sp>
       <p:sp>
         <p:nvSpPr>
-          <p:cNvPr id="19" name="Text 17"/>
-          <p:cNvSpPr/>
-          <p:nvPr/>
-        </p:nvSpPr>
-        <p:spPr>
-          <a:xfrm>
-            <a:off x="2938272" y="2752344"/>
-            <a:ext cx="1828800" cy="182880"/>
-          </a:xfrm>
-          <a:prstGeom prst="rect">
-            <a:avLst/>
-          </a:prstGeom>
-          <a:noFill/>
-          <a:ln/>
-        </p:spPr>
-        <p:txBody>
-          <a:bodyPr wrap="square" lIns="0" tIns="0" rIns="0" bIns="0" rtlCol="0" anchor="t"/>
-          <a:lstStyle/>
-          <a:p>
-            <a:pPr algn="ctr" indent="0" marL="0">
-              <a:buNone/>
-            </a:pPr>
-            <a:r>
-              <a:rPr lang="en-US" sz="700" i="1" dirty="0">
-                <a:solidFill>
-                  <a:srgbClr val="94A3B8"/>
-                </a:solidFill>
-                <a:latin typeface="Calibri" pitchFamily="34" charset="0"/>
-                <a:ea typeface="Calibri" pitchFamily="34" charset="-122"/>
-                <a:cs typeface="Calibri" pitchFamily="34" charset="-120"/>
-              </a:rPr>
-              <a:t>sub → suf before 'f'</a:t>
-            </a:r>
-            <a:endParaRPr lang="en-US" sz="700" dirty="0"/>
-          </a:p>
-        </p:txBody>
-      </p:sp>
-      <p:sp>
-        <p:nvSpPr>
-          <p:cNvPr id="20" name="Shape 18"/>
+          <p:cNvPr id="19" name="Shape 17"/>
           <p:cNvSpPr/>
           <p:nvPr/>
         </p:nvSpPr>
@@ -29603,11 +30492,11 @@
             </a:avLst>
           </a:prstGeom>
           <a:solidFill>
-            <a:srgbClr val="CCFBF1"/>
+            <a:srgbClr val="FCE7F3"/>
           </a:solidFill>
           <a:ln w="19050">
             <a:solidFill>
-              <a:srgbClr val="0D9488"/>
+              <a:srgbClr val="DB2777"/>
             </a:solidFill>
             <a:prstDash val="solid"/>
           </a:ln>
@@ -29622,7 +30511,7 @@
       </p:sp>
       <p:sp>
         <p:nvSpPr>
-          <p:cNvPr id="21" name="Text 19"/>
+          <p:cNvPr id="20" name="Text 18"/>
           <p:cNvSpPr/>
           <p:nvPr/>
         </p:nvSpPr>
@@ -29647,13 +30536,13 @@
             <a:r>
               <a:rPr lang="en-US" sz="1300" b="1" dirty="0">
                 <a:solidFill>
-                  <a:srgbClr val="0F766E"/>
+                  <a:srgbClr val="9D174D"/>
                 </a:solidFill>
                 <a:latin typeface="Trebuchet MS" pitchFamily="34" charset="0"/>
                 <a:ea typeface="Trebuchet MS" pitchFamily="34" charset="-122"/>
                 <a:cs typeface="Trebuchet MS" pitchFamily="34" charset="-120"/>
               </a:rPr>
-              <a:t>fix</a:t>
+              <a:t>ation</a:t>
             </a:r>
             <a:endParaRPr lang="en-US" sz="1300" dirty="0"/>
           </a:p>
@@ -29661,7 +30550,7 @@
       </p:sp>
       <p:sp>
         <p:nvSpPr>
-          <p:cNvPr id="22" name="Text 20"/>
+          <p:cNvPr id="21" name="Text 19"/>
           <p:cNvSpPr/>
           <p:nvPr/>
         </p:nvSpPr>
@@ -29692,7 +30581,7 @@
                 <a:ea typeface="Calibri" pitchFamily="34" charset="-122"/>
                 <a:cs typeface="Calibri" pitchFamily="34" charset="-120"/>
               </a:rPr>
-              <a:t>to fasten or attach</a:t>
+              <a:t>state or process of</a:t>
             </a:r>
             <a:endParaRPr lang="en-US" sz="850" dirty="0"/>
           </a:p>
@@ -29700,7 +30589,7 @@
       </p:sp>
       <p:sp>
         <p:nvSpPr>
-          <p:cNvPr id="23" name="Shape 21"/>
+          <p:cNvPr id="22" name="Shape 20"/>
           <p:cNvSpPr/>
           <p:nvPr/>
         </p:nvSpPr>
@@ -29727,7 +30616,7 @@
       </p:sp>
       <p:sp>
         <p:nvSpPr>
-          <p:cNvPr id="24" name="Text 22"/>
+          <p:cNvPr id="23" name="Text 21"/>
           <p:cNvSpPr/>
           <p:nvPr/>
         </p:nvSpPr>
@@ -29766,7 +30655,7 @@
       </p:sp>
       <p:sp>
         <p:nvSpPr>
-          <p:cNvPr id="25" name="Shape 23"/>
+          <p:cNvPr id="24" name="Shape 22"/>
           <p:cNvSpPr/>
           <p:nvPr/>
         </p:nvSpPr>
@@ -29793,13 +30682,13 @@
       </p:sp>
       <p:sp>
         <p:nvSpPr>
-          <p:cNvPr id="26" name="Shape 24"/>
-          <p:cNvSpPr/>
-          <p:nvPr/>
-        </p:nvSpPr>
-        <p:spPr>
-          <a:xfrm>
-            <a:off x="2999232" y="3364992"/>
+          <p:cNvPr id="25" name="Shape 23"/>
+          <p:cNvSpPr/>
+          <p:nvPr/>
+        </p:nvSpPr>
+        <p:spPr>
+          <a:xfrm>
+            <a:off x="2313432" y="3364992"/>
             <a:ext cx="1645920" cy="475488"/>
           </a:xfrm>
           <a:prstGeom prst="rect">
@@ -29820,13 +30709,13 @@
       </p:sp>
       <p:sp>
         <p:nvSpPr>
-          <p:cNvPr id="27" name="Text 25"/>
-          <p:cNvSpPr/>
-          <p:nvPr/>
-        </p:nvSpPr>
-        <p:spPr>
-          <a:xfrm>
-            <a:off x="2999232" y="3364992"/>
+          <p:cNvPr id="26" name="Text 24"/>
+          <p:cNvSpPr/>
+          <p:nvPr/>
+        </p:nvSpPr>
+        <p:spPr>
+          <a:xfrm>
+            <a:off x="2313432" y="3364992"/>
             <a:ext cx="1645920" cy="475488"/>
           </a:xfrm>
           <a:prstGeom prst="rect">
@@ -29851,7 +30740,7 @@
                 <a:ea typeface="Trebuchet MS" pitchFamily="34" charset="-122"/>
                 <a:cs typeface="Trebuchet MS" pitchFamily="34" charset="-120"/>
               </a:rPr>
-              <a:t>suf</a:t>
+              <a:t>fix</a:t>
             </a:r>
             <a:endParaRPr lang="en-US" sz="1400" dirty="0"/>
           </a:p>
@@ -29859,14 +30748,14 @@
       </p:sp>
       <p:sp>
         <p:nvSpPr>
-          <p:cNvPr id="28" name="Text 26"/>
-          <p:cNvSpPr/>
-          <p:nvPr/>
-        </p:nvSpPr>
-        <p:spPr>
-          <a:xfrm>
-            <a:off x="4645152" y="3364992"/>
-            <a:ext cx="1097280" cy="475488"/>
+          <p:cNvPr id="27" name="Text 25"/>
+          <p:cNvSpPr/>
+          <p:nvPr/>
+        </p:nvSpPr>
+        <p:spPr>
+          <a:xfrm>
+            <a:off x="3959352" y="3364992"/>
+            <a:ext cx="411480" cy="475488"/>
           </a:xfrm>
           <a:prstGeom prst="rect">
             <a:avLst/>
@@ -29898,13 +30787,13 @@
       </p:sp>
       <p:sp>
         <p:nvSpPr>
-          <p:cNvPr id="29" name="Shape 27"/>
-          <p:cNvSpPr/>
-          <p:nvPr/>
-        </p:nvSpPr>
-        <p:spPr>
-          <a:xfrm>
-            <a:off x="5742432" y="3364992"/>
+          <p:cNvPr id="28" name="Shape 26"/>
+          <p:cNvSpPr/>
+          <p:nvPr/>
+        </p:nvSpPr>
+        <p:spPr>
+          <a:xfrm>
+            <a:off x="4370832" y="3364992"/>
             <a:ext cx="1645920" cy="475488"/>
           </a:xfrm>
           <a:prstGeom prst="rect">
@@ -29925,13 +30814,13 @@
       </p:sp>
       <p:sp>
         <p:nvSpPr>
-          <p:cNvPr id="30" name="Text 28"/>
-          <p:cNvSpPr/>
-          <p:nvPr/>
-        </p:nvSpPr>
-        <p:spPr>
-          <a:xfrm>
-            <a:off x="5742432" y="3364992"/>
+          <p:cNvPr id="29" name="Text 27"/>
+          <p:cNvSpPr/>
+          <p:nvPr/>
+        </p:nvSpPr>
+        <p:spPr>
+          <a:xfrm>
+            <a:off x="4370832" y="3364992"/>
             <a:ext cx="1645920" cy="475488"/>
           </a:xfrm>
           <a:prstGeom prst="rect">
@@ -29956,7 +30845,7 @@
                 <a:ea typeface="Trebuchet MS" pitchFamily="34" charset="-122"/>
                 <a:cs typeface="Trebuchet MS" pitchFamily="34" charset="-120"/>
               </a:rPr>
-              <a:t>fix</a:t>
+              <a:t>a</a:t>
             </a:r>
             <a:endParaRPr lang="en-US" sz="1400" dirty="0"/>
           </a:p>
@@ -29964,7 +30853,112 @@
       </p:sp>
       <p:sp>
         <p:nvSpPr>
+          <p:cNvPr id="30" name="Text 28"/>
+          <p:cNvSpPr/>
+          <p:nvPr/>
+        </p:nvSpPr>
+        <p:spPr>
+          <a:xfrm>
+            <a:off x="6016752" y="3364992"/>
+            <a:ext cx="411480" cy="475488"/>
+          </a:xfrm>
+          <a:prstGeom prst="rect">
+            <a:avLst/>
+          </a:prstGeom>
+          <a:noFill/>
+          <a:ln/>
+        </p:spPr>
+        <p:txBody>
+          <a:bodyPr wrap="square" lIns="0" tIns="0" rIns="0" bIns="0" rtlCol="0" anchor="ctr"/>
+          <a:lstStyle/>
+          <a:p>
+            <a:pPr algn="ctr" indent="0" marL="0">
+              <a:buNone/>
+            </a:pPr>
+            <a:r>
+              <a:rPr lang="en-US" sz="1600" b="1" dirty="0">
+                <a:solidFill>
+                  <a:srgbClr val="0D9488"/>
+                </a:solidFill>
+                <a:latin typeface="Trebuchet MS" pitchFamily="34" charset="0"/>
+                <a:ea typeface="Trebuchet MS" pitchFamily="34" charset="-122"/>
+                <a:cs typeface="Trebuchet MS" pitchFamily="34" charset="-120"/>
+              </a:rPr>
+              <a:t>·</a:t>
+            </a:r>
+            <a:endParaRPr lang="en-US" sz="1600" dirty="0"/>
+          </a:p>
+        </p:txBody>
+      </p:sp>
+      <p:sp>
+        <p:nvSpPr>
           <p:cNvPr id="31" name="Shape 29"/>
+          <p:cNvSpPr/>
+          <p:nvPr/>
+        </p:nvSpPr>
+        <p:spPr>
+          <a:xfrm>
+            <a:off x="6428232" y="3364992"/>
+            <a:ext cx="1645920" cy="475488"/>
+          </a:xfrm>
+          <a:prstGeom prst="rect">
+            <a:avLst>
+              <a:gd name="adj" fmla="val 9615"/>
+            </a:avLst>
+          </a:prstGeom>
+          <a:solidFill>
+            <a:srgbClr val="FFFFFF"/>
+          </a:solidFill>
+          <a:ln w="12700">
+            <a:solidFill>
+              <a:srgbClr val="0D9488"/>
+            </a:solidFill>
+            <a:prstDash val="solid"/>
+          </a:ln>
+        </p:spPr>
+      </p:sp>
+      <p:sp>
+        <p:nvSpPr>
+          <p:cNvPr id="32" name="Text 30"/>
+          <p:cNvSpPr/>
+          <p:nvPr/>
+        </p:nvSpPr>
+        <p:spPr>
+          <a:xfrm>
+            <a:off x="6428232" y="3364992"/>
+            <a:ext cx="1645920" cy="475488"/>
+          </a:xfrm>
+          <a:prstGeom prst="rect">
+            <a:avLst/>
+          </a:prstGeom>
+          <a:noFill/>
+          <a:ln/>
+        </p:spPr>
+        <p:txBody>
+          <a:bodyPr wrap="square" lIns="0" tIns="0" rIns="0" bIns="0" rtlCol="0" anchor="ctr"/>
+          <a:lstStyle/>
+          <a:p>
+            <a:pPr algn="ctr" indent="0" marL="0">
+              <a:buNone/>
+            </a:pPr>
+            <a:r>
+              <a:rPr lang="en-US" sz="1400" b="1" dirty="0">
+                <a:solidFill>
+                  <a:srgbClr val="0D9488"/>
+                </a:solidFill>
+                <a:latin typeface="Trebuchet MS" pitchFamily="34" charset="0"/>
+                <a:ea typeface="Trebuchet MS" pitchFamily="34" charset="-122"/>
+                <a:cs typeface="Trebuchet MS" pitchFamily="34" charset="-120"/>
+              </a:rPr>
+              <a:t>tion</a:t>
+            </a:r>
+            <a:endParaRPr lang="en-US" sz="1400" dirty="0"/>
+          </a:p>
+        </p:txBody>
+      </p:sp>
+      <p:sp>
+        <p:nvSpPr>
+          <p:cNvPr id="33" name="Shape 31"/>
           <p:cNvSpPr/>
           <p:nvPr/>
         </p:nvSpPr>
@@ -29991,7 +30985,7 @@
       </p:sp>
       <p:sp>
         <p:nvSpPr>
-          <p:cNvPr id="32" name="Text 30"/>
+          <p:cNvPr id="34" name="Text 32"/>
           <p:cNvSpPr/>
           <p:nvPr/>
         </p:nvSpPr>
@@ -30030,7 +31024,7 @@
       </p:sp>
       <p:sp>
         <p:nvSpPr>
-          <p:cNvPr id="33" name="Shape 31"/>
+          <p:cNvPr id="35" name="Shape 33"/>
           <p:cNvSpPr/>
           <p:nvPr/>
         </p:nvSpPr>
@@ -30057,7 +31051,7 @@
       </p:sp>
       <p:sp>
         <p:nvSpPr>
-          <p:cNvPr id="34" name="Text 32"/>
+          <p:cNvPr id="36" name="Text 34"/>
           <p:cNvSpPr/>
           <p:nvPr/>
         </p:nvSpPr>
@@ -30380,7 +31374,7 @@
                 <a:ea typeface="Calibri" pitchFamily="34" charset="-122"/>
                 <a:cs typeface="Calibri" pitchFamily="34" charset="-120"/>
               </a:rPr>
-              <a:t>Word Labs  •  wordlabs.app  •  Root: 'fix' = to fasten, attach, or set</a:t>
+              <a:t>Word Labs  •  wordlabs.app  •  Root: 'fix' = fasten, attach, make firm</a:t>
             </a:r>
             <a:endParaRPr lang="en-US" sz="800" dirty="0"/>
           </a:p>
@@ -30519,7 +31513,7 @@
                 <a:ea typeface="Trebuchet MS" pitchFamily="34" charset="-122"/>
                 <a:cs typeface="Trebuchet MS" pitchFamily="34" charset="-120"/>
               </a:rPr>
-              <a:t>suffix</a:t>
+              <a:t>fixation</a:t>
             </a:r>
             <a:endParaRPr lang="en-US" sz="2800" dirty="0"/>
           </a:p>
@@ -30608,11 +31602,11 @@
             </a:avLst>
           </a:prstGeom>
           <a:solidFill>
-            <a:srgbClr val="DDD6FE"/>
+            <a:srgbClr val="CCFBF1"/>
           </a:solidFill>
           <a:ln w="19050">
             <a:solidFill>
-              <a:srgbClr val="7C3AED"/>
+              <a:srgbClr val="0D9488"/>
             </a:solidFill>
             <a:prstDash val="solid"/>
           </a:ln>
@@ -30652,13 +31646,13 @@
             <a:r>
               <a:rPr lang="en-US" sz="1300" b="1" dirty="0">
                 <a:solidFill>
-                  <a:srgbClr val="4C1D95"/>
+                  <a:srgbClr val="0F766E"/>
                 </a:solidFill>
                 <a:latin typeface="Trebuchet MS" pitchFamily="34" charset="0"/>
                 <a:ea typeface="Trebuchet MS" pitchFamily="34" charset="-122"/>
                 <a:cs typeface="Trebuchet MS" pitchFamily="34" charset="-120"/>
               </a:rPr>
-              <a:t>suf</a:t>
+              <a:t>fix</a:t>
             </a:r>
             <a:endParaRPr lang="en-US" sz="1300" dirty="0"/>
           </a:p>
@@ -30697,7 +31691,7 @@
                 <a:ea typeface="Calibri" pitchFamily="34" charset="-122"/>
                 <a:cs typeface="Calibri" pitchFamily="34" charset="-120"/>
               </a:rPr>
-              <a:t>under, after</a:t>
+              <a:t>fasten, attach</a:t>
             </a:r>
             <a:endParaRPr lang="en-US" sz="850" dirty="0"/>
           </a:p>
@@ -30705,46 +31699,7 @@
       </p:sp>
       <p:sp>
         <p:nvSpPr>
-          <p:cNvPr id="19" name="Text 17"/>
-          <p:cNvSpPr/>
-          <p:nvPr/>
-        </p:nvSpPr>
-        <p:spPr>
-          <a:xfrm>
-            <a:off x="2938272" y="2752344"/>
-            <a:ext cx="1828800" cy="182880"/>
-          </a:xfrm>
-          <a:prstGeom prst="rect">
-            <a:avLst/>
-          </a:prstGeom>
-          <a:noFill/>
-          <a:ln/>
-        </p:spPr>
-        <p:txBody>
-          <a:bodyPr wrap="square" lIns="0" tIns="0" rIns="0" bIns="0" rtlCol="0" anchor="t"/>
-          <a:lstStyle/>
-          <a:p>
-            <a:pPr algn="ctr" indent="0" marL="0">
-              <a:buNone/>
-            </a:pPr>
-            <a:r>
-              <a:rPr lang="en-US" sz="700" i="1" dirty="0">
-                <a:solidFill>
-                  <a:srgbClr val="94A3B8"/>
-                </a:solidFill>
-                <a:latin typeface="Calibri" pitchFamily="34" charset="0"/>
-                <a:ea typeface="Calibri" pitchFamily="34" charset="-122"/>
-                <a:cs typeface="Calibri" pitchFamily="34" charset="-120"/>
-              </a:rPr>
-              <a:t>sub → suf before 'f'</a:t>
-            </a:r>
-            <a:endParaRPr lang="en-US" sz="700" dirty="0"/>
-          </a:p>
-        </p:txBody>
-      </p:sp>
-      <p:sp>
-        <p:nvSpPr>
-          <p:cNvPr id="20" name="Shape 18"/>
+          <p:cNvPr id="19" name="Shape 17"/>
           <p:cNvSpPr/>
           <p:nvPr/>
         </p:nvSpPr>
@@ -30759,11 +31714,11 @@
             </a:avLst>
           </a:prstGeom>
           <a:solidFill>
-            <a:srgbClr val="CCFBF1"/>
+            <a:srgbClr val="FCE7F3"/>
           </a:solidFill>
           <a:ln w="19050">
             <a:solidFill>
-              <a:srgbClr val="0D9488"/>
+              <a:srgbClr val="DB2777"/>
             </a:solidFill>
             <a:prstDash val="solid"/>
           </a:ln>
@@ -30778,7 +31733,7 @@
       </p:sp>
       <p:sp>
         <p:nvSpPr>
-          <p:cNvPr id="21" name="Text 19"/>
+          <p:cNvPr id="20" name="Text 18"/>
           <p:cNvSpPr/>
           <p:nvPr/>
         </p:nvSpPr>
@@ -30803,13 +31758,13 @@
             <a:r>
               <a:rPr lang="en-US" sz="1300" b="1" dirty="0">
                 <a:solidFill>
-                  <a:srgbClr val="0F766E"/>
+                  <a:srgbClr val="9D174D"/>
                 </a:solidFill>
                 <a:latin typeface="Trebuchet MS" pitchFamily="34" charset="0"/>
                 <a:ea typeface="Trebuchet MS" pitchFamily="34" charset="-122"/>
                 <a:cs typeface="Trebuchet MS" pitchFamily="34" charset="-120"/>
               </a:rPr>
-              <a:t>fix</a:t>
+              <a:t>ation</a:t>
             </a:r>
             <a:endParaRPr lang="en-US" sz="1300" dirty="0"/>
           </a:p>
@@ -30817,7 +31772,7 @@
       </p:sp>
       <p:sp>
         <p:nvSpPr>
-          <p:cNvPr id="22" name="Text 20"/>
+          <p:cNvPr id="21" name="Text 19"/>
           <p:cNvSpPr/>
           <p:nvPr/>
         </p:nvSpPr>
@@ -30848,7 +31803,7 @@
                 <a:ea typeface="Calibri" pitchFamily="34" charset="-122"/>
                 <a:cs typeface="Calibri" pitchFamily="34" charset="-120"/>
               </a:rPr>
-              <a:t>to fasten or attach</a:t>
+              <a:t>state or process of</a:t>
             </a:r>
             <a:endParaRPr lang="en-US" sz="850" dirty="0"/>
           </a:p>
@@ -30856,7 +31811,7 @@
       </p:sp>
       <p:sp>
         <p:nvSpPr>
-          <p:cNvPr id="23" name="Shape 21"/>
+          <p:cNvPr id="22" name="Shape 20"/>
           <p:cNvSpPr/>
           <p:nvPr/>
         </p:nvSpPr>
@@ -30883,7 +31838,7 @@
       </p:sp>
       <p:sp>
         <p:nvSpPr>
-          <p:cNvPr id="24" name="Text 22"/>
+          <p:cNvPr id="23" name="Text 21"/>
           <p:cNvSpPr/>
           <p:nvPr/>
         </p:nvSpPr>
@@ -30922,7 +31877,7 @@
       </p:sp>
       <p:sp>
         <p:nvSpPr>
-          <p:cNvPr id="25" name="Shape 23"/>
+          <p:cNvPr id="24" name="Shape 22"/>
           <p:cNvSpPr/>
           <p:nvPr/>
         </p:nvSpPr>
@@ -30949,13 +31904,13 @@
       </p:sp>
       <p:sp>
         <p:nvSpPr>
-          <p:cNvPr id="26" name="Shape 24"/>
-          <p:cNvSpPr/>
-          <p:nvPr/>
-        </p:nvSpPr>
-        <p:spPr>
-          <a:xfrm>
-            <a:off x="2999232" y="3364992"/>
+          <p:cNvPr id="25" name="Shape 23"/>
+          <p:cNvSpPr/>
+          <p:nvPr/>
+        </p:nvSpPr>
+        <p:spPr>
+          <a:xfrm>
+            <a:off x="2313432" y="3364992"/>
             <a:ext cx="1645920" cy="475488"/>
           </a:xfrm>
           <a:prstGeom prst="rect">
@@ -30976,13 +31931,13 @@
       </p:sp>
       <p:sp>
         <p:nvSpPr>
-          <p:cNvPr id="27" name="Text 25"/>
-          <p:cNvSpPr/>
-          <p:nvPr/>
-        </p:nvSpPr>
-        <p:spPr>
-          <a:xfrm>
-            <a:off x="2999232" y="3364992"/>
+          <p:cNvPr id="26" name="Text 24"/>
+          <p:cNvSpPr/>
+          <p:nvPr/>
+        </p:nvSpPr>
+        <p:spPr>
+          <a:xfrm>
+            <a:off x="2313432" y="3364992"/>
             <a:ext cx="1645920" cy="475488"/>
           </a:xfrm>
           <a:prstGeom prst="rect">
@@ -31007,7 +31962,7 @@
                 <a:ea typeface="Trebuchet MS" pitchFamily="34" charset="-122"/>
                 <a:cs typeface="Trebuchet MS" pitchFamily="34" charset="-120"/>
               </a:rPr>
-              <a:t>suf</a:t>
+              <a:t>fix</a:t>
             </a:r>
             <a:endParaRPr lang="en-US" sz="1400" dirty="0"/>
           </a:p>
@@ -31015,14 +31970,14 @@
       </p:sp>
       <p:sp>
         <p:nvSpPr>
-          <p:cNvPr id="28" name="Text 26"/>
-          <p:cNvSpPr/>
-          <p:nvPr/>
-        </p:nvSpPr>
-        <p:spPr>
-          <a:xfrm>
-            <a:off x="4645152" y="3364992"/>
-            <a:ext cx="1097280" cy="475488"/>
+          <p:cNvPr id="27" name="Text 25"/>
+          <p:cNvSpPr/>
+          <p:nvPr/>
+        </p:nvSpPr>
+        <p:spPr>
+          <a:xfrm>
+            <a:off x="3959352" y="3364992"/>
+            <a:ext cx="411480" cy="475488"/>
           </a:xfrm>
           <a:prstGeom prst="rect">
             <a:avLst/>
@@ -31054,13 +32009,13 @@
       </p:sp>
       <p:sp>
         <p:nvSpPr>
-          <p:cNvPr id="29" name="Shape 27"/>
-          <p:cNvSpPr/>
-          <p:nvPr/>
-        </p:nvSpPr>
-        <p:spPr>
-          <a:xfrm>
-            <a:off x="5742432" y="3364992"/>
+          <p:cNvPr id="28" name="Shape 26"/>
+          <p:cNvSpPr/>
+          <p:nvPr/>
+        </p:nvSpPr>
+        <p:spPr>
+          <a:xfrm>
+            <a:off x="4370832" y="3364992"/>
             <a:ext cx="1645920" cy="475488"/>
           </a:xfrm>
           <a:prstGeom prst="rect">
@@ -31081,13 +32036,13 @@
       </p:sp>
       <p:sp>
         <p:nvSpPr>
-          <p:cNvPr id="30" name="Text 28"/>
-          <p:cNvSpPr/>
-          <p:nvPr/>
-        </p:nvSpPr>
-        <p:spPr>
-          <a:xfrm>
-            <a:off x="5742432" y="3364992"/>
+          <p:cNvPr id="29" name="Text 27"/>
+          <p:cNvSpPr/>
+          <p:nvPr/>
+        </p:nvSpPr>
+        <p:spPr>
+          <a:xfrm>
+            <a:off x="4370832" y="3364992"/>
             <a:ext cx="1645920" cy="475488"/>
           </a:xfrm>
           <a:prstGeom prst="rect">
@@ -31112,7 +32067,7 @@
                 <a:ea typeface="Trebuchet MS" pitchFamily="34" charset="-122"/>
                 <a:cs typeface="Trebuchet MS" pitchFamily="34" charset="-120"/>
               </a:rPr>
-              <a:t>fix</a:t>
+              <a:t>a</a:t>
             </a:r>
             <a:endParaRPr lang="en-US" sz="1400" dirty="0"/>
           </a:p>
@@ -31120,7 +32075,112 @@
       </p:sp>
       <p:sp>
         <p:nvSpPr>
+          <p:cNvPr id="30" name="Text 28"/>
+          <p:cNvSpPr/>
+          <p:nvPr/>
+        </p:nvSpPr>
+        <p:spPr>
+          <a:xfrm>
+            <a:off x="6016752" y="3364992"/>
+            <a:ext cx="411480" cy="475488"/>
+          </a:xfrm>
+          <a:prstGeom prst="rect">
+            <a:avLst/>
+          </a:prstGeom>
+          <a:noFill/>
+          <a:ln/>
+        </p:spPr>
+        <p:txBody>
+          <a:bodyPr wrap="square" lIns="0" tIns="0" rIns="0" bIns="0" rtlCol="0" anchor="ctr"/>
+          <a:lstStyle/>
+          <a:p>
+            <a:pPr algn="ctr" indent="0" marL="0">
+              <a:buNone/>
+            </a:pPr>
+            <a:r>
+              <a:rPr lang="en-US" sz="1600" b="1" dirty="0">
+                <a:solidFill>
+                  <a:srgbClr val="0D9488"/>
+                </a:solidFill>
+                <a:latin typeface="Trebuchet MS" pitchFamily="34" charset="0"/>
+                <a:ea typeface="Trebuchet MS" pitchFamily="34" charset="-122"/>
+                <a:cs typeface="Trebuchet MS" pitchFamily="34" charset="-120"/>
+              </a:rPr>
+              <a:t>·</a:t>
+            </a:r>
+            <a:endParaRPr lang="en-US" sz="1600" dirty="0"/>
+          </a:p>
+        </p:txBody>
+      </p:sp>
+      <p:sp>
+        <p:nvSpPr>
           <p:cNvPr id="31" name="Shape 29"/>
+          <p:cNvSpPr/>
+          <p:nvPr/>
+        </p:nvSpPr>
+        <p:spPr>
+          <a:xfrm>
+            <a:off x="6428232" y="3364992"/>
+            <a:ext cx="1645920" cy="475488"/>
+          </a:xfrm>
+          <a:prstGeom prst="rect">
+            <a:avLst>
+              <a:gd name="adj" fmla="val 9615"/>
+            </a:avLst>
+          </a:prstGeom>
+          <a:solidFill>
+            <a:srgbClr val="FFFFFF"/>
+          </a:solidFill>
+          <a:ln w="12700">
+            <a:solidFill>
+              <a:srgbClr val="0D9488"/>
+            </a:solidFill>
+            <a:prstDash val="solid"/>
+          </a:ln>
+        </p:spPr>
+      </p:sp>
+      <p:sp>
+        <p:nvSpPr>
+          <p:cNvPr id="32" name="Text 30"/>
+          <p:cNvSpPr/>
+          <p:nvPr/>
+        </p:nvSpPr>
+        <p:spPr>
+          <a:xfrm>
+            <a:off x="6428232" y="3364992"/>
+            <a:ext cx="1645920" cy="475488"/>
+          </a:xfrm>
+          <a:prstGeom prst="rect">
+            <a:avLst/>
+          </a:prstGeom>
+          <a:noFill/>
+          <a:ln/>
+        </p:spPr>
+        <p:txBody>
+          <a:bodyPr wrap="square" lIns="0" tIns="0" rIns="0" bIns="0" rtlCol="0" anchor="ctr"/>
+          <a:lstStyle/>
+          <a:p>
+            <a:pPr algn="ctr" indent="0" marL="0">
+              <a:buNone/>
+            </a:pPr>
+            <a:r>
+              <a:rPr lang="en-US" sz="1400" b="1" dirty="0">
+                <a:solidFill>
+                  <a:srgbClr val="0D9488"/>
+                </a:solidFill>
+                <a:latin typeface="Trebuchet MS" pitchFamily="34" charset="0"/>
+                <a:ea typeface="Trebuchet MS" pitchFamily="34" charset="-122"/>
+                <a:cs typeface="Trebuchet MS" pitchFamily="34" charset="-120"/>
+              </a:rPr>
+              <a:t>tion</a:t>
+            </a:r>
+            <a:endParaRPr lang="en-US" sz="1400" dirty="0"/>
+          </a:p>
+        </p:txBody>
+      </p:sp>
+      <p:sp>
+        <p:nvSpPr>
+          <p:cNvPr id="33" name="Shape 31"/>
           <p:cNvSpPr/>
           <p:nvPr/>
         </p:nvSpPr>
@@ -31147,7 +32207,7 @@
       </p:sp>
       <p:sp>
         <p:nvSpPr>
-          <p:cNvPr id="32" name="Text 30"/>
+          <p:cNvPr id="34" name="Text 32"/>
           <p:cNvSpPr/>
           <p:nvPr/>
         </p:nvSpPr>
@@ -31186,7 +32246,7 @@
       </p:sp>
       <p:sp>
         <p:nvSpPr>
-          <p:cNvPr id="33" name="Shape 31"/>
+          <p:cNvPr id="35" name="Shape 33"/>
           <p:cNvSpPr/>
           <p:nvPr/>
         </p:nvSpPr>
@@ -31213,13 +32273,13 @@
       </p:sp>
       <p:sp>
         <p:nvSpPr>
-          <p:cNvPr id="34" name="Shape 32"/>
-          <p:cNvSpPr/>
-          <p:nvPr/>
-        </p:nvSpPr>
-        <p:spPr>
-          <a:xfrm>
-            <a:off x="2427732" y="4169664"/>
+          <p:cNvPr id="36" name="Shape 34"/>
+          <p:cNvSpPr/>
+          <p:nvPr/>
+        </p:nvSpPr>
+        <p:spPr>
+          <a:xfrm>
+            <a:off x="2124837" y="4169664"/>
             <a:ext cx="685800" cy="384048"/>
           </a:xfrm>
           <a:prstGeom prst="rect">
@@ -31240,13 +32300,13 @@
       </p:sp>
       <p:sp>
         <p:nvSpPr>
-          <p:cNvPr id="35" name="Text 33"/>
-          <p:cNvSpPr/>
-          <p:nvPr/>
-        </p:nvSpPr>
-        <p:spPr>
-          <a:xfrm>
-            <a:off x="2427732" y="4169664"/>
+          <p:cNvPr id="37" name="Text 35"/>
+          <p:cNvSpPr/>
+          <p:nvPr/>
+        </p:nvSpPr>
+        <p:spPr>
+          <a:xfrm>
+            <a:off x="2124837" y="4169664"/>
             <a:ext cx="685800" cy="384048"/>
           </a:xfrm>
           <a:prstGeom prst="rect">
@@ -31271,7 +32331,7 @@
                 <a:ea typeface="Trebuchet MS" pitchFamily="34" charset="-122"/>
                 <a:cs typeface="Trebuchet MS" pitchFamily="34" charset="-120"/>
               </a:rPr>
-              <a:t>s</a:t>
+              <a:t>f</a:t>
             </a:r>
             <a:endParaRPr lang="en-US" sz="900" dirty="0"/>
           </a:p>
@@ -31279,13 +32339,13 @@
       </p:sp>
       <p:sp>
         <p:nvSpPr>
-          <p:cNvPr id="36" name="Shape 34"/>
-          <p:cNvSpPr/>
-          <p:nvPr/>
-        </p:nvSpPr>
-        <p:spPr>
-          <a:xfrm>
-            <a:off x="3639312" y="4169664"/>
+          <p:cNvPr id="38" name="Shape 36"/>
+          <p:cNvSpPr/>
+          <p:nvPr/>
+        </p:nvSpPr>
+        <p:spPr>
+          <a:xfrm>
+            <a:off x="3033522" y="4169664"/>
             <a:ext cx="685800" cy="384048"/>
           </a:xfrm>
           <a:prstGeom prst="rect">
@@ -31306,13 +32366,13 @@
       </p:sp>
       <p:sp>
         <p:nvSpPr>
-          <p:cNvPr id="37" name="Text 35"/>
-          <p:cNvSpPr/>
-          <p:nvPr/>
-        </p:nvSpPr>
-        <p:spPr>
-          <a:xfrm>
-            <a:off x="3639312" y="4169664"/>
+          <p:cNvPr id="39" name="Text 37"/>
+          <p:cNvSpPr/>
+          <p:nvPr/>
+        </p:nvSpPr>
+        <p:spPr>
+          <a:xfrm>
+            <a:off x="3033522" y="4169664"/>
             <a:ext cx="685800" cy="384048"/>
           </a:xfrm>
           <a:prstGeom prst="rect">
@@ -31337,7 +32397,7 @@
                 <a:ea typeface="Trebuchet MS" pitchFamily="34" charset="-122"/>
                 <a:cs typeface="Trebuchet MS" pitchFamily="34" charset="-120"/>
               </a:rPr>
-              <a:t>u</a:t>
+              <a:t>i</a:t>
             </a:r>
             <a:endParaRPr lang="en-US" sz="900" dirty="0"/>
           </a:p>
@@ -31345,13 +32405,13 @@
       </p:sp>
       <p:sp>
         <p:nvSpPr>
-          <p:cNvPr id="38" name="Shape 36"/>
-          <p:cNvSpPr/>
-          <p:nvPr/>
-        </p:nvSpPr>
-        <p:spPr>
-          <a:xfrm>
-            <a:off x="4850892" y="4169664"/>
+          <p:cNvPr id="40" name="Shape 38"/>
+          <p:cNvSpPr/>
+          <p:nvPr/>
+        </p:nvSpPr>
+        <p:spPr>
+          <a:xfrm>
+            <a:off x="3942207" y="4169664"/>
             <a:ext cx="685800" cy="384048"/>
           </a:xfrm>
           <a:prstGeom prst="rect">
@@ -31372,13 +32432,13 @@
       </p:sp>
       <p:sp>
         <p:nvSpPr>
-          <p:cNvPr id="39" name="Text 37"/>
-          <p:cNvSpPr/>
-          <p:nvPr/>
-        </p:nvSpPr>
-        <p:spPr>
-          <a:xfrm>
-            <a:off x="4850892" y="4169664"/>
+          <p:cNvPr id="41" name="Text 39"/>
+          <p:cNvSpPr/>
+          <p:nvPr/>
+        </p:nvSpPr>
+        <p:spPr>
+          <a:xfrm>
+            <a:off x="3942207" y="4169664"/>
             <a:ext cx="685800" cy="384048"/>
           </a:xfrm>
           <a:prstGeom prst="rect">
@@ -31403,7 +32463,7 @@
                 <a:ea typeface="Trebuchet MS" pitchFamily="34" charset="-122"/>
                 <a:cs typeface="Trebuchet MS" pitchFamily="34" charset="-120"/>
               </a:rPr>
-              <a:t>ff</a:t>
+              <a:t>x</a:t>
             </a:r>
             <a:endParaRPr lang="en-US" sz="900" dirty="0"/>
           </a:p>
@@ -31411,13 +32471,52 @@
       </p:sp>
       <p:sp>
         <p:nvSpPr>
-          <p:cNvPr id="40" name="Shape 38"/>
-          <p:cNvSpPr/>
-          <p:nvPr/>
-        </p:nvSpPr>
-        <p:spPr>
-          <a:xfrm>
-            <a:off x="6062472" y="4169664"/>
+          <p:cNvPr id="42" name="Text 40"/>
+          <p:cNvSpPr/>
+          <p:nvPr/>
+        </p:nvSpPr>
+        <p:spPr>
+          <a:xfrm>
+            <a:off x="3942207" y="4572000"/>
+            <a:ext cx="685800" cy="219456"/>
+          </a:xfrm>
+          <a:prstGeom prst="rect">
+            <a:avLst/>
+          </a:prstGeom>
+          <a:noFill/>
+          <a:ln/>
+        </p:spPr>
+        <p:txBody>
+          <a:bodyPr wrap="square" lIns="0" tIns="0" rIns="0" bIns="0" rtlCol="0" anchor="t"/>
+          <a:lstStyle/>
+          <a:p>
+            <a:pPr algn="ctr" indent="0" marL="0">
+              <a:buNone/>
+            </a:pPr>
+            <a:r>
+              <a:rPr lang="en-US" sz="750" i="1" dirty="0">
+                <a:solidFill>
+                  <a:srgbClr val="94A3B8"/>
+                </a:solidFill>
+                <a:latin typeface="Calibri" pitchFamily="34" charset="0"/>
+                <a:ea typeface="Calibri" pitchFamily="34" charset="-122"/>
+                <a:cs typeface="Calibri" pitchFamily="34" charset="-120"/>
+              </a:rPr>
+              <a:t>/ks/</a:t>
+            </a:r>
+            <a:endParaRPr lang="en-US" sz="750" dirty="0"/>
+          </a:p>
+        </p:txBody>
+      </p:sp>
+      <p:sp>
+        <p:nvSpPr>
+          <p:cNvPr id="43" name="Shape 41"/>
+          <p:cNvSpPr/>
+          <p:nvPr/>
+        </p:nvSpPr>
+        <p:spPr>
+          <a:xfrm>
+            <a:off x="4850892" y="4169664"/>
             <a:ext cx="685800" cy="384048"/>
           </a:xfrm>
           <a:prstGeom prst="rect">
@@ -31438,13 +32537,13 @@
       </p:sp>
       <p:sp>
         <p:nvSpPr>
-          <p:cNvPr id="41" name="Text 39"/>
-          <p:cNvSpPr/>
-          <p:nvPr/>
-        </p:nvSpPr>
-        <p:spPr>
-          <a:xfrm>
-            <a:off x="6062472" y="4169664"/>
+          <p:cNvPr id="44" name="Text 42"/>
+          <p:cNvSpPr/>
+          <p:nvPr/>
+        </p:nvSpPr>
+        <p:spPr>
+          <a:xfrm>
+            <a:off x="4850892" y="4169664"/>
             <a:ext cx="685800" cy="384048"/>
           </a:xfrm>
           <a:prstGeom prst="rect">
@@ -31469,7 +32568,7 @@
                 <a:ea typeface="Trebuchet MS" pitchFamily="34" charset="-122"/>
                 <a:cs typeface="Trebuchet MS" pitchFamily="34" charset="-120"/>
               </a:rPr>
-              <a:t>i</a:t>
+              <a:t>a</a:t>
             </a:r>
             <a:endParaRPr lang="en-US" sz="900" dirty="0"/>
           </a:p>
@@ -31477,13 +32576,13 @@
       </p:sp>
       <p:sp>
         <p:nvSpPr>
-          <p:cNvPr id="42" name="Shape 40"/>
-          <p:cNvSpPr/>
-          <p:nvPr/>
-        </p:nvSpPr>
-        <p:spPr>
-          <a:xfrm>
-            <a:off x="7274052" y="4169664"/>
+          <p:cNvPr id="45" name="Shape 43"/>
+          <p:cNvSpPr/>
+          <p:nvPr/>
+        </p:nvSpPr>
+        <p:spPr>
+          <a:xfrm>
+            <a:off x="5759577" y="4169664"/>
             <a:ext cx="685800" cy="384048"/>
           </a:xfrm>
           <a:prstGeom prst="rect">
@@ -31504,13 +32603,13 @@
       </p:sp>
       <p:sp>
         <p:nvSpPr>
-          <p:cNvPr id="43" name="Text 41"/>
-          <p:cNvSpPr/>
-          <p:nvPr/>
-        </p:nvSpPr>
-        <p:spPr>
-          <a:xfrm>
-            <a:off x="7274052" y="4169664"/>
+          <p:cNvPr id="46" name="Text 44"/>
+          <p:cNvSpPr/>
+          <p:nvPr/>
+        </p:nvSpPr>
+        <p:spPr>
+          <a:xfrm>
+            <a:off x="5759577" y="4169664"/>
             <a:ext cx="685800" cy="384048"/>
           </a:xfrm>
           <a:prstGeom prst="rect">
@@ -31535,7 +32634,7 @@
                 <a:ea typeface="Trebuchet MS" pitchFamily="34" charset="-122"/>
                 <a:cs typeface="Trebuchet MS" pitchFamily="34" charset="-120"/>
               </a:rPr>
-              <a:t>x</a:t>
+              <a:t>t</a:t>
             </a:r>
             <a:endParaRPr lang="en-US" sz="900" dirty="0"/>
           </a:p>
@@ -31543,13 +32642,13 @@
       </p:sp>
       <p:sp>
         <p:nvSpPr>
-          <p:cNvPr id="44" name="Text 42"/>
-          <p:cNvSpPr/>
-          <p:nvPr/>
-        </p:nvSpPr>
-        <p:spPr>
-          <a:xfrm>
-            <a:off x="7274052" y="4572000"/>
+          <p:cNvPr id="47" name="Text 45"/>
+          <p:cNvSpPr/>
+          <p:nvPr/>
+        </p:nvSpPr>
+        <p:spPr>
+          <a:xfrm>
+            <a:off x="5759577" y="4572000"/>
             <a:ext cx="685800" cy="219456"/>
           </a:xfrm>
           <a:prstGeom prst="rect">
@@ -31574,9 +32673,141 @@
                 <a:ea typeface="Calibri" pitchFamily="34" charset="-122"/>
                 <a:cs typeface="Calibri" pitchFamily="34" charset="-120"/>
               </a:rPr>
-              <a:t>/ks/</a:t>
+              <a:t>/sh/</a:t>
             </a:r>
             <a:endParaRPr lang="en-US" sz="750" dirty="0"/>
+          </a:p>
+        </p:txBody>
+      </p:sp>
+      <p:sp>
+        <p:nvSpPr>
+          <p:cNvPr id="48" name="Shape 46"/>
+          <p:cNvSpPr/>
+          <p:nvPr/>
+        </p:nvSpPr>
+        <p:spPr>
+          <a:xfrm>
+            <a:off x="6668262" y="4169664"/>
+            <a:ext cx="685800" cy="384048"/>
+          </a:xfrm>
+          <a:prstGeom prst="rect">
+            <a:avLst>
+              <a:gd name="adj" fmla="val 9524"/>
+            </a:avLst>
+          </a:prstGeom>
+          <a:solidFill>
+            <a:srgbClr val="FFFFFF"/>
+          </a:solidFill>
+          <a:ln w="12700">
+            <a:solidFill>
+              <a:srgbClr val="DB2777"/>
+            </a:solidFill>
+            <a:prstDash val="solid"/>
+          </a:ln>
+        </p:spPr>
+      </p:sp>
+      <p:sp>
+        <p:nvSpPr>
+          <p:cNvPr id="49" name="Text 47"/>
+          <p:cNvSpPr/>
+          <p:nvPr/>
+        </p:nvSpPr>
+        <p:spPr>
+          <a:xfrm>
+            <a:off x="6668262" y="4169664"/>
+            <a:ext cx="685800" cy="384048"/>
+          </a:xfrm>
+          <a:prstGeom prst="rect">
+            <a:avLst/>
+          </a:prstGeom>
+          <a:noFill/>
+          <a:ln/>
+        </p:spPr>
+        <p:txBody>
+          <a:bodyPr wrap="square" lIns="0" tIns="0" rIns="0" bIns="0" rtlCol="0" anchor="ctr"/>
+          <a:lstStyle/>
+          <a:p>
+            <a:pPr algn="ctr" indent="0" marL="0">
+              <a:buNone/>
+            </a:pPr>
+            <a:r>
+              <a:rPr lang="en-US" sz="900" b="1" dirty="0">
+                <a:solidFill>
+                  <a:srgbClr val="9D174D"/>
+                </a:solidFill>
+                <a:latin typeface="Trebuchet MS" pitchFamily="34" charset="0"/>
+                <a:ea typeface="Trebuchet MS" pitchFamily="34" charset="-122"/>
+                <a:cs typeface="Trebuchet MS" pitchFamily="34" charset="-120"/>
+              </a:rPr>
+              <a:t>io</a:t>
+            </a:r>
+            <a:endParaRPr lang="en-US" sz="900" dirty="0"/>
+          </a:p>
+        </p:txBody>
+      </p:sp>
+      <p:sp>
+        <p:nvSpPr>
+          <p:cNvPr id="50" name="Shape 48"/>
+          <p:cNvSpPr/>
+          <p:nvPr/>
+        </p:nvSpPr>
+        <p:spPr>
+          <a:xfrm>
+            <a:off x="7576947" y="4169664"/>
+            <a:ext cx="685800" cy="384048"/>
+          </a:xfrm>
+          <a:prstGeom prst="rect">
+            <a:avLst>
+              <a:gd name="adj" fmla="val 9524"/>
+            </a:avLst>
+          </a:prstGeom>
+          <a:solidFill>
+            <a:srgbClr val="FFFFFF"/>
+          </a:solidFill>
+          <a:ln w="12700">
+            <a:solidFill>
+              <a:srgbClr val="DB2777"/>
+            </a:solidFill>
+            <a:prstDash val="solid"/>
+          </a:ln>
+        </p:spPr>
+      </p:sp>
+      <p:sp>
+        <p:nvSpPr>
+          <p:cNvPr id="51" name="Text 49"/>
+          <p:cNvSpPr/>
+          <p:nvPr/>
+        </p:nvSpPr>
+        <p:spPr>
+          <a:xfrm>
+            <a:off x="7576947" y="4169664"/>
+            <a:ext cx="685800" cy="384048"/>
+          </a:xfrm>
+          <a:prstGeom prst="rect">
+            <a:avLst/>
+          </a:prstGeom>
+          <a:noFill/>
+          <a:ln/>
+        </p:spPr>
+        <p:txBody>
+          <a:bodyPr wrap="square" lIns="0" tIns="0" rIns="0" bIns="0" rtlCol="0" anchor="ctr"/>
+          <a:lstStyle/>
+          <a:p>
+            <a:pPr algn="ctr" indent="0" marL="0">
+              <a:buNone/>
+            </a:pPr>
+            <a:r>
+              <a:rPr lang="en-US" sz="900" b="1" dirty="0">
+                <a:solidFill>
+                  <a:srgbClr val="9D174D"/>
+                </a:solidFill>
+                <a:latin typeface="Trebuchet MS" pitchFamily="34" charset="0"/>
+                <a:ea typeface="Trebuchet MS" pitchFamily="34" charset="-122"/>
+                <a:cs typeface="Trebuchet MS" pitchFamily="34" charset="-120"/>
+              </a:rPr>
+              <a:t>n</a:t>
+            </a:r>
+            <a:endParaRPr lang="en-US" sz="900" dirty="0"/>
           </a:p>
         </p:txBody>
       </p:sp>
@@ -31866,7 +33097,7 @@
                 <a:ea typeface="Calibri" pitchFamily="34" charset="-122"/>
                 <a:cs typeface="Calibri" pitchFamily="34" charset="-120"/>
               </a:rPr>
-              <a:t>Word Labs  •  wordlabs.app  •  Root: 'fix' = to fasten, attach, or set</a:t>
+              <a:t>Word Labs  •  wordlabs.app  •  Root: 'fix' = fasten, attach, make firm</a:t>
             </a:r>
             <a:endParaRPr lang="en-US" sz="800" dirty="0"/>
           </a:p>
@@ -33035,7 +34266,7 @@
                 <a:ea typeface="Calibri" pitchFamily="34" charset="-122"/>
                 <a:cs typeface="Calibri" pitchFamily="34" charset="-120"/>
               </a:rPr>
-              <a:t>Word Labs  •  wordlabs.app  •  Root: 'fix' = to fasten, attach, or set</a:t>
+              <a:t>Word Labs  •  wordlabs.app  •  Root: 'fix' = fasten, attach, make firm</a:t>
             </a:r>
             <a:endParaRPr lang="en-US" sz="800" dirty="0"/>
           </a:p>
@@ -34445,7 +35676,7 @@
                 <a:ea typeface="Trebuchet MS" pitchFamily="34" charset="-122"/>
                 <a:cs typeface="Trebuchet MS" pitchFamily="34" charset="-120"/>
               </a:rPr>
-              <a:t>fixture</a:t>
+              <a:t>fixing</a:t>
             </a:r>
             <a:endParaRPr lang="en-US" sz="1200" dirty="0"/>
           </a:p>
@@ -34935,7 +36166,7 @@
                 <a:ea typeface="Calibri" pitchFamily="34" charset="-122"/>
                 <a:cs typeface="Calibri" pitchFamily="34" charset="-120"/>
               </a:rPr>
-              <a:t>Word Labs  •  wordlabs.app  •  Root: 'fix' = to fasten, attach, or set</a:t>
+              <a:t>Word Labs  •  wordlabs.app  •  Root: 'fix' = fasten, attach, make firm</a:t>
             </a:r>
             <a:endParaRPr lang="en-US" sz="800" dirty="0"/>
           </a:p>
@@ -35099,7 +36330,7 @@
                 <a:ea typeface="Calibri" pitchFamily="34" charset="-122"/>
                 <a:cs typeface="Calibri" pitchFamily="34" charset="-120"/>
               </a:rPr>
-              <a:t>The core part of a word carrying its basic meaning. For example, 'fix' means 'to fasten, attach, or set'.</a:t>
+              <a:t>The core part of a word carrying its basic meaning. For example, 'fix' means 'fasten, attach, make firm'.</a:t>
             </a:r>
             <a:endParaRPr lang="en-US" sz="1350" dirty="0"/>
           </a:p>
@@ -35719,7 +36950,7 @@
                 <a:ea typeface="Calibri" pitchFamily="34" charset="-122"/>
                 <a:cs typeface="Calibri" pitchFamily="34" charset="-120"/>
               </a:rPr>
-              <a:t>Word Labs  •  wordlabs.app  •  Root: 'fix' = to fasten, attach, or set</a:t>
+              <a:t>Word Labs  •  wordlabs.app  •  Root: 'fix' = fasten, attach, make firm</a:t>
             </a:r>
             <a:endParaRPr lang="en-US" sz="800" dirty="0"/>
           </a:p>
@@ -35831,7 +37062,7 @@
                 <a:ea typeface="Calibri" pitchFamily="34" charset="-122"/>
                 <a:cs typeface="Calibri" pitchFamily="34" charset="-120"/>
               </a:rPr>
-              <a:t>1.  The root 'fix' comes from a Latin word meaning to fasten or attach.</a:t>
+              <a:t>1.  The word 'suffix' has nothing to do with the root 'fix'.</a:t>
             </a:r>
             <a:endParaRPr lang="en-US" sz="1300" dirty="0"/>
           </a:p>
@@ -35854,11 +37085,11 @@
             </a:avLst>
           </a:prstGeom>
           <a:solidFill>
-            <a:srgbClr val="DCFCE7"/>
-          </a:solidFill>
-          <a:ln w="12700">
-            <a:solidFill>
-              <a:srgbClr val="16A34A"/>
+            <a:srgbClr val="FEE2E2"/>
+          </a:solidFill>
+          <a:ln w="12700">
+            <a:solidFill>
+              <a:srgbClr val="DC2626"/>
             </a:solidFill>
             <a:prstDash val="solid"/>
           </a:ln>
@@ -35891,13 +37122,13 @@
             <a:r>
               <a:rPr lang="en-US" sz="1100" b="1" dirty="0">
                 <a:solidFill>
-                  <a:srgbClr val="16A34A"/>
+                  <a:srgbClr val="DC2626"/>
                 </a:solidFill>
                 <a:latin typeface="Trebuchet MS" pitchFamily="34" charset="0"/>
                 <a:ea typeface="Trebuchet MS" pitchFamily="34" charset="-122"/>
                 <a:cs typeface="Trebuchet MS" pitchFamily="34" charset="-120"/>
               </a:rPr>
-              <a:t>TRUE</a:t>
+              <a:t>FALSE</a:t>
             </a:r>
             <a:endParaRPr lang="en-US" sz="1100" dirty="0"/>
           </a:p>
@@ -35970,7 +37201,7 @@
                 <a:ea typeface="Calibri" pitchFamily="34" charset="-122"/>
                 <a:cs typeface="Calibri" pitchFamily="34" charset="-120"/>
               </a:rPr>
-              <a:t>2.  A prefix is added to the end of a word.</a:t>
+              <a:t>2.  The root 'fix' means to break apart or separate things.</a:t>
             </a:r>
             <a:endParaRPr lang="en-US" sz="1300" dirty="0"/>
           </a:p>
@@ -36109,7 +37340,7 @@
                 <a:ea typeface="Calibri" pitchFamily="34" charset="-122"/>
                 <a:cs typeface="Calibri" pitchFamily="34" charset="-120"/>
               </a:rPr>
-              <a:t>3.  The word 'suffix' contains the root 'fix'.</a:t>
+              <a:t>3.  The word 'transfixed' means to be completely frozen with amazement.</a:t>
             </a:r>
             <a:endParaRPr lang="en-US" sz="1300" dirty="0"/>
           </a:p>
@@ -36248,7 +37479,7 @@
                 <a:ea typeface="Calibri" pitchFamily="34" charset="-122"/>
                 <a:cs typeface="Calibri" pitchFamily="34" charset="-120"/>
               </a:rPr>
-              <a:t>4.  The word 'fixture' refers to something permanently fastened in place.</a:t>
+              <a:t>4.  A prefix is a morpheme added before a root word.</a:t>
             </a:r>
             <a:endParaRPr lang="en-US" sz="1300" dirty="0"/>
           </a:p>
@@ -36387,7 +37618,7 @@
                 <a:ea typeface="Calibri" pitchFamily="34" charset="-122"/>
                 <a:cs typeface="Calibri" pitchFamily="34" charset="-120"/>
               </a:rPr>
-              <a:t>5.  The root 'fix' comes from Greek.</a:t>
+              <a:t>5.  The root 'fix' comes from a Latin word meaning to fasten or attach.</a:t>
             </a:r>
             <a:endParaRPr lang="en-US" sz="1300" dirty="0"/>
           </a:p>
@@ -36410,11 +37641,11 @@
             </a:avLst>
           </a:prstGeom>
           <a:solidFill>
-            <a:srgbClr val="FEE2E2"/>
-          </a:solidFill>
-          <a:ln w="12700">
-            <a:solidFill>
-              <a:srgbClr val="DC2626"/>
+            <a:srgbClr val="DCFCE7"/>
+          </a:solidFill>
+          <a:ln w="12700">
+            <a:solidFill>
+              <a:srgbClr val="16A34A"/>
             </a:solidFill>
             <a:prstDash val="solid"/>
           </a:ln>
@@ -36447,13 +37678,13 @@
             <a:r>
               <a:rPr lang="en-US" sz="1100" b="1" dirty="0">
                 <a:solidFill>
-                  <a:srgbClr val="DC2626"/>
+                  <a:srgbClr val="16A34A"/>
                 </a:solidFill>
                 <a:latin typeface="Trebuchet MS" pitchFamily="34" charset="0"/>
                 <a:ea typeface="Trebuchet MS" pitchFamily="34" charset="-122"/>
                 <a:cs typeface="Trebuchet MS" pitchFamily="34" charset="-120"/>
               </a:rPr>
-              <a:t>FALSE</a:t>
+              <a:t>TRUE</a:t>
             </a:r>
             <a:endParaRPr lang="en-US" sz="1100" dirty="0"/>
           </a:p>
@@ -36745,7 +37976,7 @@
                 <a:ea typeface="Calibri" pitchFamily="34" charset="-122"/>
                 <a:cs typeface="Calibri" pitchFamily="34" charset="-120"/>
               </a:rPr>
-              <a:t>Word Labs  •  wordlabs.app  •  Root: 'fix' = to fasten, attach, or set</a:t>
+              <a:t>Word Labs  •  wordlabs.app  •  Root: 'fix' = fasten, attach, make firm</a:t>
             </a:r>
             <a:endParaRPr lang="en-US" sz="800" dirty="0"/>
           </a:p>
@@ -36882,7 +38113,7 @@
                 <a:ea typeface="Trebuchet MS" pitchFamily="34" charset="-122"/>
                 <a:cs typeface="Trebuchet MS" pitchFamily="34" charset="-120"/>
               </a:rPr>
-              <a:t>to fasten, attach, or set</a:t>
+              <a:t>fasten, attach, make firm</a:t>
             </a:r>
             <a:endParaRPr lang="en-US" sz="2000" dirty="0"/>
           </a:p>
@@ -37290,7 +38521,7 @@
                 <a:ea typeface="Trebuchet MS" pitchFamily="34" charset="-122"/>
                 <a:cs typeface="Trebuchet MS" pitchFamily="34" charset="-120"/>
               </a:rPr>
-              <a:t>fixture</a:t>
+              <a:t>fixing</a:t>
             </a:r>
             <a:endParaRPr lang="en-US" sz="1300" dirty="0"/>
           </a:p>
@@ -37714,7 +38945,7 @@
                 <a:ea typeface="Calibri" pitchFamily="34" charset="-122"/>
                 <a:cs typeface="Calibri" pitchFamily="34" charset="-120"/>
               </a:rPr>
-              <a:t>Word Labs  •  wordlabs.app  •  Root: 'fix' = to fasten, attach, or set</a:t>
+              <a:t>Word Labs  •  wordlabs.app  •  Root: 'fix' = fasten, attach, make firm</a:t>
             </a:r>
             <a:endParaRPr lang="en-US" sz="800" dirty="0"/>
           </a:p>
@@ -39488,7 +40719,7 @@
                 <a:ea typeface="Calibri" pitchFamily="34" charset="-122"/>
                 <a:cs typeface="Calibri" pitchFamily="34" charset="-120"/>
               </a:rPr>
-              <a:t>Word Labs  •  wordlabs.app  •  Root: 'fix' = to fasten, attach, or set</a:t>
+              <a:t>Word Labs  •  wordlabs.app  •  Root: 'fix' = fasten, attach, make firm</a:t>
             </a:r>
             <a:endParaRPr lang="en-US" sz="800" dirty="0"/>
           </a:p>
@@ -39805,7 +41036,7 @@
                 <a:ea typeface="Calibri" pitchFamily="34" charset="-122"/>
                 <a:cs typeface="Calibri" pitchFamily="34" charset="-120"/>
               </a:rPr>
-              <a:t>Something that has been fastened firmly in place or repaired.</a:t>
+              <a:t>Firmly attached or not able to be moved.</a:t>
             </a:r>
             <a:endParaRPr lang="en-US" sz="1200" dirty="0"/>
           </a:p>
@@ -39944,7 +41175,7 @@
                 <a:ea typeface="Calibri" pitchFamily="34" charset="-122"/>
                 <a:cs typeface="Calibri" pitchFamily="34" charset="-120"/>
               </a:rPr>
-              <a:t>A letter or group of letters added to a word to change its meaning — it can go at the start or end.</a:t>
+              <a:t>A letter or group of letters attached to a word to change its meaning.</a:t>
             </a:r>
             <a:endParaRPr lang="en-US" sz="1200" dirty="0"/>
           </a:p>
@@ -40083,7 +41314,7 @@
                 <a:ea typeface="Calibri" pitchFamily="34" charset="-122"/>
                 <a:cs typeface="Calibri" pitchFamily="34" charset="-120"/>
               </a:rPr>
-              <a:t>Something that is permanently attached or fastened to a building or place.</a:t>
+              <a:t>The act of repairing or attaching something firmly.</a:t>
             </a:r>
             <a:endParaRPr lang="en-US" sz="1200" dirty="0"/>
           </a:p>
@@ -40156,7 +41387,7 @@
                 <a:ea typeface="Trebuchet MS" pitchFamily="34" charset="-122"/>
                 <a:cs typeface="Trebuchet MS" pitchFamily="34" charset="-120"/>
               </a:rPr>
-              <a:t>fixture</a:t>
+              <a:t>fixing</a:t>
             </a:r>
             <a:endParaRPr lang="en-US" sz="1200" dirty="0"/>
           </a:p>
@@ -40222,7 +41453,7 @@
                 <a:ea typeface="Calibri" pitchFamily="34" charset="-122"/>
                 <a:cs typeface="Calibri" pitchFamily="34" charset="-120"/>
               </a:rPr>
-              <a:t>Letters placed before a root word that change or add to its meaning.</a:t>
+              <a:t>Letters placed before a root word, like 'un' in 'unhappy'.</a:t>
             </a:r>
             <a:endParaRPr lang="en-US" sz="1200" dirty="0"/>
           </a:p>
@@ -40361,7 +41592,7 @@
                 <a:ea typeface="Calibri" pitchFamily="34" charset="-122"/>
                 <a:cs typeface="Calibri" pitchFamily="34" charset="-120"/>
               </a:rPr>
-              <a:t>When someone is extremely focused on or attached to one particular thing.</a:t>
+              <a:t>A very strong focus or attachment to something.</a:t>
             </a:r>
             <a:endParaRPr lang="en-US" sz="1200" dirty="0"/>
           </a:p>
@@ -40792,7 +42023,7 @@
                 <a:ea typeface="Calibri" pitchFamily="34" charset="-122"/>
                 <a:cs typeface="Calibri" pitchFamily="34" charset="-120"/>
               </a:rPr>
-              <a:t>Word Labs  •  wordlabs.app  •  Root: 'fix' = to fasten, attach, or set</a:t>
+              <a:t>Word Labs  •  wordlabs.app  •  Root: 'fix' = fasten, attach, make firm</a:t>
             </a:r>
             <a:endParaRPr lang="en-US" sz="800" dirty="0"/>
           </a:p>
@@ -40995,7 +42226,7 @@
                 <a:ea typeface="Calibri" pitchFamily="34" charset="-122"/>
                 <a:cs typeface="Calibri" pitchFamily="34" charset="-120"/>
               </a:rPr>
-              <a:t>The teacher explained that a prefix is a group of letters attached to the front of a word to change its meaning.</a:t>
+              <a:t>The teacher asked us to identify the prefix in the word 'unhappy' and explain how it changes the meaning.</a:t>
             </a:r>
             <a:endParaRPr lang="en-US" sz="1500" dirty="0"/>
           </a:p>
@@ -41159,7 +42390,7 @@
                 <a:ea typeface="Calibri" pitchFamily="34" charset="-122"/>
                 <a:cs typeface="Calibri" pitchFamily="34" charset="-120"/>
               </a:rPr>
-              <a:t>The plumber needed to fix the leaking pipe before it caused any more damage to the floor.</a:t>
+              <a:t>After the storm, the workers needed to fix the fence so it was firmly attached to the ground again.</a:t>
             </a:r>
             <a:endParaRPr lang="en-US" sz="1500" dirty="0"/>
           </a:p>
@@ -41323,7 +42554,7 @@
                 <a:ea typeface="Calibri" pitchFamily="34" charset="-122"/>
                 <a:cs typeface="Calibri" pitchFamily="34" charset="-120"/>
               </a:rPr>
-              <a:t>Jamie was completely transfixed by the magician's incredible tricks at the school carnival.</a:t>
+              <a:t>When the magician appeared on stage, the entire audience was transfixed and could not look away.</a:t>
             </a:r>
             <a:endParaRPr lang="en-US" sz="1500" dirty="0"/>
           </a:p>

--- a/output/wordlabs-fix-3day.pptx
+++ b/output/wordlabs-fix-3day.pptx
@@ -21855,11 +21855,11 @@
         <p:spPr>
           <a:xfrm>
             <a:off x="1874520" y="4096512"/>
-            <a:ext cx="6903720" cy="804672"/>
+            <a:ext cx="6903720" cy="658368"/>
           </a:xfrm>
           <a:prstGeom prst="rect">
             <a:avLst>
-              <a:gd name="adj" fmla="val 6818"/>
+              <a:gd name="adj" fmla="val 8333"/>
             </a:avLst>
           </a:prstGeom>
           <a:solidFill>
@@ -21881,12 +21881,12 @@
         </p:nvSpPr>
         <p:spPr>
           <a:xfrm>
-            <a:off x="1951330" y="4169664"/>
-            <a:ext cx="676656" cy="384048"/>
+            <a:off x="1951828" y="4169664"/>
+            <a:ext cx="603504" cy="475488"/>
           </a:xfrm>
           <a:prstGeom prst="rect">
             <a:avLst>
-              <a:gd name="adj" fmla="val 9524"/>
+              <a:gd name="adj" fmla="val 7692"/>
             </a:avLst>
           </a:prstGeom>
           <a:solidFill>
@@ -21908,8 +21908,8 @@
         </p:nvSpPr>
         <p:spPr>
           <a:xfrm>
-            <a:off x="1951330" y="4169664"/>
-            <a:ext cx="676656" cy="384048"/>
+            <a:off x="1951828" y="4169664"/>
+            <a:ext cx="603504" cy="475488"/>
           </a:xfrm>
           <a:prstGeom prst="rect">
             <a:avLst/>
@@ -21947,12 +21947,12 @@
         </p:nvSpPr>
         <p:spPr>
           <a:xfrm>
-            <a:off x="2677363" y="4169664"/>
-            <a:ext cx="676656" cy="384048"/>
+            <a:off x="2605209" y="4169664"/>
+            <a:ext cx="603504" cy="475488"/>
           </a:xfrm>
           <a:prstGeom prst="rect">
             <a:avLst>
-              <a:gd name="adj" fmla="val 9524"/>
+              <a:gd name="adj" fmla="val 7692"/>
             </a:avLst>
           </a:prstGeom>
           <a:solidFill>
@@ -21974,8 +21974,8 @@
         </p:nvSpPr>
         <p:spPr>
           <a:xfrm>
-            <a:off x="2677363" y="4169664"/>
-            <a:ext cx="676656" cy="384048"/>
+            <a:off x="2605209" y="4169664"/>
+            <a:ext cx="603504" cy="475488"/>
           </a:xfrm>
           <a:prstGeom prst="rect">
             <a:avLst/>
@@ -22013,12 +22013,12 @@
         </p:nvSpPr>
         <p:spPr>
           <a:xfrm>
-            <a:off x="3403397" y="4169664"/>
-            <a:ext cx="676656" cy="384048"/>
+            <a:off x="3258589" y="4169664"/>
+            <a:ext cx="603504" cy="475488"/>
           </a:xfrm>
           <a:prstGeom prst="rect">
             <a:avLst>
-              <a:gd name="adj" fmla="val 9524"/>
+              <a:gd name="adj" fmla="val 7692"/>
             </a:avLst>
           </a:prstGeom>
           <a:solidFill>
@@ -22040,8 +22040,8 @@
         </p:nvSpPr>
         <p:spPr>
           <a:xfrm>
-            <a:off x="3403397" y="4169664"/>
-            <a:ext cx="676656" cy="384048"/>
+            <a:off x="3258589" y="4169664"/>
+            <a:ext cx="603504" cy="475488"/>
           </a:xfrm>
           <a:prstGeom prst="rect">
             <a:avLst/>
@@ -22079,12 +22079,12 @@
         </p:nvSpPr>
         <p:spPr>
           <a:xfrm>
-            <a:off x="4129430" y="4169664"/>
-            <a:ext cx="676656" cy="384048"/>
+            <a:off x="3911969" y="4169664"/>
+            <a:ext cx="603504" cy="475488"/>
           </a:xfrm>
           <a:prstGeom prst="rect">
             <a:avLst>
-              <a:gd name="adj" fmla="val 9524"/>
+              <a:gd name="adj" fmla="val 7692"/>
             </a:avLst>
           </a:prstGeom>
           <a:solidFill>
@@ -22106,8 +22106,8 @@
         </p:nvSpPr>
         <p:spPr>
           <a:xfrm>
-            <a:off x="4129430" y="4169664"/>
-            <a:ext cx="676656" cy="384048"/>
+            <a:off x="3911969" y="4169664"/>
+            <a:ext cx="603504" cy="475488"/>
           </a:xfrm>
           <a:prstGeom prst="rect">
             <a:avLst/>
@@ -22145,12 +22145,12 @@
         </p:nvSpPr>
         <p:spPr>
           <a:xfrm>
-            <a:off x="4855464" y="4169664"/>
-            <a:ext cx="676656" cy="384048"/>
+            <a:off x="4565350" y="4169664"/>
+            <a:ext cx="603504" cy="475488"/>
           </a:xfrm>
           <a:prstGeom prst="rect">
             <a:avLst>
-              <a:gd name="adj" fmla="val 9524"/>
+              <a:gd name="adj" fmla="val 7692"/>
             </a:avLst>
           </a:prstGeom>
           <a:solidFill>
@@ -22172,8 +22172,8 @@
         </p:nvSpPr>
         <p:spPr>
           <a:xfrm>
-            <a:off x="4855464" y="4169664"/>
-            <a:ext cx="676656" cy="384048"/>
+            <a:off x="4565350" y="4169664"/>
+            <a:ext cx="603504" cy="475488"/>
           </a:xfrm>
           <a:prstGeom prst="rect">
             <a:avLst/>
@@ -22211,12 +22211,12 @@
         </p:nvSpPr>
         <p:spPr>
           <a:xfrm>
-            <a:off x="5581498" y="4169664"/>
-            <a:ext cx="676656" cy="384048"/>
+            <a:off x="5218730" y="4169664"/>
+            <a:ext cx="603504" cy="475488"/>
           </a:xfrm>
           <a:prstGeom prst="rect">
             <a:avLst>
-              <a:gd name="adj" fmla="val 9524"/>
+              <a:gd name="adj" fmla="val 7692"/>
             </a:avLst>
           </a:prstGeom>
           <a:solidFill>
@@ -22238,8 +22238,8 @@
         </p:nvSpPr>
         <p:spPr>
           <a:xfrm>
-            <a:off x="5581498" y="4169664"/>
-            <a:ext cx="676656" cy="384048"/>
+            <a:off x="5218730" y="4169664"/>
+            <a:ext cx="603504" cy="475488"/>
           </a:xfrm>
           <a:prstGeom prst="rect">
             <a:avLst/>
@@ -22277,12 +22277,12 @@
         </p:nvSpPr>
         <p:spPr>
           <a:xfrm>
-            <a:off x="6307531" y="4169664"/>
-            <a:ext cx="676656" cy="384048"/>
+            <a:off x="5872111" y="4169664"/>
+            <a:ext cx="603504" cy="475488"/>
           </a:xfrm>
           <a:prstGeom prst="rect">
             <a:avLst>
-              <a:gd name="adj" fmla="val 9524"/>
+              <a:gd name="adj" fmla="val 7692"/>
             </a:avLst>
           </a:prstGeom>
           <a:solidFill>
@@ -22304,8 +22304,8 @@
         </p:nvSpPr>
         <p:spPr>
           <a:xfrm>
-            <a:off x="6307531" y="4169664"/>
-            <a:ext cx="676656" cy="384048"/>
+            <a:off x="5872111" y="4169664"/>
+            <a:ext cx="603504" cy="475488"/>
           </a:xfrm>
           <a:prstGeom prst="rect">
             <a:avLst/>
@@ -22343,12 +22343,12 @@
         </p:nvSpPr>
         <p:spPr>
           <a:xfrm>
-            <a:off x="7033565" y="4169664"/>
-            <a:ext cx="676656" cy="384048"/>
+            <a:off x="6525491" y="4169664"/>
+            <a:ext cx="603504" cy="475488"/>
           </a:xfrm>
           <a:prstGeom prst="rect">
             <a:avLst>
-              <a:gd name="adj" fmla="val 9524"/>
+              <a:gd name="adj" fmla="val 7692"/>
             </a:avLst>
           </a:prstGeom>
           <a:solidFill>
@@ -22370,8 +22370,8 @@
         </p:nvSpPr>
         <p:spPr>
           <a:xfrm>
-            <a:off x="7033565" y="4169664"/>
-            <a:ext cx="676656" cy="384048"/>
+            <a:off x="6525491" y="4169664"/>
+            <a:ext cx="603504" cy="475488"/>
           </a:xfrm>
           <a:prstGeom prst="rect">
             <a:avLst/>
@@ -22403,57 +22403,18 @@
       </p:sp>
       <p:sp>
         <p:nvSpPr>
-          <p:cNvPr id="52" name="Text 50"/>
-          <p:cNvSpPr/>
-          <p:nvPr/>
-        </p:nvSpPr>
-        <p:spPr>
-          <a:xfrm>
-            <a:off x="7033565" y="4572000"/>
-            <a:ext cx="676656" cy="219456"/>
-          </a:xfrm>
-          <a:prstGeom prst="rect">
-            <a:avLst/>
-          </a:prstGeom>
-          <a:noFill/>
-          <a:ln/>
-        </p:spPr>
-        <p:txBody>
-          <a:bodyPr wrap="square" lIns="0" tIns="0" rIns="0" bIns="0" rtlCol="0" anchor="t"/>
-          <a:lstStyle/>
-          <a:p>
-            <a:pPr algn="ctr" indent="0" marL="0">
-              <a:buNone/>
-            </a:pPr>
-            <a:r>
-              <a:rPr lang="en-US" sz="750" i="1" dirty="0">
-                <a:solidFill>
-                  <a:srgbClr val="94A3B8"/>
-                </a:solidFill>
-                <a:latin typeface="Calibri" pitchFamily="34" charset="0"/>
-                <a:ea typeface="Calibri" pitchFamily="34" charset="-122"/>
-                <a:cs typeface="Calibri" pitchFamily="34" charset="-120"/>
-              </a:rPr>
-              <a:t>/ks/</a:t>
-            </a:r>
-            <a:endParaRPr lang="en-US" sz="750" dirty="0"/>
-          </a:p>
-        </p:txBody>
-      </p:sp>
-      <p:sp>
-        <p:nvSpPr>
-          <p:cNvPr id="53" name="Shape 51"/>
-          <p:cNvSpPr/>
-          <p:nvPr/>
-        </p:nvSpPr>
-        <p:spPr>
-          <a:xfrm>
-            <a:off x="7759598" y="4169664"/>
-            <a:ext cx="676656" cy="384048"/>
+          <p:cNvPr id="52" name="Shape 50"/>
+          <p:cNvSpPr/>
+          <p:nvPr/>
+        </p:nvSpPr>
+        <p:spPr>
+          <a:xfrm>
+            <a:off x="7178871" y="4169664"/>
+            <a:ext cx="603504" cy="475488"/>
           </a:xfrm>
           <a:prstGeom prst="rect">
             <a:avLst>
-              <a:gd name="adj" fmla="val 9524"/>
+              <a:gd name="adj" fmla="val 7692"/>
             </a:avLst>
           </a:prstGeom>
           <a:solidFill>
@@ -22469,14 +22430,14 @@
       </p:sp>
       <p:sp>
         <p:nvSpPr>
-          <p:cNvPr id="54" name="Text 52"/>
-          <p:cNvSpPr/>
-          <p:nvPr/>
-        </p:nvSpPr>
-        <p:spPr>
-          <a:xfrm>
-            <a:off x="7759598" y="4169664"/>
-            <a:ext cx="676656" cy="384048"/>
+          <p:cNvPr id="53" name="Text 51"/>
+          <p:cNvSpPr/>
+          <p:nvPr/>
+        </p:nvSpPr>
+        <p:spPr>
+          <a:xfrm>
+            <a:off x="7178871" y="4169664"/>
+            <a:ext cx="603504" cy="475488"/>
           </a:xfrm>
           <a:prstGeom prst="rect">
             <a:avLst/>
@@ -22500,7 +22461,73 @@
                 <a:ea typeface="Trebuchet MS" pitchFamily="34" charset="-122"/>
                 <a:cs typeface="Trebuchet MS" pitchFamily="34" charset="-120"/>
               </a:rPr>
-              <a:t>t</a:t>
+              <a:t>e</a:t>
+            </a:r>
+            <a:endParaRPr lang="en-US" sz="900" dirty="0"/>
+          </a:p>
+        </p:txBody>
+      </p:sp>
+      <p:sp>
+        <p:nvSpPr>
+          <p:cNvPr id="54" name="Shape 52"/>
+          <p:cNvSpPr/>
+          <p:nvPr/>
+        </p:nvSpPr>
+        <p:spPr>
+          <a:xfrm>
+            <a:off x="7832252" y="4169664"/>
+            <a:ext cx="603504" cy="475488"/>
+          </a:xfrm>
+          <a:prstGeom prst="rect">
+            <a:avLst>
+              <a:gd name="adj" fmla="val 7692"/>
+            </a:avLst>
+          </a:prstGeom>
+          <a:solidFill>
+            <a:srgbClr val="FFFFFF"/>
+          </a:solidFill>
+          <a:ln w="12700">
+            <a:solidFill>
+              <a:srgbClr val="DB2777"/>
+            </a:solidFill>
+            <a:prstDash val="solid"/>
+          </a:ln>
+        </p:spPr>
+      </p:sp>
+      <p:sp>
+        <p:nvSpPr>
+          <p:cNvPr id="55" name="Text 53"/>
+          <p:cNvSpPr/>
+          <p:nvPr/>
+        </p:nvSpPr>
+        <p:spPr>
+          <a:xfrm>
+            <a:off x="7832252" y="4169664"/>
+            <a:ext cx="603504" cy="475488"/>
+          </a:xfrm>
+          <a:prstGeom prst="rect">
+            <a:avLst/>
+          </a:prstGeom>
+          <a:noFill/>
+          <a:ln/>
+        </p:spPr>
+        <p:txBody>
+          <a:bodyPr wrap="square" lIns="0" tIns="0" rIns="0" bIns="0" rtlCol="0" anchor="ctr"/>
+          <a:lstStyle/>
+          <a:p>
+            <a:pPr algn="ctr" indent="0" marL="0">
+              <a:buNone/>
+            </a:pPr>
+            <a:r>
+              <a:rPr lang="en-US" sz="900" b="1" dirty="0">
+                <a:solidFill>
+                  <a:srgbClr val="9D174D"/>
+                </a:solidFill>
+                <a:latin typeface="Trebuchet MS" pitchFamily="34" charset="0"/>
+                <a:ea typeface="Trebuchet MS" pitchFamily="34" charset="-122"/>
+                <a:cs typeface="Trebuchet MS" pitchFamily="34" charset="-120"/>
+              </a:rPr>
+              <a:t>d</a:t>
             </a:r>
             <a:endParaRPr lang="en-US" sz="900" dirty="0"/>
           </a:p>
@@ -27667,11 +27694,11 @@
         <p:spPr>
           <a:xfrm>
             <a:off x="1874520" y="4096512"/>
-            <a:ext cx="6903720" cy="804672"/>
+            <a:ext cx="6903720" cy="658368"/>
           </a:xfrm>
           <a:prstGeom prst="rect">
             <a:avLst>
-              <a:gd name="adj" fmla="val 6818"/>
+              <a:gd name="adj" fmla="val 8333"/>
             </a:avLst>
           </a:prstGeom>
           <a:solidFill>
@@ -27693,12 +27720,12 @@
         </p:nvSpPr>
         <p:spPr>
           <a:xfrm>
-            <a:off x="2427732" y="4169664"/>
-            <a:ext cx="685800" cy="384048"/>
+            <a:off x="2254649" y="4169664"/>
+            <a:ext cx="685800" cy="475488"/>
           </a:xfrm>
           <a:prstGeom prst="rect">
             <a:avLst>
-              <a:gd name="adj" fmla="val 9524"/>
+              <a:gd name="adj" fmla="val 7692"/>
             </a:avLst>
           </a:prstGeom>
           <a:solidFill>
@@ -27720,8 +27747,8 @@
         </p:nvSpPr>
         <p:spPr>
           <a:xfrm>
-            <a:off x="2427732" y="4169664"/>
-            <a:ext cx="685800" cy="384048"/>
+            <a:off x="2254649" y="4169664"/>
+            <a:ext cx="685800" cy="475488"/>
           </a:xfrm>
           <a:prstGeom prst="rect">
             <a:avLst/>
@@ -27759,12 +27786,12 @@
         </p:nvSpPr>
         <p:spPr>
           <a:xfrm>
-            <a:off x="3639312" y="4169664"/>
-            <a:ext cx="685800" cy="384048"/>
+            <a:off x="3293146" y="4169664"/>
+            <a:ext cx="685800" cy="475488"/>
           </a:xfrm>
           <a:prstGeom prst="rect">
             <a:avLst>
-              <a:gd name="adj" fmla="val 9524"/>
+              <a:gd name="adj" fmla="val 7692"/>
             </a:avLst>
           </a:prstGeom>
           <a:solidFill>
@@ -27786,8 +27813,8 @@
         </p:nvSpPr>
         <p:spPr>
           <a:xfrm>
-            <a:off x="3639312" y="4169664"/>
-            <a:ext cx="685800" cy="384048"/>
+            <a:off x="3293146" y="4169664"/>
+            <a:ext cx="685800" cy="475488"/>
           </a:xfrm>
           <a:prstGeom prst="rect">
             <a:avLst/>
@@ -27825,12 +27852,12 @@
         </p:nvSpPr>
         <p:spPr>
           <a:xfrm>
-            <a:off x="4850892" y="4169664"/>
-            <a:ext cx="685800" cy="384048"/>
+            <a:off x="4331643" y="4169664"/>
+            <a:ext cx="685800" cy="475488"/>
           </a:xfrm>
           <a:prstGeom prst="rect">
             <a:avLst>
-              <a:gd name="adj" fmla="val 9524"/>
+              <a:gd name="adj" fmla="val 7692"/>
             </a:avLst>
           </a:prstGeom>
           <a:solidFill>
@@ -27852,8 +27879,8 @@
         </p:nvSpPr>
         <p:spPr>
           <a:xfrm>
-            <a:off x="4850892" y="4169664"/>
-            <a:ext cx="685800" cy="384048"/>
+            <a:off x="4331643" y="4169664"/>
+            <a:ext cx="685800" cy="475488"/>
           </a:xfrm>
           <a:prstGeom prst="rect">
             <a:avLst/>
@@ -27891,12 +27918,12 @@
         </p:nvSpPr>
         <p:spPr>
           <a:xfrm>
-            <a:off x="6062472" y="4169664"/>
-            <a:ext cx="685800" cy="384048"/>
+            <a:off x="5370141" y="4169664"/>
+            <a:ext cx="685800" cy="475488"/>
           </a:xfrm>
           <a:prstGeom prst="rect">
             <a:avLst>
-              <a:gd name="adj" fmla="val 9524"/>
+              <a:gd name="adj" fmla="val 7692"/>
             </a:avLst>
           </a:prstGeom>
           <a:solidFill>
@@ -27918,8 +27945,8 @@
         </p:nvSpPr>
         <p:spPr>
           <a:xfrm>
-            <a:off x="6062472" y="4169664"/>
-            <a:ext cx="685800" cy="384048"/>
+            <a:off x="5370141" y="4169664"/>
+            <a:ext cx="685800" cy="475488"/>
           </a:xfrm>
           <a:prstGeom prst="rect">
             <a:avLst/>
@@ -27951,57 +27978,18 @@
       </p:sp>
       <p:sp>
         <p:nvSpPr>
-          <p:cNvPr id="45" name="Text 43"/>
-          <p:cNvSpPr/>
-          <p:nvPr/>
-        </p:nvSpPr>
-        <p:spPr>
-          <a:xfrm>
-            <a:off x="6062472" y="4572000"/>
-            <a:ext cx="685800" cy="219456"/>
-          </a:xfrm>
-          <a:prstGeom prst="rect">
-            <a:avLst/>
-          </a:prstGeom>
-          <a:noFill/>
-          <a:ln/>
-        </p:spPr>
-        <p:txBody>
-          <a:bodyPr wrap="square" lIns="0" tIns="0" rIns="0" bIns="0" rtlCol="0" anchor="t"/>
-          <a:lstStyle/>
-          <a:p>
-            <a:pPr algn="ctr" indent="0" marL="0">
-              <a:buNone/>
-            </a:pPr>
-            <a:r>
-              <a:rPr lang="en-US" sz="750" i="1" dirty="0">
-                <a:solidFill>
-                  <a:srgbClr val="94A3B8"/>
-                </a:solidFill>
-                <a:latin typeface="Calibri" pitchFamily="34" charset="0"/>
-                <a:ea typeface="Calibri" pitchFamily="34" charset="-122"/>
-                <a:cs typeface="Calibri" pitchFamily="34" charset="-120"/>
-              </a:rPr>
-              <a:t>/ks/</a:t>
-            </a:r>
-            <a:endParaRPr lang="en-US" sz="750" dirty="0"/>
-          </a:p>
-        </p:txBody>
-      </p:sp>
-      <p:sp>
-        <p:nvSpPr>
-          <p:cNvPr id="46" name="Shape 44"/>
-          <p:cNvSpPr/>
-          <p:nvPr/>
-        </p:nvSpPr>
-        <p:spPr>
-          <a:xfrm>
-            <a:off x="7274052" y="4169664"/>
-            <a:ext cx="685800" cy="384048"/>
+          <p:cNvPr id="45" name="Shape 43"/>
+          <p:cNvSpPr/>
+          <p:nvPr/>
+        </p:nvSpPr>
+        <p:spPr>
+          <a:xfrm>
+            <a:off x="6408638" y="4169664"/>
+            <a:ext cx="685800" cy="475488"/>
           </a:xfrm>
           <a:prstGeom prst="rect">
             <a:avLst>
-              <a:gd name="adj" fmla="val 9524"/>
+              <a:gd name="adj" fmla="val 7692"/>
             </a:avLst>
           </a:prstGeom>
           <a:solidFill>
@@ -28017,14 +28005,14 @@
       </p:sp>
       <p:sp>
         <p:nvSpPr>
-          <p:cNvPr id="47" name="Text 45"/>
-          <p:cNvSpPr/>
-          <p:nvPr/>
-        </p:nvSpPr>
-        <p:spPr>
-          <a:xfrm>
-            <a:off x="7274052" y="4169664"/>
-            <a:ext cx="685800" cy="384048"/>
+          <p:cNvPr id="46" name="Text 44"/>
+          <p:cNvSpPr/>
+          <p:nvPr/>
+        </p:nvSpPr>
+        <p:spPr>
+          <a:xfrm>
+            <a:off x="6408638" y="4169664"/>
+            <a:ext cx="685800" cy="475488"/>
           </a:xfrm>
           <a:prstGeom prst="rect">
             <a:avLst/>
@@ -28048,7 +28036,73 @@
                 <a:ea typeface="Trebuchet MS" pitchFamily="34" charset="-122"/>
                 <a:cs typeface="Trebuchet MS" pitchFamily="34" charset="-120"/>
               </a:rPr>
-              <a:t>t</a:t>
+              <a:t>e</a:t>
+            </a:r>
+            <a:endParaRPr lang="en-US" sz="900" dirty="0"/>
+          </a:p>
+        </p:txBody>
+      </p:sp>
+      <p:sp>
+        <p:nvSpPr>
+          <p:cNvPr id="47" name="Shape 45"/>
+          <p:cNvSpPr/>
+          <p:nvPr/>
+        </p:nvSpPr>
+        <p:spPr>
+          <a:xfrm>
+            <a:off x="7447135" y="4169664"/>
+            <a:ext cx="685800" cy="475488"/>
+          </a:xfrm>
+          <a:prstGeom prst="rect">
+            <a:avLst>
+              <a:gd name="adj" fmla="val 7692"/>
+            </a:avLst>
+          </a:prstGeom>
+          <a:solidFill>
+            <a:srgbClr val="FFFFFF"/>
+          </a:solidFill>
+          <a:ln w="12700">
+            <a:solidFill>
+              <a:srgbClr val="DB2777"/>
+            </a:solidFill>
+            <a:prstDash val="solid"/>
+          </a:ln>
+        </p:spPr>
+      </p:sp>
+      <p:sp>
+        <p:nvSpPr>
+          <p:cNvPr id="48" name="Text 46"/>
+          <p:cNvSpPr/>
+          <p:nvPr/>
+        </p:nvSpPr>
+        <p:spPr>
+          <a:xfrm>
+            <a:off x="7447135" y="4169664"/>
+            <a:ext cx="685800" cy="475488"/>
+          </a:xfrm>
+          <a:prstGeom prst="rect">
+            <a:avLst/>
+          </a:prstGeom>
+          <a:noFill/>
+          <a:ln/>
+        </p:spPr>
+        <p:txBody>
+          <a:bodyPr wrap="square" lIns="0" tIns="0" rIns="0" bIns="0" rtlCol="0" anchor="ctr"/>
+          <a:lstStyle/>
+          <a:p>
+            <a:pPr algn="ctr" indent="0" marL="0">
+              <a:buNone/>
+            </a:pPr>
+            <a:r>
+              <a:rPr lang="en-US" sz="900" b="1" dirty="0">
+                <a:solidFill>
+                  <a:srgbClr val="9D174D"/>
+                </a:solidFill>
+                <a:latin typeface="Trebuchet MS" pitchFamily="34" charset="0"/>
+                <a:ea typeface="Trebuchet MS" pitchFamily="34" charset="-122"/>
+                <a:cs typeface="Trebuchet MS" pitchFamily="34" charset="-120"/>
+              </a:rPr>
+              <a:t>d</a:t>
             </a:r>
             <a:endParaRPr lang="en-US" sz="900" dirty="0"/>
           </a:p>
@@ -37062,7 +37116,7 @@
                 <a:ea typeface="Calibri" pitchFamily="34" charset="-122"/>
                 <a:cs typeface="Calibri" pitchFamily="34" charset="-120"/>
               </a:rPr>
-              <a:t>1.  The word 'suffix' has nothing to do with the root 'fix'.</a:t>
+              <a:t>1.  The root 'fix' comes from a Latin word meaning to fasten or attach.</a:t>
             </a:r>
             <a:endParaRPr lang="en-US" sz="1300" dirty="0"/>
           </a:p>
@@ -37085,11 +37139,11 @@
             </a:avLst>
           </a:prstGeom>
           <a:solidFill>
-            <a:srgbClr val="FEE2E2"/>
-          </a:solidFill>
-          <a:ln w="12700">
-            <a:solidFill>
-              <a:srgbClr val="DC2626"/>
+            <a:srgbClr val="DCFCE7"/>
+          </a:solidFill>
+          <a:ln w="12700">
+            <a:solidFill>
+              <a:srgbClr val="16A34A"/>
             </a:solidFill>
             <a:prstDash val="solid"/>
           </a:ln>
@@ -37122,13 +37176,13 @@
             <a:r>
               <a:rPr lang="en-US" sz="1100" b="1" dirty="0">
                 <a:solidFill>
-                  <a:srgbClr val="DC2626"/>
+                  <a:srgbClr val="16A34A"/>
                 </a:solidFill>
                 <a:latin typeface="Trebuchet MS" pitchFamily="34" charset="0"/>
                 <a:ea typeface="Trebuchet MS" pitchFamily="34" charset="-122"/>
                 <a:cs typeface="Trebuchet MS" pitchFamily="34" charset="-120"/>
               </a:rPr>
-              <a:t>FALSE</a:t>
+              <a:t>TRUE</a:t>
             </a:r>
             <a:endParaRPr lang="en-US" sz="1100" dirty="0"/>
           </a:p>
@@ -37340,7 +37394,7 @@
                 <a:ea typeface="Calibri" pitchFamily="34" charset="-122"/>
                 <a:cs typeface="Calibri" pitchFamily="34" charset="-120"/>
               </a:rPr>
-              <a:t>3.  The word 'transfixed' means to be completely frozen with amazement.</a:t>
+              <a:t>3.  A prefix is a morpheme added before a root word.</a:t>
             </a:r>
             <a:endParaRPr lang="en-US" sz="1300" dirty="0"/>
           </a:p>
@@ -37479,7 +37533,7 @@
                 <a:ea typeface="Calibri" pitchFamily="34" charset="-122"/>
                 <a:cs typeface="Calibri" pitchFamily="34" charset="-120"/>
               </a:rPr>
-              <a:t>4.  A prefix is a morpheme added before a root word.</a:t>
+              <a:t>4.  The word 'transfixed' means to be completely frozen with amazement.</a:t>
             </a:r>
             <a:endParaRPr lang="en-US" sz="1300" dirty="0"/>
           </a:p>
@@ -37618,7 +37672,7 @@
                 <a:ea typeface="Calibri" pitchFamily="34" charset="-122"/>
                 <a:cs typeface="Calibri" pitchFamily="34" charset="-120"/>
               </a:rPr>
-              <a:t>5.  The root 'fix' comes from a Latin word meaning to fasten or attach.</a:t>
+              <a:t>5.  The word 'suffix' has nothing to do with the root 'fix'.</a:t>
             </a:r>
             <a:endParaRPr lang="en-US" sz="1300" dirty="0"/>
           </a:p>
@@ -37641,11 +37695,11 @@
             </a:avLst>
           </a:prstGeom>
           <a:solidFill>
-            <a:srgbClr val="DCFCE7"/>
-          </a:solidFill>
-          <a:ln w="12700">
-            <a:solidFill>
-              <a:srgbClr val="16A34A"/>
+            <a:srgbClr val="FEE2E2"/>
+          </a:solidFill>
+          <a:ln w="12700">
+            <a:solidFill>
+              <a:srgbClr val="DC2626"/>
             </a:solidFill>
             <a:prstDash val="solid"/>
           </a:ln>
@@ -37678,13 +37732,13 @@
             <a:r>
               <a:rPr lang="en-US" sz="1100" b="1" dirty="0">
                 <a:solidFill>
-                  <a:srgbClr val="16A34A"/>
+                  <a:srgbClr val="DC2626"/>
                 </a:solidFill>
                 <a:latin typeface="Trebuchet MS" pitchFamily="34" charset="0"/>
                 <a:ea typeface="Trebuchet MS" pitchFamily="34" charset="-122"/>
                 <a:cs typeface="Trebuchet MS" pitchFamily="34" charset="-120"/>
               </a:rPr>
-              <a:t>TRUE</a:t>
+              <a:t>FALSE</a:t>
             </a:r>
             <a:endParaRPr lang="en-US" sz="1100" dirty="0"/>
           </a:p>
